--- a/docs/slides/erasmusgpt-defence.pptx
+++ b/docs/slides/erasmusgpt-defence.pptx
@@ -16,6 +16,7 @@
     <p:sldId id="264" r:id="rId16"/>
     <p:sldId id="265" r:id="rId17"/>
     <p:sldId id="266" r:id="rId18"/>
+    <p:sldId id="267" r:id="rId19"/>
   </p:sldIdLst>
   <p:sldSz cx="12192000" cy="6858000" type="screen4x3"/>
   <p:notesSz cx="6858000" cy="9144000"/>
@@ -1387,7 +1388,7 @@
           <a:lstStyle/>
           <a:p>
             <a:r>
-              <a:t>B. Details in docs/06-defence-notes-b.md: the contract, the stub and real split, why SQLite, why the models are baked in.</a:t>
+              <a:t>A. From eval/report/errors.md. The most common failure is answering when it should decline, which is a threshold question rather than a ranking defect.</a:t>
             </a:r>
           </a:p>
         </p:txBody>
@@ -1457,6 +1458,76 @@
           <a:lstStyle/>
           <a:p>
             <a:r>
+              <a:t>B. Details in docs/06-defence-notes-b.md: the contract, the stub and real split, why SQLite, why the models are baked in.</a:t>
+            </a:r>
+          </a:p>
+        </p:txBody>
+      </p:sp>
+      <p:sp>
+        <p:nvSpPr>
+          <p:cNvPr id="4" name="Slide Number Placeholder 3"/>
+          <p:cNvSpPr>
+            <a:spLocks noGrp="1"/>
+          </p:cNvSpPr>
+          <p:nvPr>
+            <p:ph type="sldNum" idx="5" sz="quarter"/>
+          </p:nvPr>
+        </p:nvSpPr>
+        <p:spPr/>
+      </p:sp>
+    </p:spTree>
+  </p:cSld>
+  <p:clrMapOvr>
+    <a:masterClrMapping/>
+  </p:clrMapOvr>
+</p:notes>
+</file>
+
+<file path=ppt/notesSlides/notesSlide12.xml><?xml version="1.0" encoding="utf-8"?>
+<p:notes xmlns:a="http://schemas.openxmlformats.org/drawingml/2006/main" xmlns:p="http://schemas.openxmlformats.org/presentationml/2006/main" xmlns:r="http://schemas.openxmlformats.org/officeDocument/2006/relationships">
+  <p:cSld>
+    <p:spTree>
+      <p:nvGrpSpPr>
+        <p:cNvPr id="1" name=""/>
+        <p:cNvGrpSpPr/>
+        <p:nvPr/>
+      </p:nvGrpSpPr>
+      <p:grpSpPr>
+        <a:xfrm>
+          <a:off x="0" y="0"/>
+          <a:ext cx="0" cy="0"/>
+          <a:chOff x="0" y="0"/>
+          <a:chExt cx="0" cy="0"/>
+        </a:xfrm>
+      </p:grpSpPr>
+      <p:sp>
+        <p:nvSpPr>
+          <p:cNvPr id="2" name="Slide Image Placeholder 1"/>
+          <p:cNvSpPr>
+            <a:spLocks noGrp="1"/>
+          </p:cNvSpPr>
+          <p:nvPr>
+            <p:ph type="sldImg" idx="2"/>
+          </p:nvPr>
+        </p:nvSpPr>
+        <p:spPr/>
+      </p:sp>
+      <p:sp>
+        <p:nvSpPr>
+          <p:cNvPr id="3" name="Notes Placeholder 2"/>
+          <p:cNvSpPr>
+            <a:spLocks noGrp="1"/>
+          </p:cNvSpPr>
+          <p:nvPr>
+            <p:ph type="body" idx="3" sz="quarter"/>
+          </p:nvPr>
+        </p:nvSpPr>
+        <p:spPr/>
+        <p:txBody>
+          <a:bodyPr/>
+          <a:lstStyle/>
+          <a:p>
+            <a:r>
               <a:t>Both. A takes NLP and IR questions, B takes engineering questions.</a:t>
             </a:r>
           </a:p>
@@ -1667,7 +1738,7 @@
           <a:lstStyle/>
           <a:p>
             <a:r>
-              <a:t>B drives, A narrates the matches. Rehearsed offline (S7-AB2). If the demo fails, the README screenshots are the fallback.</a:t>
+              <a:t>B drives, A narrates the matches. Rehearsed offline (S7-AB2), script in docs/07-demo-script.md. If the demo fails, the screenshots taken during the rehearsal, in docs/screenshots/, are the fallback.</a:t>
             </a:r>
           </a:p>
         </p:txBody>
@@ -2017,7 +2088,7 @@
           <a:lstStyle/>
           <a:p>
             <a:r>
-              <a:t>A. From eval/report/errors.md. The most common failure is answering when it should decline, which is a threshold question rather than a ranking defect.</a:t>
+              <a:t>B. frontend/src/lib/score.ts, the calibrated and provisional flags on GET /api/v1/strategies, and GET /api/v1/evaluation. The point: the numbers are only as good as the labels, and the interface never claims more than that.</a:t>
             </a:r>
           </a:p>
         </p:txBody>
@@ -5791,7 +5862,7 @@
                 </a:solidFill>
                 <a:latin typeface="Cambria"/>
               </a:rPr>
-              <a:t>Engineering choices</a:t>
+              <a:t>Where it goes wrong</a:t>
             </a:r>
           </a:p>
         </p:txBody>
@@ -5804,8 +5875,63 @@
         </p:nvSpPr>
         <p:spPr>
           <a:xfrm>
+            <a:off x="9464040" y="457200"/>
+            <a:ext cx="2194560" cy="384048"/>
+          </a:xfrm>
+          <a:prstGeom prst="roundRect">
+            <a:avLst>
+              <a:gd name="adj" fmla="val 12000"/>
+            </a:avLst>
+          </a:prstGeom>
+          <a:solidFill>
+            <a:srgbClr val="F2B705"/>
+          </a:solidFill>
+          <a:ln>
+            <a:noFill/>
+          </a:ln>
+          <a:effectLst/>
+        </p:spPr>
+        <p:style>
+          <a:lnRef idx="1">
+            <a:schemeClr val="accent1"/>
+          </a:lnRef>
+          <a:fillRef idx="3">
+            <a:schemeClr val="accent1"/>
+          </a:fillRef>
+          <a:effectRef idx="2">
+            <a:schemeClr val="accent1"/>
+          </a:effectRef>
+          <a:fontRef idx="minor">
+            <a:schemeClr val="lt1"/>
+          </a:fontRef>
+        </p:style>
+        <p:txBody>
+          <a:bodyPr rtlCol="0" anchor="ctr" tIns="0" bIns="0"/>
+          <a:lstStyle/>
+          <a:p>
+            <a:pPr algn="ctr"/>
+            <a:r>
+              <a:rPr sz="1200" b="1">
+                <a:solidFill>
+                  <a:srgbClr val="14234B"/>
+                </a:solidFill>
+                <a:latin typeface="Calibri"/>
+              </a:rPr>
+              <a:t>PROVISIONAL LABELS</a:t>
+            </a:r>
+          </a:p>
+        </p:txBody>
+      </p:sp>
+      <p:sp>
+        <p:nvSpPr>
+          <p:cNvPr id="4" name="Rounded Rectangle 3"/>
+          <p:cNvSpPr/>
+          <p:nvPr/>
+        </p:nvSpPr>
+        <p:spPr>
+          <a:xfrm>
             <a:off x="548640" y="1463040"/>
-            <a:ext cx="11064240" cy="960120"/>
+            <a:ext cx="5394960" cy="2103120"/>
           </a:xfrm>
           <a:prstGeom prst="roundRect">
             <a:avLst>
@@ -5844,14 +5970,67 @@
       </p:sp>
       <p:sp>
         <p:nvSpPr>
-          <p:cNvPr id="4" name="TextBox 3"/>
+          <p:cNvPr id="5" name="Oval 4"/>
+          <p:cNvSpPr/>
+          <p:nvPr/>
+        </p:nvSpPr>
+        <p:spPr>
+          <a:xfrm>
+            <a:off x="822960" y="1737360"/>
+            <a:ext cx="502920" cy="502920"/>
+          </a:xfrm>
+          <a:prstGeom prst="ellipse">
+            <a:avLst/>
+          </a:prstGeom>
+          <a:solidFill>
+            <a:srgbClr val="14234B"/>
+          </a:solidFill>
+          <a:ln>
+            <a:noFill/>
+          </a:ln>
+          <a:effectLst/>
+        </p:spPr>
+        <p:style>
+          <a:lnRef idx="1">
+            <a:schemeClr val="accent1"/>
+          </a:lnRef>
+          <a:fillRef idx="3">
+            <a:schemeClr val="accent1"/>
+          </a:fillRef>
+          <a:effectRef idx="2">
+            <a:schemeClr val="accent1"/>
+          </a:effectRef>
+          <a:fontRef idx="minor">
+            <a:schemeClr val="lt1"/>
+          </a:fontRef>
+        </p:style>
+        <p:txBody>
+          <a:bodyPr rtlCol="0" anchor="ctr" lIns="0" rIns="0" tIns="0" bIns="0"/>
+          <a:lstStyle/>
+          <a:p>
+            <a:pPr algn="ctr"/>
+            <a:r>
+              <a:rPr sz="1800" b="1">
+                <a:solidFill>
+                  <a:srgbClr val="FFFFFF"/>
+                </a:solidFill>
+                <a:latin typeface="Cambria"/>
+              </a:rPr>
+              <a:t>1</a:t>
+            </a:r>
+          </a:p>
+        </p:txBody>
+      </p:sp>
+      <p:sp>
+        <p:nvSpPr>
+          <p:cNvPr id="6" name="TextBox 5"/>
           <p:cNvSpPr txBox="1"/>
           <p:nvPr/>
         </p:nvSpPr>
         <p:spPr>
           <a:xfrm>
-            <a:off x="822960" y="1554480"/>
-            <a:ext cx="3017520" cy="777240"/>
+            <a:off x="1554480" y="1764792"/>
+            <a:ext cx="4114800" cy="457200"/>
           </a:xfrm>
           <a:prstGeom prst="rect">
             <a:avLst/>
@@ -5859,7 +6038,7 @@
           <a:noFill/>
         </p:spPr>
         <p:txBody>
-          <a:bodyPr wrap="square" anchor="ctr" lIns="0" rIns="0" tIns="0" bIns="0">
+          <a:bodyPr wrap="square" anchor="t" lIns="0" rIns="0" tIns="0" bIns="0">
             <a:spAutoFit/>
           </a:bodyPr>
           <a:lstStyle/>
@@ -5876,21 +6055,21 @@
                 </a:solidFill>
                 <a:latin typeface="Cambria"/>
               </a:rPr>
-              <a:t>Frozen contract</a:t>
-            </a:r>
-          </a:p>
-        </p:txBody>
-      </p:sp>
-      <p:sp>
-        <p:nvSpPr>
-          <p:cNvPr id="5" name="TextBox 4"/>
+              <a:t>No equivalent exists</a:t>
+            </a:r>
+          </a:p>
+        </p:txBody>
+      </p:sp>
+      <p:sp>
+        <p:nvSpPr>
+          <p:cNvPr id="7" name="TextBox 6"/>
           <p:cNvSpPr txBox="1"/>
           <p:nvPr/>
         </p:nvSpPr>
         <p:spPr>
           <a:xfrm>
-            <a:off x="3931920" y="1554480"/>
-            <a:ext cx="7498079" cy="777240"/>
+            <a:off x="1554480" y="2286000"/>
+            <a:ext cx="4114800" cy="1188720"/>
           </a:xfrm>
           <a:prstGeom prst="rect">
             <a:avLst/>
@@ -5898,7 +6077,7 @@
           <a:noFill/>
         </p:spPr>
         <p:txBody>
-          <a:bodyPr wrap="square" anchor="ctr" lIns="0" rIns="0" tIns="0" bIns="0">
+          <a:bodyPr wrap="square" anchor="t" lIns="0" rIns="0" tIns="0" bIns="0">
             <a:spAutoFit/>
           </a:bodyPr>
           <a:lstStyle/>
@@ -5909,27 +6088,27 @@
               </a:spcAft>
             </a:pPr>
             <a:r>
-              <a:rPr sz="1500" b="0" i="0">
+              <a:rPr sz="1400" b="0" i="0">
                 <a:solidFill>
                   <a:srgbClr val="1F2433"/>
                 </a:solidFill>
                 <a:latin typeface="Calibri"/>
               </a:rPr>
-              <a:t>A Matcher protocol and a stub let the interface and the engine be built in parallel from day one.</a:t>
-            </a:r>
-          </a:p>
-        </p:txBody>
-      </p:sp>
-      <p:sp>
-        <p:nvSpPr>
-          <p:cNvPr id="6" name="Rounded Rectangle 5"/>
+              <a:t>Algebra against a computer science catalogue still returns five candidates. Ranking cannot say none of these; a confidence floor can.</a:t>
+            </a:r>
+          </a:p>
+        </p:txBody>
+      </p:sp>
+      <p:sp>
+        <p:nvSpPr>
+          <p:cNvPr id="8" name="Rounded Rectangle 7"/>
           <p:cNvSpPr/>
           <p:nvPr/>
         </p:nvSpPr>
         <p:spPr>
           <a:xfrm>
-            <a:off x="548640" y="2651760"/>
-            <a:ext cx="11064240" cy="960120"/>
+            <a:off x="6217920" y="1463040"/>
+            <a:ext cx="5394960" cy="2103120"/>
           </a:xfrm>
           <a:prstGeom prst="roundRect">
             <a:avLst>
@@ -5968,14 +6147,67 @@
       </p:sp>
       <p:sp>
         <p:nvSpPr>
-          <p:cNvPr id="7" name="TextBox 6"/>
+          <p:cNvPr id="9" name="Oval 8"/>
+          <p:cNvSpPr/>
+          <p:nvPr/>
+        </p:nvSpPr>
+        <p:spPr>
+          <a:xfrm>
+            <a:off x="6492240" y="1737360"/>
+            <a:ext cx="502920" cy="502920"/>
+          </a:xfrm>
+          <a:prstGeom prst="ellipse">
+            <a:avLst/>
+          </a:prstGeom>
+          <a:solidFill>
+            <a:srgbClr val="14234B"/>
+          </a:solidFill>
+          <a:ln>
+            <a:noFill/>
+          </a:ln>
+          <a:effectLst/>
+        </p:spPr>
+        <p:style>
+          <a:lnRef idx="1">
+            <a:schemeClr val="accent1"/>
+          </a:lnRef>
+          <a:fillRef idx="3">
+            <a:schemeClr val="accent1"/>
+          </a:fillRef>
+          <a:effectRef idx="2">
+            <a:schemeClr val="accent1"/>
+          </a:effectRef>
+          <a:fontRef idx="minor">
+            <a:schemeClr val="lt1"/>
+          </a:fontRef>
+        </p:style>
+        <p:txBody>
+          <a:bodyPr rtlCol="0" anchor="ctr" lIns="0" rIns="0" tIns="0" bIns="0"/>
+          <a:lstStyle/>
+          <a:p>
+            <a:pPr algn="ctr"/>
+            <a:r>
+              <a:rPr sz="1800" b="1">
+                <a:solidFill>
+                  <a:srgbClr val="FFFFFF"/>
+                </a:solidFill>
+                <a:latin typeface="Cambria"/>
+              </a:rPr>
+              <a:t>2</a:t>
+            </a:r>
+          </a:p>
+        </p:txBody>
+      </p:sp>
+      <p:sp>
+        <p:nvSpPr>
+          <p:cNvPr id="10" name="TextBox 9"/>
           <p:cNvSpPr txBox="1"/>
           <p:nvPr/>
         </p:nvSpPr>
         <p:spPr>
           <a:xfrm>
-            <a:off x="822960" y="2743200"/>
-            <a:ext cx="3017520" cy="777240"/>
+            <a:off x="7223760" y="1764792"/>
+            <a:ext cx="4114800" cy="457200"/>
           </a:xfrm>
           <a:prstGeom prst="rect">
             <a:avLst/>
@@ -5983,7 +6215,7 @@
           <a:noFill/>
         </p:spPr>
         <p:txBody>
-          <a:bodyPr wrap="square" anchor="ctr" lIns="0" rIns="0" tIns="0" bIns="0">
+          <a:bodyPr wrap="square" anchor="t" lIns="0" rIns="0" tIns="0" bIns="0">
             <a:spAutoFit/>
           </a:bodyPr>
           <a:lstStyle/>
@@ -6000,21 +6232,21 @@
                 </a:solidFill>
                 <a:latin typeface="Cambria"/>
               </a:rPr>
-              <a:t>Offline by design</a:t>
-            </a:r>
-          </a:p>
-        </p:txBody>
-      </p:sp>
-      <p:sp>
-        <p:nvSpPr>
-          <p:cNvPr id="8" name="TextBox 7"/>
+              <a:t>Granularity</a:t>
+            </a:r>
+          </a:p>
+        </p:txBody>
+      </p:sp>
+      <p:sp>
+        <p:nvSpPr>
+          <p:cNvPr id="11" name="TextBox 10"/>
           <p:cNvSpPr txBox="1"/>
           <p:nvPr/>
         </p:nvSpPr>
         <p:spPr>
           <a:xfrm>
-            <a:off x="3931920" y="2743200"/>
-            <a:ext cx="7498079" cy="777240"/>
+            <a:off x="7223760" y="2286000"/>
+            <a:ext cx="4114800" cy="1188720"/>
           </a:xfrm>
           <a:prstGeom prst="rect">
             <a:avLst/>
@@ -6022,7 +6254,7 @@
           <a:noFill/>
         </p:spPr>
         <p:txBody>
-          <a:bodyPr wrap="square" anchor="ctr" lIns="0" rIns="0" tIns="0" bIns="0">
+          <a:bodyPr wrap="square" anchor="t" lIns="0" rIns="0" tIns="0" bIns="0">
             <a:spAutoFit/>
           </a:bodyPr>
           <a:lstStyle/>
@@ -6033,27 +6265,27 @@
               </a:spcAft>
             </a:pPr>
             <a:r>
-              <a:rPr sz="1500" b="0" i="0">
+              <a:rPr sz="1400" b="0" i="0">
                 <a:solidFill>
                   <a:srgbClr val="1F2433"/>
                 </a:solidFill>
                 <a:latin typeface="Calibri"/>
               </a:rPr>
-              <a:t>Models baked into the image at build time; the runtime never touches the network.</a:t>
-            </a:r>
-          </a:p>
-        </p:txBody>
-      </p:sp>
-      <p:sp>
-        <p:nvSpPr>
-          <p:cNvPr id="9" name="Rounded Rectangle 8"/>
+              <a:t>The right answer is half of a 15 ECTS module, and the whole module description dilutes it.</a:t>
+            </a:r>
+          </a:p>
+        </p:txBody>
+      </p:sp>
+      <p:sp>
+        <p:nvSpPr>
+          <p:cNvPr id="12" name="Rounded Rectangle 11"/>
           <p:cNvSpPr/>
           <p:nvPr/>
         </p:nvSpPr>
         <p:spPr>
           <a:xfrm>
             <a:off x="548640" y="3840480"/>
-            <a:ext cx="11064240" cy="960120"/>
+            <a:ext cx="5394960" cy="2103120"/>
           </a:xfrm>
           <a:prstGeom prst="roundRect">
             <a:avLst>
@@ -6092,14 +6324,67 @@
       </p:sp>
       <p:sp>
         <p:nvSpPr>
-          <p:cNvPr id="10" name="TextBox 9"/>
+          <p:cNvPr id="13" name="Oval 12"/>
+          <p:cNvSpPr/>
+          <p:nvPr/>
+        </p:nvSpPr>
+        <p:spPr>
+          <a:xfrm>
+            <a:off x="822960" y="4114800"/>
+            <a:ext cx="502920" cy="502920"/>
+          </a:xfrm>
+          <a:prstGeom prst="ellipse">
+            <a:avLst/>
+          </a:prstGeom>
+          <a:solidFill>
+            <a:srgbClr val="14234B"/>
+          </a:solidFill>
+          <a:ln>
+            <a:noFill/>
+          </a:ln>
+          <a:effectLst/>
+        </p:spPr>
+        <p:style>
+          <a:lnRef idx="1">
+            <a:schemeClr val="accent1"/>
+          </a:lnRef>
+          <a:fillRef idx="3">
+            <a:schemeClr val="accent1"/>
+          </a:fillRef>
+          <a:effectRef idx="2">
+            <a:schemeClr val="accent1"/>
+          </a:effectRef>
+          <a:fontRef idx="minor">
+            <a:schemeClr val="lt1"/>
+          </a:fontRef>
+        </p:style>
+        <p:txBody>
+          <a:bodyPr rtlCol="0" anchor="ctr" lIns="0" rIns="0" tIns="0" bIns="0"/>
+          <a:lstStyle/>
+          <a:p>
+            <a:pPr algn="ctr"/>
+            <a:r>
+              <a:rPr sz="1800" b="1">
+                <a:solidFill>
+                  <a:srgbClr val="FFFFFF"/>
+                </a:solidFill>
+                <a:latin typeface="Cambria"/>
+              </a:rPr>
+              <a:t>3</a:t>
+            </a:r>
+          </a:p>
+        </p:txBody>
+      </p:sp>
+      <p:sp>
+        <p:nvSpPr>
+          <p:cNvPr id="14" name="TextBox 13"/>
           <p:cNvSpPr txBox="1"/>
           <p:nvPr/>
         </p:nvSpPr>
         <p:spPr>
           <a:xfrm>
-            <a:off x="822960" y="3931920"/>
-            <a:ext cx="3017520" cy="777240"/>
+            <a:off x="1554480" y="4142232"/>
+            <a:ext cx="4114800" cy="457200"/>
           </a:xfrm>
           <a:prstGeom prst="rect">
             <a:avLst/>
@@ -6107,7 +6392,7 @@
           <a:noFill/>
         </p:spPr>
         <p:txBody>
-          <a:bodyPr wrap="square" anchor="ctr" lIns="0" rIns="0" tIns="0" bIns="0">
+          <a:bodyPr wrap="square" anchor="t" lIns="0" rIns="0" tIns="0" bIns="0">
             <a:spAutoFit/>
           </a:bodyPr>
           <a:lstStyle/>
@@ -6124,21 +6409,21 @@
                 </a:solidFill>
                 <a:latin typeface="Cambria"/>
               </a:rPr>
-              <a:t>SQLite</a:t>
-            </a:r>
-          </a:p>
-        </p:txBody>
-      </p:sp>
-      <p:sp>
-        <p:nvSpPr>
-          <p:cNvPr id="11" name="TextBox 10"/>
+              <a:t>Look-alike projects</a:t>
+            </a:r>
+          </a:p>
+        </p:txBody>
+      </p:sp>
+      <p:sp>
+        <p:nvSpPr>
+          <p:cNvPr id="15" name="TextBox 14"/>
           <p:cNvSpPr txBox="1"/>
           <p:nvPr/>
         </p:nvSpPr>
         <p:spPr>
           <a:xfrm>
-            <a:off x="3931920" y="3931920"/>
-            <a:ext cx="7498079" cy="777240"/>
+            <a:off x="1554480" y="4663440"/>
+            <a:ext cx="4114800" cy="1188720"/>
           </a:xfrm>
           <a:prstGeom prst="rect">
             <a:avLst/>
@@ -6146,7 +6431,7 @@
           <a:noFill/>
         </p:spPr>
         <p:txBody>
-          <a:bodyPr wrap="square" anchor="ctr" lIns="0" rIns="0" tIns="0" bIns="0">
+          <a:bodyPr wrap="square" anchor="t" lIns="0" rIns="0" tIns="0" bIns="0">
             <a:spAutoFit/>
           </a:bodyPr>
           <a:lstStyle/>
@@ -6157,27 +6442,27 @@
               </a:spcAft>
             </a:pPr>
             <a:r>
-              <a:rPr sz="1500" b="0" i="0">
+              <a:rPr sz="1400" b="0" i="0">
                 <a:solidFill>
                   <a:srgbClr val="1F2433"/>
                 </a:solidFill>
                 <a:latin typeface="Calibri"/>
               </a:rPr>
-              <a:t>A few hundred courses: one file in a volume keeps compose to two services.</a:t>
-            </a:r>
-          </a:p>
-        </p:txBody>
-      </p:sp>
-      <p:sp>
-        <p:nvSpPr>
-          <p:cNvPr id="12" name="Rounded Rectangle 11"/>
+              <a:t>Project courses read alike across a catalogue, so the text cannot separate them.</a:t>
+            </a:r>
+          </a:p>
+        </p:txBody>
+      </p:sp>
+      <p:sp>
+        <p:nvSpPr>
+          <p:cNvPr id="16" name="Rounded Rectangle 15"/>
           <p:cNvSpPr/>
           <p:nvPr/>
         </p:nvSpPr>
         <p:spPr>
           <a:xfrm>
-            <a:off x="548640" y="5029200"/>
-            <a:ext cx="11064240" cy="960120"/>
+            <a:off x="6217920" y="3840480"/>
+            <a:ext cx="5394960" cy="2103120"/>
           </a:xfrm>
           <a:prstGeom prst="roundRect">
             <a:avLst>
@@ -6216,14 +6501,67 @@
       </p:sp>
       <p:sp>
         <p:nvSpPr>
-          <p:cNvPr id="13" name="TextBox 12"/>
+          <p:cNvPr id="17" name="Oval 16"/>
+          <p:cNvSpPr/>
+          <p:nvPr/>
+        </p:nvSpPr>
+        <p:spPr>
+          <a:xfrm>
+            <a:off x="6492240" y="4114800"/>
+            <a:ext cx="502920" cy="502920"/>
+          </a:xfrm>
+          <a:prstGeom prst="ellipse">
+            <a:avLst/>
+          </a:prstGeom>
+          <a:solidFill>
+            <a:srgbClr val="14234B"/>
+          </a:solidFill>
+          <a:ln>
+            <a:noFill/>
+          </a:ln>
+          <a:effectLst/>
+        </p:spPr>
+        <p:style>
+          <a:lnRef idx="1">
+            <a:schemeClr val="accent1"/>
+          </a:lnRef>
+          <a:fillRef idx="3">
+            <a:schemeClr val="accent1"/>
+          </a:fillRef>
+          <a:effectRef idx="2">
+            <a:schemeClr val="accent1"/>
+          </a:effectRef>
+          <a:fontRef idx="minor">
+            <a:schemeClr val="lt1"/>
+          </a:fontRef>
+        </p:style>
+        <p:txBody>
+          <a:bodyPr rtlCol="0" anchor="ctr" lIns="0" rIns="0" tIns="0" bIns="0"/>
+          <a:lstStyle/>
+          <a:p>
+            <a:pPr algn="ctr"/>
+            <a:r>
+              <a:rPr sz="1800" b="1">
+                <a:solidFill>
+                  <a:srgbClr val="FFFFFF"/>
+                </a:solidFill>
+                <a:latin typeface="Cambria"/>
+              </a:rPr>
+              <a:t>4</a:t>
+            </a:r>
+          </a:p>
+        </p:txBody>
+      </p:sp>
+      <p:sp>
+        <p:nvSpPr>
+          <p:cNvPr id="18" name="TextBox 17"/>
           <p:cNvSpPr txBox="1"/>
           <p:nvPr/>
         </p:nvSpPr>
         <p:spPr>
           <a:xfrm>
-            <a:off x="822960" y="5120640"/>
-            <a:ext cx="3017520" cy="777240"/>
+            <a:off x="7223760" y="4142232"/>
+            <a:ext cx="4114800" cy="457200"/>
           </a:xfrm>
           <a:prstGeom prst="rect">
             <a:avLst/>
@@ -6231,7 +6569,7 @@
           <a:noFill/>
         </p:spPr>
         <p:txBody>
-          <a:bodyPr wrap="square" anchor="ctr" lIns="0" rIns="0" tIns="0" bIns="0">
+          <a:bodyPr wrap="square" anchor="t" lIns="0" rIns="0" tIns="0" bIns="0">
             <a:spAutoFit/>
           </a:bodyPr>
           <a:lstStyle/>
@@ -6248,21 +6586,21 @@
                 </a:solidFill>
                 <a:latin typeface="Cambria"/>
               </a:rPr>
-              <a:t>Clean-machine build</a:t>
-            </a:r>
-          </a:p>
-        </p:txBody>
-      </p:sp>
-      <p:sp>
-        <p:nvSpPr>
-          <p:cNvPr id="14" name="TextBox 13"/>
+              <a:t>Level in the title</a:t>
+            </a:r>
+          </a:p>
+        </p:txBody>
+      </p:sp>
+      <p:sp>
+        <p:nvSpPr>
+          <p:cNvPr id="19" name="TextBox 18"/>
           <p:cNvSpPr txBox="1"/>
           <p:nvPr/>
         </p:nvSpPr>
         <p:spPr>
           <a:xfrm>
-            <a:off x="3931920" y="5120640"/>
-            <a:ext cx="7498079" cy="777240"/>
+            <a:off x="7223760" y="4663440"/>
+            <a:ext cx="4114800" cy="1188720"/>
           </a:xfrm>
           <a:prstGeom prst="rect">
             <a:avLst/>
@@ -6270,7 +6608,7 @@
           <a:noFill/>
         </p:spPr>
         <p:txBody>
-          <a:bodyPr wrap="square" anchor="ctr" lIns="0" rIns="0" tIns="0" bIns="0">
+          <a:bodyPr wrap="square" anchor="t" lIns="0" rIns="0" tIns="0" bIns="0">
             <a:spAutoFit/>
           </a:bodyPr>
           <a:lstStyle/>
@@ -6281,13 +6619,13 @@
               </a:spcAft>
             </a:pPr>
             <a:r>
-              <a:rPr sz="1500" b="0" i="0">
+              <a:rPr sz="1400" b="0" i="0">
                 <a:solidFill>
                   <a:srgbClr val="1F2433"/>
                 </a:solidFill>
                 <a:latin typeface="Calibri"/>
               </a:rPr>
-              <a:t>Fresh clone to running app measured at 297 s, recorded in the README.</a:t>
+              <a:t>Modelling and Programming 3 outranks 1: the sequence number is kept out of the embedding by design (ADR-0004).</a:t>
             </a:r>
           </a:p>
         </p:txBody>
@@ -6301,6 +6639,567 @@
 </file>
 
 <file path=ppt/slides/slide11.xml><?xml version="1.0" encoding="utf-8"?>
+<p:sld xmlns:a="http://schemas.openxmlformats.org/drawingml/2006/main" xmlns:p="http://schemas.openxmlformats.org/presentationml/2006/main" xmlns:r="http://schemas.openxmlformats.org/officeDocument/2006/relationships">
+  <p:cSld>
+    <p:bg>
+      <p:bgPr>
+        <a:solidFill>
+          <a:srgbClr val="FFFFFF"/>
+        </a:solidFill>
+        <a:effectLst/>
+      </p:bgPr>
+    </p:bg>
+    <p:spTree>
+      <p:nvGrpSpPr>
+        <p:cNvPr id="1" name=""/>
+        <p:cNvGrpSpPr/>
+        <p:nvPr/>
+      </p:nvGrpSpPr>
+      <p:grpSpPr/>
+      <p:sp>
+        <p:nvSpPr>
+          <p:cNvPr id="2" name="TextBox 1"/>
+          <p:cNvSpPr txBox="1"/>
+          <p:nvPr/>
+        </p:nvSpPr>
+        <p:spPr>
+          <a:xfrm>
+            <a:off x="548640" y="411480"/>
+            <a:ext cx="11064240" cy="822960"/>
+          </a:xfrm>
+          <a:prstGeom prst="rect">
+            <a:avLst/>
+          </a:prstGeom>
+          <a:noFill/>
+        </p:spPr>
+        <p:txBody>
+          <a:bodyPr wrap="square" anchor="t" lIns="0" rIns="0" tIns="0" bIns="0">
+            <a:spAutoFit/>
+          </a:bodyPr>
+          <a:lstStyle/>
+          <a:p>
+            <a:pPr algn="l">
+              <a:spcAft>
+                <a:spcPts val="800"/>
+              </a:spcAft>
+            </a:pPr>
+            <a:r>
+              <a:rPr sz="3600" b="1" i="0">
+                <a:solidFill>
+                  <a:srgbClr val="14234B"/>
+                </a:solidFill>
+                <a:latin typeface="Cambria"/>
+              </a:rPr>
+              <a:t>Engineering choices</a:t>
+            </a:r>
+          </a:p>
+        </p:txBody>
+      </p:sp>
+      <p:sp>
+        <p:nvSpPr>
+          <p:cNvPr id="3" name="Rounded Rectangle 2"/>
+          <p:cNvSpPr/>
+          <p:nvPr/>
+        </p:nvSpPr>
+        <p:spPr>
+          <a:xfrm>
+            <a:off x="548640" y="1463040"/>
+            <a:ext cx="11064240" cy="960120"/>
+          </a:xfrm>
+          <a:prstGeom prst="roundRect">
+            <a:avLst>
+              <a:gd name="adj" fmla="val 12000"/>
+            </a:avLst>
+          </a:prstGeom>
+          <a:solidFill>
+            <a:srgbClr val="EEF1F8"/>
+          </a:solidFill>
+          <a:ln>
+            <a:noFill/>
+          </a:ln>
+          <a:effectLst/>
+        </p:spPr>
+        <p:style>
+          <a:lnRef idx="1">
+            <a:schemeClr val="accent1"/>
+          </a:lnRef>
+          <a:fillRef idx="3">
+            <a:schemeClr val="accent1"/>
+          </a:fillRef>
+          <a:effectRef idx="2">
+            <a:schemeClr val="accent1"/>
+          </a:effectRef>
+          <a:fontRef idx="minor">
+            <a:schemeClr val="lt1"/>
+          </a:fontRef>
+        </p:style>
+        <p:txBody>
+          <a:bodyPr rtlCol="0" anchor="ctr"/>
+          <a:lstStyle/>
+          <a:p>
+            <a:pPr algn="ctr"/>
+          </a:p>
+        </p:txBody>
+      </p:sp>
+      <p:sp>
+        <p:nvSpPr>
+          <p:cNvPr id="4" name="TextBox 3"/>
+          <p:cNvSpPr txBox="1"/>
+          <p:nvPr/>
+        </p:nvSpPr>
+        <p:spPr>
+          <a:xfrm>
+            <a:off x="822960" y="1554480"/>
+            <a:ext cx="3017520" cy="777240"/>
+          </a:xfrm>
+          <a:prstGeom prst="rect">
+            <a:avLst/>
+          </a:prstGeom>
+          <a:noFill/>
+        </p:spPr>
+        <p:txBody>
+          <a:bodyPr wrap="square" anchor="ctr" lIns="0" rIns="0" tIns="0" bIns="0">
+            <a:spAutoFit/>
+          </a:bodyPr>
+          <a:lstStyle/>
+          <a:p>
+            <a:pPr algn="l">
+              <a:spcAft>
+                <a:spcPts val="800"/>
+              </a:spcAft>
+            </a:pPr>
+            <a:r>
+              <a:rPr sz="1800" b="1" i="0">
+                <a:solidFill>
+                  <a:srgbClr val="14234B"/>
+                </a:solidFill>
+                <a:latin typeface="Cambria"/>
+              </a:rPr>
+              <a:t>Frozen contract</a:t>
+            </a:r>
+          </a:p>
+        </p:txBody>
+      </p:sp>
+      <p:sp>
+        <p:nvSpPr>
+          <p:cNvPr id="5" name="TextBox 4"/>
+          <p:cNvSpPr txBox="1"/>
+          <p:nvPr/>
+        </p:nvSpPr>
+        <p:spPr>
+          <a:xfrm>
+            <a:off x="3931920" y="1554480"/>
+            <a:ext cx="7498079" cy="777240"/>
+          </a:xfrm>
+          <a:prstGeom prst="rect">
+            <a:avLst/>
+          </a:prstGeom>
+          <a:noFill/>
+        </p:spPr>
+        <p:txBody>
+          <a:bodyPr wrap="square" anchor="ctr" lIns="0" rIns="0" tIns="0" bIns="0">
+            <a:spAutoFit/>
+          </a:bodyPr>
+          <a:lstStyle/>
+          <a:p>
+            <a:pPr algn="l">
+              <a:spcAft>
+                <a:spcPts val="800"/>
+              </a:spcAft>
+            </a:pPr>
+            <a:r>
+              <a:rPr sz="1500" b="0" i="0">
+                <a:solidFill>
+                  <a:srgbClr val="1F2433"/>
+                </a:solidFill>
+                <a:latin typeface="Calibri"/>
+              </a:rPr>
+              <a:t>A Matcher protocol and a stub let the interface and the engine be built in parallel from day one.</a:t>
+            </a:r>
+          </a:p>
+        </p:txBody>
+      </p:sp>
+      <p:sp>
+        <p:nvSpPr>
+          <p:cNvPr id="6" name="Rounded Rectangle 5"/>
+          <p:cNvSpPr/>
+          <p:nvPr/>
+        </p:nvSpPr>
+        <p:spPr>
+          <a:xfrm>
+            <a:off x="548640" y="2651760"/>
+            <a:ext cx="11064240" cy="960120"/>
+          </a:xfrm>
+          <a:prstGeom prst="roundRect">
+            <a:avLst>
+              <a:gd name="adj" fmla="val 12000"/>
+            </a:avLst>
+          </a:prstGeom>
+          <a:solidFill>
+            <a:srgbClr val="EEF1F8"/>
+          </a:solidFill>
+          <a:ln>
+            <a:noFill/>
+          </a:ln>
+          <a:effectLst/>
+        </p:spPr>
+        <p:style>
+          <a:lnRef idx="1">
+            <a:schemeClr val="accent1"/>
+          </a:lnRef>
+          <a:fillRef idx="3">
+            <a:schemeClr val="accent1"/>
+          </a:fillRef>
+          <a:effectRef idx="2">
+            <a:schemeClr val="accent1"/>
+          </a:effectRef>
+          <a:fontRef idx="minor">
+            <a:schemeClr val="lt1"/>
+          </a:fontRef>
+        </p:style>
+        <p:txBody>
+          <a:bodyPr rtlCol="0" anchor="ctr"/>
+          <a:lstStyle/>
+          <a:p>
+            <a:pPr algn="ctr"/>
+          </a:p>
+        </p:txBody>
+      </p:sp>
+      <p:sp>
+        <p:nvSpPr>
+          <p:cNvPr id="7" name="TextBox 6"/>
+          <p:cNvSpPr txBox="1"/>
+          <p:nvPr/>
+        </p:nvSpPr>
+        <p:spPr>
+          <a:xfrm>
+            <a:off x="822960" y="2743200"/>
+            <a:ext cx="3017520" cy="777240"/>
+          </a:xfrm>
+          <a:prstGeom prst="rect">
+            <a:avLst/>
+          </a:prstGeom>
+          <a:noFill/>
+        </p:spPr>
+        <p:txBody>
+          <a:bodyPr wrap="square" anchor="ctr" lIns="0" rIns="0" tIns="0" bIns="0">
+            <a:spAutoFit/>
+          </a:bodyPr>
+          <a:lstStyle/>
+          <a:p>
+            <a:pPr algn="l">
+              <a:spcAft>
+                <a:spcPts val="800"/>
+              </a:spcAft>
+            </a:pPr>
+            <a:r>
+              <a:rPr sz="1800" b="1" i="0">
+                <a:solidFill>
+                  <a:srgbClr val="14234B"/>
+                </a:solidFill>
+                <a:latin typeface="Cambria"/>
+              </a:rPr>
+              <a:t>Offline by design</a:t>
+            </a:r>
+          </a:p>
+        </p:txBody>
+      </p:sp>
+      <p:sp>
+        <p:nvSpPr>
+          <p:cNvPr id="8" name="TextBox 7"/>
+          <p:cNvSpPr txBox="1"/>
+          <p:nvPr/>
+        </p:nvSpPr>
+        <p:spPr>
+          <a:xfrm>
+            <a:off x="3931920" y="2743200"/>
+            <a:ext cx="7498079" cy="777240"/>
+          </a:xfrm>
+          <a:prstGeom prst="rect">
+            <a:avLst/>
+          </a:prstGeom>
+          <a:noFill/>
+        </p:spPr>
+        <p:txBody>
+          <a:bodyPr wrap="square" anchor="ctr" lIns="0" rIns="0" tIns="0" bIns="0">
+            <a:spAutoFit/>
+          </a:bodyPr>
+          <a:lstStyle/>
+          <a:p>
+            <a:pPr algn="l">
+              <a:spcAft>
+                <a:spcPts val="800"/>
+              </a:spcAft>
+            </a:pPr>
+            <a:r>
+              <a:rPr sz="1500" b="0" i="0">
+                <a:solidFill>
+                  <a:srgbClr val="1F2433"/>
+                </a:solidFill>
+                <a:latin typeface="Calibri"/>
+              </a:rPr>
+              <a:t>Models baked into the image at build time; the runtime never touches the network.</a:t>
+            </a:r>
+          </a:p>
+        </p:txBody>
+      </p:sp>
+      <p:sp>
+        <p:nvSpPr>
+          <p:cNvPr id="9" name="Rounded Rectangle 8"/>
+          <p:cNvSpPr/>
+          <p:nvPr/>
+        </p:nvSpPr>
+        <p:spPr>
+          <a:xfrm>
+            <a:off x="548640" y="3840480"/>
+            <a:ext cx="11064240" cy="960120"/>
+          </a:xfrm>
+          <a:prstGeom prst="roundRect">
+            <a:avLst>
+              <a:gd name="adj" fmla="val 12000"/>
+            </a:avLst>
+          </a:prstGeom>
+          <a:solidFill>
+            <a:srgbClr val="EEF1F8"/>
+          </a:solidFill>
+          <a:ln>
+            <a:noFill/>
+          </a:ln>
+          <a:effectLst/>
+        </p:spPr>
+        <p:style>
+          <a:lnRef idx="1">
+            <a:schemeClr val="accent1"/>
+          </a:lnRef>
+          <a:fillRef idx="3">
+            <a:schemeClr val="accent1"/>
+          </a:fillRef>
+          <a:effectRef idx="2">
+            <a:schemeClr val="accent1"/>
+          </a:effectRef>
+          <a:fontRef idx="minor">
+            <a:schemeClr val="lt1"/>
+          </a:fontRef>
+        </p:style>
+        <p:txBody>
+          <a:bodyPr rtlCol="0" anchor="ctr"/>
+          <a:lstStyle/>
+          <a:p>
+            <a:pPr algn="ctr"/>
+          </a:p>
+        </p:txBody>
+      </p:sp>
+      <p:sp>
+        <p:nvSpPr>
+          <p:cNvPr id="10" name="TextBox 9"/>
+          <p:cNvSpPr txBox="1"/>
+          <p:nvPr/>
+        </p:nvSpPr>
+        <p:spPr>
+          <a:xfrm>
+            <a:off x="822960" y="3931920"/>
+            <a:ext cx="3017520" cy="777240"/>
+          </a:xfrm>
+          <a:prstGeom prst="rect">
+            <a:avLst/>
+          </a:prstGeom>
+          <a:noFill/>
+        </p:spPr>
+        <p:txBody>
+          <a:bodyPr wrap="square" anchor="ctr" lIns="0" rIns="0" tIns="0" bIns="0">
+            <a:spAutoFit/>
+          </a:bodyPr>
+          <a:lstStyle/>
+          <a:p>
+            <a:pPr algn="l">
+              <a:spcAft>
+                <a:spcPts val="800"/>
+              </a:spcAft>
+            </a:pPr>
+            <a:r>
+              <a:rPr sz="1800" b="1" i="0">
+                <a:solidFill>
+                  <a:srgbClr val="14234B"/>
+                </a:solidFill>
+                <a:latin typeface="Cambria"/>
+              </a:rPr>
+              <a:t>SQLite</a:t>
+            </a:r>
+          </a:p>
+        </p:txBody>
+      </p:sp>
+      <p:sp>
+        <p:nvSpPr>
+          <p:cNvPr id="11" name="TextBox 10"/>
+          <p:cNvSpPr txBox="1"/>
+          <p:nvPr/>
+        </p:nvSpPr>
+        <p:spPr>
+          <a:xfrm>
+            <a:off x="3931920" y="3931920"/>
+            <a:ext cx="7498079" cy="777240"/>
+          </a:xfrm>
+          <a:prstGeom prst="rect">
+            <a:avLst/>
+          </a:prstGeom>
+          <a:noFill/>
+        </p:spPr>
+        <p:txBody>
+          <a:bodyPr wrap="square" anchor="ctr" lIns="0" rIns="0" tIns="0" bIns="0">
+            <a:spAutoFit/>
+          </a:bodyPr>
+          <a:lstStyle/>
+          <a:p>
+            <a:pPr algn="l">
+              <a:spcAft>
+                <a:spcPts val="800"/>
+              </a:spcAft>
+            </a:pPr>
+            <a:r>
+              <a:rPr sz="1500" b="0" i="0">
+                <a:solidFill>
+                  <a:srgbClr val="1F2433"/>
+                </a:solidFill>
+                <a:latin typeface="Calibri"/>
+              </a:rPr>
+              <a:t>A few hundred courses: one file in a volume keeps compose to two services.</a:t>
+            </a:r>
+          </a:p>
+        </p:txBody>
+      </p:sp>
+      <p:sp>
+        <p:nvSpPr>
+          <p:cNvPr id="12" name="Rounded Rectangle 11"/>
+          <p:cNvSpPr/>
+          <p:nvPr/>
+        </p:nvSpPr>
+        <p:spPr>
+          <a:xfrm>
+            <a:off x="548640" y="5029200"/>
+            <a:ext cx="11064240" cy="960120"/>
+          </a:xfrm>
+          <a:prstGeom prst="roundRect">
+            <a:avLst>
+              <a:gd name="adj" fmla="val 12000"/>
+            </a:avLst>
+          </a:prstGeom>
+          <a:solidFill>
+            <a:srgbClr val="EEF1F8"/>
+          </a:solidFill>
+          <a:ln>
+            <a:noFill/>
+          </a:ln>
+          <a:effectLst/>
+        </p:spPr>
+        <p:style>
+          <a:lnRef idx="1">
+            <a:schemeClr val="accent1"/>
+          </a:lnRef>
+          <a:fillRef idx="3">
+            <a:schemeClr val="accent1"/>
+          </a:fillRef>
+          <a:effectRef idx="2">
+            <a:schemeClr val="accent1"/>
+          </a:effectRef>
+          <a:fontRef idx="minor">
+            <a:schemeClr val="lt1"/>
+          </a:fontRef>
+        </p:style>
+        <p:txBody>
+          <a:bodyPr rtlCol="0" anchor="ctr"/>
+          <a:lstStyle/>
+          <a:p>
+            <a:pPr algn="ctr"/>
+          </a:p>
+        </p:txBody>
+      </p:sp>
+      <p:sp>
+        <p:nvSpPr>
+          <p:cNvPr id="13" name="TextBox 12"/>
+          <p:cNvSpPr txBox="1"/>
+          <p:nvPr/>
+        </p:nvSpPr>
+        <p:spPr>
+          <a:xfrm>
+            <a:off x="822960" y="5120640"/>
+            <a:ext cx="3017520" cy="777240"/>
+          </a:xfrm>
+          <a:prstGeom prst="rect">
+            <a:avLst/>
+          </a:prstGeom>
+          <a:noFill/>
+        </p:spPr>
+        <p:txBody>
+          <a:bodyPr wrap="square" anchor="ctr" lIns="0" rIns="0" tIns="0" bIns="0">
+            <a:spAutoFit/>
+          </a:bodyPr>
+          <a:lstStyle/>
+          <a:p>
+            <a:pPr algn="l">
+              <a:spcAft>
+                <a:spcPts val="800"/>
+              </a:spcAft>
+            </a:pPr>
+            <a:r>
+              <a:rPr sz="1800" b="1" i="0">
+                <a:solidFill>
+                  <a:srgbClr val="14234B"/>
+                </a:solidFill>
+                <a:latin typeface="Cambria"/>
+              </a:rPr>
+              <a:t>Clean-machine build</a:t>
+            </a:r>
+          </a:p>
+        </p:txBody>
+      </p:sp>
+      <p:sp>
+        <p:nvSpPr>
+          <p:cNvPr id="14" name="TextBox 13"/>
+          <p:cNvSpPr txBox="1"/>
+          <p:nvPr/>
+        </p:nvSpPr>
+        <p:spPr>
+          <a:xfrm>
+            <a:off x="3931920" y="5120640"/>
+            <a:ext cx="7498079" cy="777240"/>
+          </a:xfrm>
+          <a:prstGeom prst="rect">
+            <a:avLst/>
+          </a:prstGeom>
+          <a:noFill/>
+        </p:spPr>
+        <p:txBody>
+          <a:bodyPr wrap="square" anchor="ctr" lIns="0" rIns="0" tIns="0" bIns="0">
+            <a:spAutoFit/>
+          </a:bodyPr>
+          <a:lstStyle/>
+          <a:p>
+            <a:pPr algn="l">
+              <a:spcAft>
+                <a:spcPts val="800"/>
+              </a:spcAft>
+            </a:pPr>
+            <a:r>
+              <a:rPr sz="1500" b="0" i="0">
+                <a:solidFill>
+                  <a:srgbClr val="1F2433"/>
+                </a:solidFill>
+                <a:latin typeface="Calibri"/>
+              </a:rPr>
+              <a:t>Fresh clone to running app measured at 297 s, recorded in the README.</a:t>
+            </a:r>
+          </a:p>
+        </p:txBody>
+      </p:sp>
+    </p:spTree>
+  </p:cSld>
+  <p:clrMapOvr>
+    <a:masterClrMapping/>
+  </p:clrMapOvr>
+</p:sld>
+</file>
+
+<file path=ppt/slides/slide12.xml><?xml version="1.0" encoding="utf-8"?>
 <p:sld xmlns:a="http://schemas.openxmlformats.org/drawingml/2006/main" xmlns:p="http://schemas.openxmlformats.org/presentationml/2006/main" xmlns:r="http://schemas.openxmlformats.org/officeDocument/2006/relationships">
   <p:cSld>
     <p:bg>
@@ -8988,7 +9887,7 @@
                 </a:solidFill>
                 <a:latin typeface="Calibri"/>
               </a:rPr>
-              <a:t>Switch to hybrid+ce, then open the evaluation page: the table behind the choice.</a:t>
+              <a:t>Compare one row against hybrid+ce, then open the evaluation page behind the choice.</a:t>
             </a:r>
           </a:p>
         </p:txBody>
@@ -11036,7 +11935,7 @@
                 </a:solidFill>
                 <a:latin typeface="Cambria"/>
               </a:rPr>
-              <a:t>Where it goes wrong</a:t>
+              <a:t>An interface that does not overstate</a:t>
             </a:r>
           </a:p>
         </p:txBody>
@@ -11044,61 +11943,6 @@
       <p:sp>
         <p:nvSpPr>
           <p:cNvPr id="3" name="Rounded Rectangle 2"/>
-          <p:cNvSpPr/>
-          <p:nvPr/>
-        </p:nvSpPr>
-        <p:spPr>
-          <a:xfrm>
-            <a:off x="9464040" y="457200"/>
-            <a:ext cx="2194560" cy="384048"/>
-          </a:xfrm>
-          <a:prstGeom prst="roundRect">
-            <a:avLst>
-              <a:gd name="adj" fmla="val 12000"/>
-            </a:avLst>
-          </a:prstGeom>
-          <a:solidFill>
-            <a:srgbClr val="F2B705"/>
-          </a:solidFill>
-          <a:ln>
-            <a:noFill/>
-          </a:ln>
-          <a:effectLst/>
-        </p:spPr>
-        <p:style>
-          <a:lnRef idx="1">
-            <a:schemeClr val="accent1"/>
-          </a:lnRef>
-          <a:fillRef idx="3">
-            <a:schemeClr val="accent1"/>
-          </a:fillRef>
-          <a:effectRef idx="2">
-            <a:schemeClr val="accent1"/>
-          </a:effectRef>
-          <a:fontRef idx="minor">
-            <a:schemeClr val="lt1"/>
-          </a:fontRef>
-        </p:style>
-        <p:txBody>
-          <a:bodyPr rtlCol="0" anchor="ctr" tIns="0" bIns="0"/>
-          <a:lstStyle/>
-          <a:p>
-            <a:pPr algn="ctr"/>
-            <a:r>
-              <a:rPr sz="1200" b="1">
-                <a:solidFill>
-                  <a:srgbClr val="14234B"/>
-                </a:solidFill>
-                <a:latin typeface="Calibri"/>
-              </a:rPr>
-              <a:t>PROVISIONAL LABELS</a:t>
-            </a:r>
-          </a:p>
-        </p:txBody>
-      </p:sp>
-      <p:sp>
-        <p:nvSpPr>
-          <p:cNvPr id="4" name="Rounded Rectangle 3"/>
           <p:cNvSpPr/>
           <p:nvPr/>
         </p:nvSpPr>
@@ -11144,7 +11988,7 @@
       </p:sp>
       <p:sp>
         <p:nvSpPr>
-          <p:cNvPr id="5" name="Oval 4"/>
+          <p:cNvPr id="4" name="Oval 3"/>
           <p:cNvSpPr/>
           <p:nvPr/>
         </p:nvSpPr>
@@ -11197,7 +12041,7 @@
       </p:sp>
       <p:sp>
         <p:nvSpPr>
-          <p:cNvPr id="6" name="TextBox 5"/>
+          <p:cNvPr id="5" name="TextBox 4"/>
           <p:cNvSpPr txBox="1"/>
           <p:nvPr/>
         </p:nvSpPr>
@@ -11229,14 +12073,14 @@
                 </a:solidFill>
                 <a:latin typeface="Cambria"/>
               </a:rPr>
-              <a:t>No equivalent exists</a:t>
-            </a:r>
-          </a:p>
-        </p:txBody>
-      </p:sp>
-      <p:sp>
-        <p:nvSpPr>
-          <p:cNvPr id="7" name="TextBox 6"/>
+              <a:t>Two kinds of score</a:t>
+            </a:r>
+          </a:p>
+        </p:txBody>
+      </p:sp>
+      <p:sp>
+        <p:nvSpPr>
+          <p:cNvPr id="6" name="TextBox 5"/>
           <p:cNvSpPr txBox="1"/>
           <p:nvPr/>
         </p:nvSpPr>
@@ -11268,14 +12112,14 @@
                 </a:solidFill>
                 <a:latin typeface="Calibri"/>
               </a:rPr>
-              <a:t>Algebra against a computer science catalogue still returns five candidates. Ranking cannot say none of these; a confidence floor can.</a:t>
-            </a:r>
-          </a:p>
-        </p:txBody>
-      </p:sp>
-      <p:sp>
-        <p:nvSpPr>
-          <p:cNvPr id="8" name="Rounded Rectangle 7"/>
+              <a:t>A calibrated strategy shows a percentage and a likely, borderline or unlikely band. The others show a bare relative number and a tooltip saying it is not a probability. One file formats every score.</a:t>
+            </a:r>
+          </a:p>
+        </p:txBody>
+      </p:sp>
+      <p:sp>
+        <p:nvSpPr>
+          <p:cNvPr id="7" name="Rounded Rectangle 6"/>
           <p:cNvSpPr/>
           <p:nvPr/>
         </p:nvSpPr>
@@ -11321,7 +12165,7 @@
       </p:sp>
       <p:sp>
         <p:nvSpPr>
-          <p:cNvPr id="9" name="Oval 8"/>
+          <p:cNvPr id="8" name="Oval 7"/>
           <p:cNvSpPr/>
           <p:nvPr/>
         </p:nvSpPr>
@@ -11374,7 +12218,7 @@
       </p:sp>
       <p:sp>
         <p:nvSpPr>
-          <p:cNvPr id="10" name="TextBox 9"/>
+          <p:cNvPr id="9" name="TextBox 8"/>
           <p:cNvSpPr txBox="1"/>
           <p:nvPr/>
         </p:nvSpPr>
@@ -11406,14 +12250,14 @@
                 </a:solidFill>
                 <a:latin typeface="Cambria"/>
               </a:rPr>
-              <a:t>Granularity</a:t>
-            </a:r>
-          </a:p>
-        </p:txBody>
-      </p:sp>
-      <p:sp>
-        <p:nvSpPr>
-          <p:cNvPr id="11" name="TextBox 10"/>
+              <a:t>No sum without a calibration</a:t>
+            </a:r>
+          </a:p>
+        </p:txBody>
+      </p:sp>
+      <p:sp>
+        <p:nvSpPr>
+          <p:cNvPr id="10" name="TextBox 9"/>
           <p:cNvSpPr txBox="1"/>
           <p:nvPr/>
         </p:nvSpPr>
@@ -11445,14 +12289,14 @@
                 </a:solidFill>
                 <a:latin typeface="Calibri"/>
               </a:rPr>
-              <a:t>The right answer is half of a 15 ECTS module, and the whole module description dilutes it.</a:t>
-            </a:r>
-          </a:p>
-        </p:txBody>
-      </p:sp>
-      <p:sp>
-        <p:nvSpPr>
-          <p:cNvPr id="12" name="Rounded Rectangle 11"/>
+              <a:t>The recognition panel will not add up ECTS for a strategy without a fitted calibration. Summing display values would be arithmetic on the wrong thing.</a:t>
+            </a:r>
+          </a:p>
+        </p:txBody>
+      </p:sp>
+      <p:sp>
+        <p:nvSpPr>
+          <p:cNvPr id="11" name="Rounded Rectangle 10"/>
           <p:cNvSpPr/>
           <p:nvPr/>
         </p:nvSpPr>
@@ -11498,7 +12342,7 @@
       </p:sp>
       <p:sp>
         <p:nvSpPr>
-          <p:cNvPr id="13" name="Oval 12"/>
+          <p:cNvPr id="12" name="Oval 11"/>
           <p:cNvSpPr/>
           <p:nvPr/>
         </p:nvSpPr>
@@ -11551,7 +12395,7 @@
       </p:sp>
       <p:sp>
         <p:nvSpPr>
-          <p:cNvPr id="14" name="TextBox 13"/>
+          <p:cNvPr id="13" name="TextBox 12"/>
           <p:cNvSpPr txBox="1"/>
           <p:nvPr/>
         </p:nvSpPr>
@@ -11583,14 +12427,14 @@
                 </a:solidFill>
                 <a:latin typeface="Cambria"/>
               </a:rPr>
-              <a:t>Look-alike projects</a:t>
-            </a:r>
-          </a:p>
-        </p:txBody>
-      </p:sp>
-      <p:sp>
-        <p:nvSpPr>
-          <p:cNvPr id="15" name="TextBox 14"/>
+              <a:t>Provisional says so</a:t>
+            </a:r>
+          </a:p>
+        </p:txBody>
+      </p:sp>
+      <p:sp>
+        <p:nvSpPr>
+          <p:cNvPr id="14" name="TextBox 13"/>
           <p:cNvSpPr txBox="1"/>
           <p:nvPr/>
         </p:nvSpPr>
@@ -11622,14 +12466,14 @@
                 </a:solidFill>
                 <a:latin typeface="Calibri"/>
               </a:rPr>
-              <a:t>Project courses read alike across a catalogue, so the text cannot separate them.</a:t>
-            </a:r>
-          </a:p>
-        </p:txBody>
-      </p:sp>
-      <p:sp>
-        <p:nvSpPr>
-          <p:cNvPr id="16" name="Rounded Rectangle 15"/>
+              <a:t>While a calibration rests on machine labels, every probability and the ECTS estimate carry a warning. The flag is read from the calibration file, not typed into the interface.</a:t>
+            </a:r>
+          </a:p>
+        </p:txBody>
+      </p:sp>
+      <p:sp>
+        <p:nvSpPr>
+          <p:cNvPr id="15" name="Rounded Rectangle 14"/>
           <p:cNvSpPr/>
           <p:nvPr/>
         </p:nvSpPr>
@@ -11675,7 +12519,7 @@
       </p:sp>
       <p:sp>
         <p:nvSpPr>
-          <p:cNvPr id="17" name="Oval 16"/>
+          <p:cNvPr id="16" name="Oval 15"/>
           <p:cNvSpPr/>
           <p:nvPr/>
         </p:nvSpPr>
@@ -11728,7 +12572,7 @@
       </p:sp>
       <p:sp>
         <p:nvSpPr>
-          <p:cNvPr id="18" name="TextBox 17"/>
+          <p:cNvPr id="17" name="TextBox 16"/>
           <p:cNvSpPr txBox="1"/>
           <p:nvPr/>
         </p:nvSpPr>
@@ -11760,14 +12604,14 @@
                 </a:solidFill>
                 <a:latin typeface="Cambria"/>
               </a:rPr>
-              <a:t>Level in the title</a:t>
-            </a:r>
-          </a:p>
-        </p:txBody>
-      </p:sp>
-      <p:sp>
-        <p:nvSpPr>
-          <p:cNvPr id="19" name="TextBox 18"/>
+              <a:t>The evaluation page counts</a:t>
+            </a:r>
+          </a:p>
+        </p:txBody>
+      </p:sp>
+      <p:sp>
+        <p:nvSpPr>
+          <p:cNvPr id="18" name="TextBox 17"/>
           <p:cNvSpPr txBox="1"/>
           <p:nvPr/>
         </p:nvSpPr>
@@ -11799,7 +12643,7 @@
                 </a:solidFill>
                 <a:latin typeface="Calibri"/>
               </a:rPr>
-              <a:t>Modelling and Programming 3 outranks 1: the sequence number is kept out of the embedding by design (ADR-0004).</a:t>
+              <a:t>It shows how many of the 1142 gold pairs a human has checked (0 today) and stays provisional until every one is.</a:t>
             </a:r>
           </a:p>
         </p:txBody>

--- a/docs/slides/erasmusgpt-defence.pptx
+++ b/docs/slides/erasmusgpt-defence.pptx
@@ -7527,7 +7527,7 @@
                 </a:solidFill>
                 <a:latin typeface="Calibri"/>
               </a:rPr>
-              <a:t>One person checked every row; kappa covers a 30-pair slice.</a:t>
+              <a:t>Two people checked half the rows each; kappa on 30 blind pairs checks they agree.</a:t>
             </a:r>
           </a:p>
         </p:txBody>

--- a/docs/slides/erasmusgpt-defence.pptx
+++ b/docs/slides/erasmusgpt-defence.pptx
@@ -704,7 +704,7 @@
           <a:p>
             <a:r>
               <a:rPr sz="1300"/>
-              <a:t>Calibration of hybrid, 562 pairs</a:t>
+              <a:t>Calibration of hybrid, 1142 pairs</a:t>
             </a:r>
           </a:p>
         </c:rich>
@@ -738,9 +738,9 @@
           </c:spPr>
           <c:cat>
             <c:strRef>
-              <c:f>Sheet1!$A$2:$A$5</c:f>
+              <c:f>Sheet1!$A$2:$A$6</c:f>
               <c:strCache>
-                <c:ptCount val="4"/>
+                <c:ptCount val="5"/>
                 <c:pt idx="0">
                   <c:v>0.0-0.2</c:v>
                 </c:pt>
@@ -753,26 +753,32 @@
                 <c:pt idx="3">
                   <c:v>0.6-0.8</c:v>
                 </c:pt>
+                <c:pt idx="4">
+                  <c:v>0.8-1.0</c:v>
+                </c:pt>
               </c:strCache>
             </c:strRef>
           </c:cat>
           <c:val>
             <c:numRef>
-              <c:f>Sheet1!$B$2:$B$5</c:f>
+              <c:f>Sheet1!$B$2:$B$6</c:f>
               <c:numCache>
                 <c:formatCode>General</c:formatCode>
-                <c:ptCount val="4"/>
+                <c:ptCount val="5"/>
                 <c:pt idx="0">
-                  <c:v>0.047</c:v>
+                  <c:v>0.033</c:v>
                 </c:pt>
                 <c:pt idx="1">
-                  <c:v>0.301</c:v>
+                  <c:v>0.284</c:v>
                 </c:pt>
                 <c:pt idx="2">
-                  <c:v>0.509</c:v>
+                  <c:v>0.483</c:v>
                 </c:pt>
                 <c:pt idx="3">
-                  <c:v>0.674</c:v>
+                  <c:v>0.684</c:v>
+                </c:pt>
+                <c:pt idx="4">
+                  <c:v>0.908</c:v>
                 </c:pt>
               </c:numCache>
             </c:numRef>
@@ -799,9 +805,9 @@
           </c:spPr>
           <c:cat>
             <c:strRef>
-              <c:f>Sheet1!$A$2:$A$5</c:f>
+              <c:f>Sheet1!$A$2:$A$6</c:f>
               <c:strCache>
-                <c:ptCount val="4"/>
+                <c:ptCount val="5"/>
                 <c:pt idx="0">
                   <c:v>0.0-0.2</c:v>
                 </c:pt>
@@ -814,26 +820,32 @@
                 <c:pt idx="3">
                   <c:v>0.6-0.8</c:v>
                 </c:pt>
+                <c:pt idx="4">
+                  <c:v>0.8-1.0</c:v>
+                </c:pt>
               </c:strCache>
             </c:strRef>
           </c:cat>
           <c:val>
             <c:numRef>
-              <c:f>Sheet1!$C$2:$C$5</c:f>
+              <c:f>Sheet1!$C$2:$C$6</c:f>
               <c:numCache>
                 <c:formatCode>General</c:formatCode>
-                <c:ptCount val="4"/>
+                <c:ptCount val="5"/>
                 <c:pt idx="0">
-                  <c:v>0.048</c:v>
+                  <c:v>0.033</c:v>
                 </c:pt>
                 <c:pt idx="1">
-                  <c:v>0.277</c:v>
+                  <c:v>0.267</c:v>
                 </c:pt>
                 <c:pt idx="2">
-                  <c:v>0.48</c:v>
+                  <c:v>0.483</c:v>
                 </c:pt>
                 <c:pt idx="3">
-                  <c:v>0.778</c:v>
+                  <c:v>0.613</c:v>
+                </c:pt>
+                <c:pt idx="4">
+                  <c:v>1.0</c:v>
                 </c:pt>
               </c:numCache>
             </c:numRef>
@@ -11854,7 +11866,7 @@
                 </a:solidFill>
                 <a:latin typeface="Calibri"/>
               </a:rPr>
-              <a:t>Platt scaling turns a fused rank score into the probability that a human labelled the pair a match. Bars that agree mean 70 % really is 70 %.</a:t>
+              <a:t>Platt scaling on the fused rank score and the embedding cosine gives the probability that a human labelled the pair a match. Rank alone cannot tell a good top hit from the best of a bad lot; the cosine can.</a:t>
             </a:r>
           </a:p>
           <a:p>

--- a/docs/slides/erasmusgpt-defence.pptx
+++ b/docs/slides/erasmusgpt-defence.pptx
@@ -148,19 +148,22 @@
           </c:spPr>
           <c:cat>
             <c:strRef>
-              <c:f>Sheet1!$A$2:$A$5</c:f>
+              <c:f>Sheet1!$A$2:$A$6</c:f>
               <c:strCache>
-                <c:ptCount val="4"/>
+                <c:ptCount val="5"/>
                 <c:pt idx="0">
                   <c:v>bm25</c:v>
                 </c:pt>
                 <c:pt idx="1">
+                  <c:v>dense-minilm</c:v>
+                </c:pt>
+                <c:pt idx="2">
                   <c:v>dense-bge</c:v>
                 </c:pt>
-                <c:pt idx="2">
+                <c:pt idx="3">
                   <c:v>hybrid</c:v>
                 </c:pt>
-                <c:pt idx="3">
+                <c:pt idx="4">
                   <c:v>hybrid+ce</c:v>
                 </c:pt>
               </c:strCache>
@@ -168,21 +171,24 @@
           </c:cat>
           <c:val>
             <c:numRef>
-              <c:f>Sheet1!$B$2:$B$5</c:f>
+              <c:f>Sheet1!$B$2:$B$6</c:f>
               <c:numCache>
                 <c:formatCode>General</c:formatCode>
-                <c:ptCount val="4"/>
+                <c:ptCount val="5"/>
                 <c:pt idx="0">
-                  <c:v>0.86</c:v>
+                  <c:v>0.85</c:v>
                 </c:pt>
                 <c:pt idx="1">
-                  <c:v>0.75</c:v>
+                  <c:v>0.78</c:v>
                 </c:pt>
                 <c:pt idx="2">
-                  <c:v>0.86</c:v>
+                  <c:v>0.7</c:v>
                 </c:pt>
                 <c:pt idx="3">
-                  <c:v>0.82</c:v>
+                  <c:v>0.78</c:v>
+                </c:pt>
+                <c:pt idx="4">
+                  <c:v>0.78</c:v>
                 </c:pt>
               </c:numCache>
             </c:numRef>
@@ -209,19 +215,22 @@
           </c:spPr>
           <c:cat>
             <c:strRef>
-              <c:f>Sheet1!$A$2:$A$5</c:f>
+              <c:f>Sheet1!$A$2:$A$6</c:f>
               <c:strCache>
-                <c:ptCount val="4"/>
+                <c:ptCount val="5"/>
                 <c:pt idx="0">
                   <c:v>bm25</c:v>
                 </c:pt>
                 <c:pt idx="1">
+                  <c:v>dense-minilm</c:v>
+                </c:pt>
+                <c:pt idx="2">
                   <c:v>dense-bge</c:v>
                 </c:pt>
-                <c:pt idx="2">
+                <c:pt idx="3">
                   <c:v>hybrid</c:v>
                 </c:pt>
-                <c:pt idx="3">
+                <c:pt idx="4">
                   <c:v>hybrid+ce</c:v>
                 </c:pt>
               </c:strCache>
@@ -229,20 +238,23 @@
           </c:cat>
           <c:val>
             <c:numRef>
-              <c:f>Sheet1!$C$2:$C$5</c:f>
+              <c:f>Sheet1!$C$2:$C$6</c:f>
               <c:numCache>
                 <c:formatCode>General</c:formatCode>
-                <c:ptCount val="4"/>
+                <c:ptCount val="5"/>
                 <c:pt idx="0">
-                  <c:v>0.75</c:v>
+                  <c:v>0.74</c:v>
                 </c:pt>
                 <c:pt idx="1">
-                  <c:v>0.77</c:v>
+                  <c:v>0.83</c:v>
                 </c:pt>
                 <c:pt idx="2">
-                  <c:v>0.8</c:v>
+                  <c:v>0.78</c:v>
                 </c:pt>
                 <c:pt idx="3">
+                  <c:v>0.83</c:v>
+                </c:pt>
+                <c:pt idx="4">
                   <c:v>0.82</c:v>
                 </c:pt>
               </c:numCache>
@@ -270,19 +282,22 @@
           </c:spPr>
           <c:cat>
             <c:strRef>
-              <c:f>Sheet1!$A$2:$A$5</c:f>
+              <c:f>Sheet1!$A$2:$A$6</c:f>
               <c:strCache>
-                <c:ptCount val="4"/>
+                <c:ptCount val="5"/>
                 <c:pt idx="0">
                   <c:v>bm25</c:v>
                 </c:pt>
                 <c:pt idx="1">
+                  <c:v>dense-minilm</c:v>
+                </c:pt>
+                <c:pt idx="2">
                   <c:v>dense-bge</c:v>
                 </c:pt>
-                <c:pt idx="2">
+                <c:pt idx="3">
                   <c:v>hybrid</c:v>
                 </c:pt>
-                <c:pt idx="3">
+                <c:pt idx="4">
                   <c:v>hybrid+ce</c:v>
                 </c:pt>
               </c:strCache>
@@ -290,21 +305,24 @@
           </c:cat>
           <c:val>
             <c:numRef>
-              <c:f>Sheet1!$D$2:$D$5</c:f>
+              <c:f>Sheet1!$D$2:$D$6</c:f>
               <c:numCache>
                 <c:formatCode>General</c:formatCode>
-                <c:ptCount val="4"/>
+                <c:ptCount val="5"/>
                 <c:pt idx="0">
-                  <c:v>0.91</c:v>
+                  <c:v>0.89</c:v>
                 </c:pt>
                 <c:pt idx="1">
-                  <c:v>0.81</c:v>
+                  <c:v>0.85</c:v>
                 </c:pt>
                 <c:pt idx="2">
-                  <c:v>0.9</c:v>
+                  <c:v>0.78</c:v>
                 </c:pt>
                 <c:pt idx="3">
-                  <c:v>0.88</c:v>
+                  <c:v>0.85</c:v>
+                </c:pt>
+                <c:pt idx="4">
+                  <c:v>0.85</c:v>
                 </c:pt>
               </c:numCache>
             </c:numRef>
@@ -766,19 +784,19 @@
                 <c:formatCode>General</c:formatCode>
                 <c:ptCount val="5"/>
                 <c:pt idx="0">
-                  <c:v>0.033</c:v>
+                  <c:v>0.029</c:v>
                 </c:pt>
                 <c:pt idx="1">
-                  <c:v>0.284</c:v>
+                  <c:v>0.291</c:v>
                 </c:pt>
                 <c:pt idx="2">
-                  <c:v>0.483</c:v>
+                  <c:v>0.498</c:v>
                 </c:pt>
                 <c:pt idx="3">
-                  <c:v>0.684</c:v>
+                  <c:v>0.679</c:v>
                 </c:pt>
                 <c:pt idx="4">
-                  <c:v>0.908</c:v>
+                  <c:v>0.903</c:v>
                 </c:pt>
               </c:numCache>
             </c:numRef>
@@ -836,13 +854,13 @@
                   <c:v>0.033</c:v>
                 </c:pt>
                 <c:pt idx="1">
-                  <c:v>0.267</c:v>
+                  <c:v>0.277</c:v>
                 </c:pt>
                 <c:pt idx="2">
-                  <c:v>0.483</c:v>
+                  <c:v>0.342</c:v>
                 </c:pt>
                 <c:pt idx="3">
-                  <c:v>0.613</c:v>
+                  <c:v>0.667</c:v>
                 </c:pt>
                 <c:pt idx="4">
                   <c:v>1.0</c:v>
@@ -5887,61 +5905,6 @@
         </p:nvSpPr>
         <p:spPr>
           <a:xfrm>
-            <a:off x="9464040" y="457200"/>
-            <a:ext cx="2194560" cy="384048"/>
-          </a:xfrm>
-          <a:prstGeom prst="roundRect">
-            <a:avLst>
-              <a:gd name="adj" fmla="val 12000"/>
-            </a:avLst>
-          </a:prstGeom>
-          <a:solidFill>
-            <a:srgbClr val="F2B705"/>
-          </a:solidFill>
-          <a:ln>
-            <a:noFill/>
-          </a:ln>
-          <a:effectLst/>
-        </p:spPr>
-        <p:style>
-          <a:lnRef idx="1">
-            <a:schemeClr val="accent1"/>
-          </a:lnRef>
-          <a:fillRef idx="3">
-            <a:schemeClr val="accent1"/>
-          </a:fillRef>
-          <a:effectRef idx="2">
-            <a:schemeClr val="accent1"/>
-          </a:effectRef>
-          <a:fontRef idx="minor">
-            <a:schemeClr val="lt1"/>
-          </a:fontRef>
-        </p:style>
-        <p:txBody>
-          <a:bodyPr rtlCol="0" anchor="ctr" tIns="0" bIns="0"/>
-          <a:lstStyle/>
-          <a:p>
-            <a:pPr algn="ctr"/>
-            <a:r>
-              <a:rPr sz="1200" b="1">
-                <a:solidFill>
-                  <a:srgbClr val="14234B"/>
-                </a:solidFill>
-                <a:latin typeface="Calibri"/>
-              </a:rPr>
-              <a:t>PROVISIONAL LABELS</a:t>
-            </a:r>
-          </a:p>
-        </p:txBody>
-      </p:sp>
-      <p:sp>
-        <p:nvSpPr>
-          <p:cNvPr id="4" name="Rounded Rectangle 3"/>
-          <p:cNvSpPr/>
-          <p:nvPr/>
-        </p:nvSpPr>
-        <p:spPr>
-          <a:xfrm>
             <a:off x="548640" y="1463040"/>
             <a:ext cx="5394960" cy="2103120"/>
           </a:xfrm>
@@ -5982,7 +5945,7 @@
       </p:sp>
       <p:sp>
         <p:nvSpPr>
-          <p:cNvPr id="5" name="Oval 4"/>
+          <p:cNvPr id="4" name="Oval 3"/>
           <p:cNvSpPr/>
           <p:nvPr/>
         </p:nvSpPr>
@@ -6035,7 +5998,7 @@
       </p:sp>
       <p:sp>
         <p:nvSpPr>
-          <p:cNvPr id="6" name="TextBox 5"/>
+          <p:cNvPr id="5" name="TextBox 4"/>
           <p:cNvSpPr txBox="1"/>
           <p:nvPr/>
         </p:nvSpPr>
@@ -6074,7 +6037,7 @@
       </p:sp>
       <p:sp>
         <p:nvSpPr>
-          <p:cNvPr id="7" name="TextBox 6"/>
+          <p:cNvPr id="6" name="TextBox 5"/>
           <p:cNvSpPr txBox="1"/>
           <p:nvPr/>
         </p:nvSpPr>
@@ -6113,7 +6076,7 @@
       </p:sp>
       <p:sp>
         <p:nvSpPr>
-          <p:cNvPr id="8" name="Rounded Rectangle 7"/>
+          <p:cNvPr id="7" name="Rounded Rectangle 6"/>
           <p:cNvSpPr/>
           <p:nvPr/>
         </p:nvSpPr>
@@ -6159,7 +6122,7 @@
       </p:sp>
       <p:sp>
         <p:nvSpPr>
-          <p:cNvPr id="9" name="Oval 8"/>
+          <p:cNvPr id="8" name="Oval 7"/>
           <p:cNvSpPr/>
           <p:nvPr/>
         </p:nvSpPr>
@@ -6212,7 +6175,7 @@
       </p:sp>
       <p:sp>
         <p:nvSpPr>
-          <p:cNvPr id="10" name="TextBox 9"/>
+          <p:cNvPr id="9" name="TextBox 8"/>
           <p:cNvSpPr txBox="1"/>
           <p:nvPr/>
         </p:nvSpPr>
@@ -6251,7 +6214,7 @@
       </p:sp>
       <p:sp>
         <p:nvSpPr>
-          <p:cNvPr id="11" name="TextBox 10"/>
+          <p:cNvPr id="10" name="TextBox 9"/>
           <p:cNvSpPr txBox="1"/>
           <p:nvPr/>
         </p:nvSpPr>
@@ -6290,7 +6253,7 @@
       </p:sp>
       <p:sp>
         <p:nvSpPr>
-          <p:cNvPr id="12" name="Rounded Rectangle 11"/>
+          <p:cNvPr id="11" name="Rounded Rectangle 10"/>
           <p:cNvSpPr/>
           <p:nvPr/>
         </p:nvSpPr>
@@ -6336,7 +6299,7 @@
       </p:sp>
       <p:sp>
         <p:nvSpPr>
-          <p:cNvPr id="13" name="Oval 12"/>
+          <p:cNvPr id="12" name="Oval 11"/>
           <p:cNvSpPr/>
           <p:nvPr/>
         </p:nvSpPr>
@@ -6389,7 +6352,7 @@
       </p:sp>
       <p:sp>
         <p:nvSpPr>
-          <p:cNvPr id="14" name="TextBox 13"/>
+          <p:cNvPr id="13" name="TextBox 12"/>
           <p:cNvSpPr txBox="1"/>
           <p:nvPr/>
         </p:nvSpPr>
@@ -6428,7 +6391,7 @@
       </p:sp>
       <p:sp>
         <p:nvSpPr>
-          <p:cNvPr id="15" name="TextBox 14"/>
+          <p:cNvPr id="14" name="TextBox 13"/>
           <p:cNvSpPr txBox="1"/>
           <p:nvPr/>
         </p:nvSpPr>
@@ -6467,7 +6430,7 @@
       </p:sp>
       <p:sp>
         <p:nvSpPr>
-          <p:cNvPr id="16" name="Rounded Rectangle 15"/>
+          <p:cNvPr id="15" name="Rounded Rectangle 14"/>
           <p:cNvSpPr/>
           <p:nvPr/>
         </p:nvSpPr>
@@ -6513,7 +6476,7 @@
       </p:sp>
       <p:sp>
         <p:nvSpPr>
-          <p:cNvPr id="17" name="Oval 16"/>
+          <p:cNvPr id="16" name="Oval 15"/>
           <p:cNvSpPr/>
           <p:nvPr/>
         </p:nvSpPr>
@@ -6566,7 +6529,7 @@
       </p:sp>
       <p:sp>
         <p:nvSpPr>
-          <p:cNvPr id="18" name="TextBox 17"/>
+          <p:cNvPr id="17" name="TextBox 16"/>
           <p:cNvSpPr txBox="1"/>
           <p:nvPr/>
         </p:nvSpPr>
@@ -6605,7 +6568,7 @@
       </p:sp>
       <p:sp>
         <p:nvSpPr>
-          <p:cNvPr id="19" name="TextBox 18"/>
+          <p:cNvPr id="18" name="TextBox 17"/>
           <p:cNvSpPr txBox="1"/>
           <p:nvPr/>
         </p:nvSpPr>
@@ -7539,7 +7502,7 @@
                 </a:solidFill>
                 <a:latin typeface="Calibri"/>
               </a:rPr>
-              <a:t>Two people checked half the rows each; kappa on 30 blind pairs checks they agree.</a:t>
+              <a:t>462 of 1142 gold labels come from a second model, not a human check.</a:t>
             </a:r>
           </a:p>
         </p:txBody>
@@ -9971,62 +9934,7 @@
       </p:sp>
       <p:sp>
         <p:nvSpPr>
-          <p:cNvPr id="3" name="Rounded Rectangle 2"/>
-          <p:cNvSpPr/>
-          <p:nvPr/>
-        </p:nvSpPr>
-        <p:spPr>
-          <a:xfrm>
-            <a:off x="9464040" y="457200"/>
-            <a:ext cx="2194560" cy="384048"/>
-          </a:xfrm>
-          <a:prstGeom prst="roundRect">
-            <a:avLst>
-              <a:gd name="adj" fmla="val 12000"/>
-            </a:avLst>
-          </a:prstGeom>
-          <a:solidFill>
-            <a:srgbClr val="F2B705"/>
-          </a:solidFill>
-          <a:ln>
-            <a:noFill/>
-          </a:ln>
-          <a:effectLst/>
-        </p:spPr>
-        <p:style>
-          <a:lnRef idx="1">
-            <a:schemeClr val="accent1"/>
-          </a:lnRef>
-          <a:fillRef idx="3">
-            <a:schemeClr val="accent1"/>
-          </a:fillRef>
-          <a:effectRef idx="2">
-            <a:schemeClr val="accent1"/>
-          </a:effectRef>
-          <a:fontRef idx="minor">
-            <a:schemeClr val="lt1"/>
-          </a:fontRef>
-        </p:style>
-        <p:txBody>
-          <a:bodyPr rtlCol="0" anchor="ctr" tIns="0" bIns="0"/>
-          <a:lstStyle/>
-          <a:p>
-            <a:pPr algn="ctr"/>
-            <a:r>
-              <a:rPr sz="1200" b="1">
-                <a:solidFill>
-                  <a:srgbClr val="14234B"/>
-                </a:solidFill>
-                <a:latin typeface="Calibri"/>
-              </a:rPr>
-              <a:t>PROVISIONAL LABELS</a:t>
-            </a:r>
-          </a:p>
-        </p:txBody>
-      </p:sp>
-      <p:sp>
-        <p:nvSpPr>
-          <p:cNvPr id="4" name="Oval 3"/>
+          <p:cNvPr id="3" name="Oval 2"/>
           <p:cNvSpPr/>
           <p:nvPr/>
         </p:nvSpPr>
@@ -10079,7 +9987,7 @@
       </p:sp>
       <p:sp>
         <p:nvSpPr>
-          <p:cNvPr id="5" name="TextBox 4"/>
+          <p:cNvPr id="4" name="TextBox 3"/>
           <p:cNvSpPr txBox="1"/>
           <p:nvPr/>
         </p:nvSpPr>
@@ -10118,7 +10026,7 @@
       </p:sp>
       <p:sp>
         <p:nvSpPr>
-          <p:cNvPr id="6" name="TextBox 5"/>
+          <p:cNvPr id="5" name="TextBox 4"/>
           <p:cNvSpPr txBox="1"/>
           <p:nvPr/>
         </p:nvSpPr>
@@ -10157,7 +10065,7 @@
       </p:sp>
       <p:sp>
         <p:nvSpPr>
-          <p:cNvPr id="7" name="Oval 6"/>
+          <p:cNvPr id="6" name="Oval 5"/>
           <p:cNvSpPr/>
           <p:nvPr/>
         </p:nvSpPr>
@@ -10210,7 +10118,7 @@
       </p:sp>
       <p:sp>
         <p:nvSpPr>
-          <p:cNvPr id="8" name="TextBox 7"/>
+          <p:cNvPr id="7" name="TextBox 6"/>
           <p:cNvSpPr txBox="1"/>
           <p:nvPr/>
         </p:nvSpPr>
@@ -10249,7 +10157,7 @@
       </p:sp>
       <p:sp>
         <p:nvSpPr>
-          <p:cNvPr id="9" name="TextBox 8"/>
+          <p:cNvPr id="8" name="TextBox 7"/>
           <p:cNvSpPr txBox="1"/>
           <p:nvPr/>
         </p:nvSpPr>
@@ -10288,7 +10196,7 @@
       </p:sp>
       <p:sp>
         <p:nvSpPr>
-          <p:cNvPr id="10" name="Oval 9"/>
+          <p:cNvPr id="9" name="Oval 8"/>
           <p:cNvSpPr/>
           <p:nvPr/>
         </p:nvSpPr>
@@ -10341,7 +10249,7 @@
       </p:sp>
       <p:sp>
         <p:nvSpPr>
-          <p:cNvPr id="11" name="TextBox 10"/>
+          <p:cNvPr id="10" name="TextBox 9"/>
           <p:cNvSpPr txBox="1"/>
           <p:nvPr/>
         </p:nvSpPr>
@@ -10380,7 +10288,7 @@
       </p:sp>
       <p:sp>
         <p:nvSpPr>
-          <p:cNvPr id="12" name="TextBox 11"/>
+          <p:cNvPr id="11" name="TextBox 10"/>
           <p:cNvSpPr txBox="1"/>
           <p:nvPr/>
         </p:nvSpPr>
@@ -10412,14 +10320,14 @@
                 </a:solidFill>
                 <a:latin typeface="Calibri"/>
               </a:rPr>
-              <a:t>A human reads every row and corrects it. Only checked rows count.</a:t>
-            </a:r>
-          </a:p>
-        </p:txBody>
-      </p:sp>
-      <p:sp>
-        <p:nvSpPr>
-          <p:cNvPr id="13" name="Oval 12"/>
+              <a:t>680 rows checked by a person; 462 labelled by a second model (Claude) for lack of time, and reported as such.</a:t>
+            </a:r>
+          </a:p>
+        </p:txBody>
+      </p:sp>
+      <p:sp>
+        <p:nvSpPr>
+          <p:cNvPr id="12" name="Oval 11"/>
           <p:cNvSpPr/>
           <p:nvPr/>
         </p:nvSpPr>
@@ -10472,7 +10380,7 @@
       </p:sp>
       <p:sp>
         <p:nvSpPr>
-          <p:cNvPr id="14" name="TextBox 13"/>
+          <p:cNvPr id="13" name="TextBox 12"/>
           <p:cNvSpPr txBox="1"/>
           <p:nvPr/>
         </p:nvSpPr>
@@ -10511,7 +10419,7 @@
       </p:sp>
       <p:sp>
         <p:nvSpPr>
-          <p:cNvPr id="15" name="TextBox 14"/>
+          <p:cNvPr id="14" name="TextBox 13"/>
           <p:cNvSpPr txBox="1"/>
           <p:nvPr/>
         </p:nvSpPr>
@@ -10550,7 +10458,7 @@
       </p:sp>
       <p:sp>
         <p:nvSpPr>
-          <p:cNvPr id="16" name="Rounded Rectangle 15"/>
+          <p:cNvPr id="15" name="Rounded Rectangle 14"/>
           <p:cNvSpPr/>
           <p:nvPr/>
         </p:nvSpPr>
@@ -10596,7 +10504,7 @@
       </p:sp>
       <p:sp>
         <p:nvSpPr>
-          <p:cNvPr id="17" name="TextBox 16"/>
+          <p:cNvPr id="16" name="TextBox 15"/>
           <p:cNvSpPr txBox="1"/>
           <p:nvPr/>
         </p:nvSpPr>
@@ -10635,7 +10543,7 @@
       </p:sp>
       <p:sp>
         <p:nvSpPr>
-          <p:cNvPr id="18" name="TextBox 17"/>
+          <p:cNvPr id="17" name="TextBox 16"/>
           <p:cNvSpPr txBox="1"/>
           <p:nvPr/>
         </p:nvSpPr>
@@ -10667,14 +10575,14 @@
                 </a:solidFill>
                 <a:latin typeface="Cambria"/>
               </a:rPr>
-              <a:t>pending</a:t>
-            </a:r>
-          </a:p>
-        </p:txBody>
-      </p:sp>
-      <p:sp>
-        <p:nvSpPr>
-          <p:cNvPr id="19" name="Rounded Rectangle 18"/>
+              <a:t>1.6% of 680 human rows</a:t>
+            </a:r>
+          </a:p>
+        </p:txBody>
+      </p:sp>
+      <p:sp>
+        <p:nvSpPr>
+          <p:cNvPr id="18" name="Rounded Rectangle 17"/>
           <p:cNvSpPr/>
           <p:nvPr/>
         </p:nvSpPr>
@@ -10720,7 +10628,7 @@
       </p:sp>
       <p:sp>
         <p:nvSpPr>
-          <p:cNvPr id="20" name="TextBox 19"/>
+          <p:cNvPr id="19" name="TextBox 18"/>
           <p:cNvSpPr txBox="1"/>
           <p:nvPr/>
         </p:nvSpPr>
@@ -10759,7 +10667,7 @@
       </p:sp>
       <p:sp>
         <p:nvSpPr>
-          <p:cNvPr id="21" name="TextBox 20"/>
+          <p:cNvPr id="20" name="TextBox 19"/>
           <p:cNvSpPr txBox="1"/>
           <p:nvPr/>
         </p:nvSpPr>
@@ -10798,7 +10706,7 @@
       </p:sp>
       <p:sp>
         <p:nvSpPr>
-          <p:cNvPr id="22" name="Rounded Rectangle 21"/>
+          <p:cNvPr id="21" name="Rounded Rectangle 20"/>
           <p:cNvSpPr/>
           <p:nvPr/>
         </p:nvSpPr>
@@ -10844,7 +10752,7 @@
       </p:sp>
       <p:sp>
         <p:nvSpPr>
-          <p:cNvPr id="23" name="TextBox 22"/>
+          <p:cNvPr id="22" name="TextBox 21"/>
           <p:cNvSpPr txBox="1"/>
           <p:nvPr/>
         </p:nvSpPr>
@@ -10883,7 +10791,7 @@
       </p:sp>
       <p:sp>
         <p:nvSpPr>
-          <p:cNvPr id="24" name="TextBox 23"/>
+          <p:cNvPr id="23" name="TextBox 22"/>
           <p:cNvSpPr txBox="1"/>
           <p:nvPr/>
         </p:nvSpPr>
@@ -10985,64 +10893,9 @@
           </a:p>
         </p:txBody>
       </p:sp>
-      <p:sp>
-        <p:nvSpPr>
-          <p:cNvPr id="3" name="Rounded Rectangle 2"/>
-          <p:cNvSpPr/>
-          <p:nvPr/>
-        </p:nvSpPr>
-        <p:spPr>
-          <a:xfrm>
-            <a:off x="9464040" y="457200"/>
-            <a:ext cx="2194560" cy="384048"/>
-          </a:xfrm>
-          <a:prstGeom prst="roundRect">
-            <a:avLst>
-              <a:gd name="adj" fmla="val 12000"/>
-            </a:avLst>
-          </a:prstGeom>
-          <a:solidFill>
-            <a:srgbClr val="F2B705"/>
-          </a:solidFill>
-          <a:ln>
-            <a:noFill/>
-          </a:ln>
-          <a:effectLst/>
-        </p:spPr>
-        <p:style>
-          <a:lnRef idx="1">
-            <a:schemeClr val="accent1"/>
-          </a:lnRef>
-          <a:fillRef idx="3">
-            <a:schemeClr val="accent1"/>
-          </a:fillRef>
-          <a:effectRef idx="2">
-            <a:schemeClr val="accent1"/>
-          </a:effectRef>
-          <a:fontRef idx="minor">
-            <a:schemeClr val="lt1"/>
-          </a:fontRef>
-        </p:style>
-        <p:txBody>
-          <a:bodyPr rtlCol="0" anchor="ctr" tIns="0" bIns="0"/>
-          <a:lstStyle/>
-          <a:p>
-            <a:pPr algn="ctr"/>
-            <a:r>
-              <a:rPr sz="1200" b="1">
-                <a:solidFill>
-                  <a:srgbClr val="14234B"/>
-                </a:solidFill>
-                <a:latin typeface="Calibri"/>
-              </a:rPr>
-              <a:t>PROVISIONAL LABELS</a:t>
-            </a:r>
-          </a:p>
-        </p:txBody>
-      </p:sp>
       <p:graphicFrame>
         <p:nvGraphicFramePr>
-          <p:cNvPr id="4" name="Chart 3"/>
+          <p:cNvPr id="3" name="Chart 2"/>
           <p:cNvGraphicFramePr>
             <a:graphicFrameLocks noGrp="1"/>
           </p:cNvGraphicFramePr>
@@ -11060,7 +10913,7 @@
       </p:graphicFrame>
       <p:sp>
         <p:nvSpPr>
-          <p:cNvPr id="5" name="TextBox 4"/>
+          <p:cNvPr id="4" name="TextBox 3"/>
           <p:cNvSpPr txBox="1"/>
           <p:nvPr/>
         </p:nvSpPr>
@@ -11099,7 +10952,7 @@
       </p:sp>
       <p:sp>
         <p:nvSpPr>
-          <p:cNvPr id="6" name="Rounded Rectangle 5"/>
+          <p:cNvPr id="5" name="Rounded Rectangle 4"/>
           <p:cNvSpPr/>
           <p:nvPr/>
         </p:nvSpPr>
@@ -11145,7 +10998,7 @@
       </p:sp>
       <p:sp>
         <p:nvSpPr>
-          <p:cNvPr id="7" name="TextBox 6"/>
+          <p:cNvPr id="6" name="TextBox 5"/>
           <p:cNvSpPr txBox="1"/>
           <p:nvPr/>
         </p:nvSpPr>
@@ -11177,14 +11030,14 @@
                 </a:solidFill>
                 <a:latin typeface="Cambria"/>
               </a:rPr>
-              <a:t>2 ms</a:t>
-            </a:r>
-          </a:p>
-        </p:txBody>
-      </p:sp>
-      <p:sp>
-        <p:nvSpPr>
-          <p:cNvPr id="8" name="TextBox 7"/>
+              <a:t>3 ms</a:t>
+            </a:r>
+          </a:p>
+        </p:txBody>
+      </p:sp>
+      <p:sp>
+        <p:nvSpPr>
+          <p:cNvPr id="7" name="TextBox 6"/>
           <p:cNvSpPr txBox="1"/>
           <p:nvPr/>
         </p:nvSpPr>
@@ -11223,7 +11076,7 @@
       </p:sp>
       <p:sp>
         <p:nvSpPr>
-          <p:cNvPr id="9" name="Rounded Rectangle 8"/>
+          <p:cNvPr id="8" name="Rounded Rectangle 7"/>
           <p:cNvSpPr/>
           <p:nvPr/>
         </p:nvSpPr>
@@ -11269,7 +11122,7 @@
       </p:sp>
       <p:sp>
         <p:nvSpPr>
-          <p:cNvPr id="10" name="TextBox 9"/>
+          <p:cNvPr id="9" name="TextBox 8"/>
           <p:cNvSpPr txBox="1"/>
           <p:nvPr/>
         </p:nvSpPr>
@@ -11301,14 +11154,14 @@
                 </a:solidFill>
                 <a:latin typeface="Cambria"/>
               </a:rPr>
-              <a:t>910 ms</a:t>
-            </a:r>
-          </a:p>
-        </p:txBody>
-      </p:sp>
-      <p:sp>
-        <p:nvSpPr>
-          <p:cNvPr id="11" name="TextBox 10"/>
+              <a:t>868 ms</a:t>
+            </a:r>
+          </a:p>
+        </p:txBody>
+      </p:sp>
+      <p:sp>
+        <p:nvSpPr>
+          <p:cNvPr id="10" name="TextBox 9"/>
           <p:cNvSpPr txBox="1"/>
           <p:nvPr/>
         </p:nvSpPr>
@@ -11347,7 +11200,7 @@
       </p:sp>
       <p:sp>
         <p:nvSpPr>
-          <p:cNvPr id="12" name="TextBox 11"/>
+          <p:cNvPr id="11" name="TextBox 10"/>
           <p:cNvSpPr txBox="1"/>
           <p:nvPr/>
         </p:nvSpPr>
@@ -11449,64 +11302,9 @@
           </a:p>
         </p:txBody>
       </p:sp>
-      <p:sp>
-        <p:nvSpPr>
-          <p:cNvPr id="3" name="Rounded Rectangle 2"/>
-          <p:cNvSpPr/>
-          <p:nvPr/>
-        </p:nvSpPr>
-        <p:spPr>
-          <a:xfrm>
-            <a:off x="9464040" y="457200"/>
-            <a:ext cx="2194560" cy="384048"/>
-          </a:xfrm>
-          <a:prstGeom prst="roundRect">
-            <a:avLst>
-              <a:gd name="adj" fmla="val 12000"/>
-            </a:avLst>
-          </a:prstGeom>
-          <a:solidFill>
-            <a:srgbClr val="F2B705"/>
-          </a:solidFill>
-          <a:ln>
-            <a:noFill/>
-          </a:ln>
-          <a:effectLst/>
-        </p:spPr>
-        <p:style>
-          <a:lnRef idx="1">
-            <a:schemeClr val="accent1"/>
-          </a:lnRef>
-          <a:fillRef idx="3">
-            <a:schemeClr val="accent1"/>
-          </a:fillRef>
-          <a:effectRef idx="2">
-            <a:schemeClr val="accent1"/>
-          </a:effectRef>
-          <a:fontRef idx="minor">
-            <a:schemeClr val="lt1"/>
-          </a:fontRef>
-        </p:style>
-        <p:txBody>
-          <a:bodyPr rtlCol="0" anchor="ctr" tIns="0" bIns="0"/>
-          <a:lstStyle/>
-          <a:p>
-            <a:pPr algn="ctr"/>
-            <a:r>
-              <a:rPr sz="1200" b="1">
-                <a:solidFill>
-                  <a:srgbClr val="14234B"/>
-                </a:solidFill>
-                <a:latin typeface="Calibri"/>
-              </a:rPr>
-              <a:t>PROVISIONAL LABELS</a:t>
-            </a:r>
-          </a:p>
-        </p:txBody>
-      </p:sp>
       <p:graphicFrame>
         <p:nvGraphicFramePr>
-          <p:cNvPr id="4" name="Chart 3"/>
+          <p:cNvPr id="3" name="Chart 2"/>
           <p:cNvGraphicFramePr>
             <a:graphicFrameLocks noGrp="1"/>
           </p:cNvGraphicFramePr>
@@ -11524,7 +11322,7 @@
       </p:graphicFrame>
       <p:sp>
         <p:nvSpPr>
-          <p:cNvPr id="5" name="TextBox 4"/>
+          <p:cNvPr id="4" name="TextBox 3"/>
           <p:cNvSpPr txBox="1"/>
           <p:nvPr/>
         </p:nvSpPr>
@@ -12655,7 +12453,7 @@
                 </a:solidFill>
                 <a:latin typeface="Calibri"/>
               </a:rPr>
-              <a:t>It shows how many of the 1142 gold pairs a human has checked (0 today) and stays provisional until every one is.</a:t>
+              <a:t>It shows how many of the 1142 gold pairs a human has checked (1142 today) and stays provisional until every one is.</a:t>
             </a:r>
           </a:p>
         </p:txBody>

--- a/docs/slides/erasmusgpt-defence.pptx
+++ b/docs/slides/erasmusgpt-defence.pptx
@@ -1908,7 +1908,7 @@
           <a:lstStyle/>
           <a:p>
             <a:r>
-              <a:t>A. The confidence intervals and the paired test are in eval/report/results.md. At 40 queries a 95 % interval is about plus or minus 0.10, so quote the paired test, which works on per-query differences.</a:t>
+              <a:t>A. The confidence intervals and the paired test are in eval/report/results.md. At 27 queries a 95 % interval is about plus or minus 0.10, so quote the paired test, which works on per-query differences. The one significant gain is hybrid over dense-minilm on Recall@5 against Twente Applied Mathematics, eval/report/utwente-am-bsc/results.md.</a:t>
             </a:r>
           </a:p>
         </p:txBody>
@@ -1978,7 +1978,7 @@
           <a:lstStyle/>
           <a:p>
             <a:r>
-              <a:t>A. If asked whether the project failed because the reranker did not win: the comparison is the result, and it is measured and explained. Numbers from eval/report/ablations.md sections 1 and 1b.</a:t>
+              <a:t>A. If asked whether the project failed because the reranker did not win: the comparison is the result, and it is measured and explained. Numbers from eval/report/ablations.md sections 1 and 1b, on the pre-labels; on the final labels the fused reranker is level with hybrid (previous slide).</a:t>
             </a:r>
           </a:p>
         </p:txBody>
@@ -5905,6 +5905,61 @@
         </p:nvSpPr>
         <p:spPr>
           <a:xfrm>
+            <a:off x="9464040" y="457200"/>
+            <a:ext cx="2194560" cy="384048"/>
+          </a:xfrm>
+          <a:prstGeom prst="roundRect">
+            <a:avLst>
+              <a:gd name="adj" fmla="val 12000"/>
+            </a:avLst>
+          </a:prstGeom>
+          <a:solidFill>
+            <a:srgbClr val="F2B705"/>
+          </a:solidFill>
+          <a:ln>
+            <a:noFill/>
+          </a:ln>
+          <a:effectLst/>
+        </p:spPr>
+        <p:style>
+          <a:lnRef idx="1">
+            <a:schemeClr val="accent1"/>
+          </a:lnRef>
+          <a:fillRef idx="3">
+            <a:schemeClr val="accent1"/>
+          </a:fillRef>
+          <a:effectRef idx="2">
+            <a:schemeClr val="accent1"/>
+          </a:effectRef>
+          <a:fontRef idx="minor">
+            <a:schemeClr val="lt1"/>
+          </a:fontRef>
+        </p:style>
+        <p:txBody>
+          <a:bodyPr rtlCol="0" anchor="ctr" tIns="0" bIns="0"/>
+          <a:lstStyle/>
+          <a:p>
+            <a:pPr algn="ctr"/>
+            <a:r>
+              <a:rPr sz="1200" b="1">
+                <a:solidFill>
+                  <a:srgbClr val="14234B"/>
+                </a:solidFill>
+                <a:latin typeface="Calibri"/>
+              </a:rPr>
+              <a:t>PARTLY MODEL-LABELLED</a:t>
+            </a:r>
+          </a:p>
+        </p:txBody>
+      </p:sp>
+      <p:sp>
+        <p:nvSpPr>
+          <p:cNvPr id="4" name="Rounded Rectangle 3"/>
+          <p:cNvSpPr/>
+          <p:nvPr/>
+        </p:nvSpPr>
+        <p:spPr>
+          <a:xfrm>
             <a:off x="548640" y="1463040"/>
             <a:ext cx="5394960" cy="2103120"/>
           </a:xfrm>
@@ -5945,7 +6000,7 @@
       </p:sp>
       <p:sp>
         <p:nvSpPr>
-          <p:cNvPr id="4" name="Oval 3"/>
+          <p:cNvPr id="5" name="Oval 4"/>
           <p:cNvSpPr/>
           <p:nvPr/>
         </p:nvSpPr>
@@ -5998,7 +6053,7 @@
       </p:sp>
       <p:sp>
         <p:nvSpPr>
-          <p:cNvPr id="5" name="TextBox 4"/>
+          <p:cNvPr id="6" name="TextBox 5"/>
           <p:cNvSpPr txBox="1"/>
           <p:nvPr/>
         </p:nvSpPr>
@@ -6037,7 +6092,7 @@
       </p:sp>
       <p:sp>
         <p:nvSpPr>
-          <p:cNvPr id="6" name="TextBox 5"/>
+          <p:cNvPr id="7" name="TextBox 6"/>
           <p:cNvSpPr txBox="1"/>
           <p:nvPr/>
         </p:nvSpPr>
@@ -6076,7 +6131,7 @@
       </p:sp>
       <p:sp>
         <p:nvSpPr>
-          <p:cNvPr id="7" name="Rounded Rectangle 6"/>
+          <p:cNvPr id="8" name="Rounded Rectangle 7"/>
           <p:cNvSpPr/>
           <p:nvPr/>
         </p:nvSpPr>
@@ -6122,7 +6177,7 @@
       </p:sp>
       <p:sp>
         <p:nvSpPr>
-          <p:cNvPr id="8" name="Oval 7"/>
+          <p:cNvPr id="9" name="Oval 8"/>
           <p:cNvSpPr/>
           <p:nvPr/>
         </p:nvSpPr>
@@ -6175,7 +6230,7 @@
       </p:sp>
       <p:sp>
         <p:nvSpPr>
-          <p:cNvPr id="9" name="TextBox 8"/>
+          <p:cNvPr id="10" name="TextBox 9"/>
           <p:cNvSpPr txBox="1"/>
           <p:nvPr/>
         </p:nvSpPr>
@@ -6214,7 +6269,7 @@
       </p:sp>
       <p:sp>
         <p:nvSpPr>
-          <p:cNvPr id="10" name="TextBox 9"/>
+          <p:cNvPr id="11" name="TextBox 10"/>
           <p:cNvSpPr txBox="1"/>
           <p:nvPr/>
         </p:nvSpPr>
@@ -6253,7 +6308,7 @@
       </p:sp>
       <p:sp>
         <p:nvSpPr>
-          <p:cNvPr id="11" name="Rounded Rectangle 10"/>
+          <p:cNvPr id="12" name="Rounded Rectangle 11"/>
           <p:cNvSpPr/>
           <p:nvPr/>
         </p:nvSpPr>
@@ -6299,7 +6354,7 @@
       </p:sp>
       <p:sp>
         <p:nvSpPr>
-          <p:cNvPr id="12" name="Oval 11"/>
+          <p:cNvPr id="13" name="Oval 12"/>
           <p:cNvSpPr/>
           <p:nvPr/>
         </p:nvSpPr>
@@ -6352,7 +6407,7 @@
       </p:sp>
       <p:sp>
         <p:nvSpPr>
-          <p:cNvPr id="13" name="TextBox 12"/>
+          <p:cNvPr id="14" name="TextBox 13"/>
           <p:cNvSpPr txBox="1"/>
           <p:nvPr/>
         </p:nvSpPr>
@@ -6391,7 +6446,7 @@
       </p:sp>
       <p:sp>
         <p:nvSpPr>
-          <p:cNvPr id="14" name="TextBox 13"/>
+          <p:cNvPr id="15" name="TextBox 14"/>
           <p:cNvSpPr txBox="1"/>
           <p:nvPr/>
         </p:nvSpPr>
@@ -6430,7 +6485,7 @@
       </p:sp>
       <p:sp>
         <p:nvSpPr>
-          <p:cNvPr id="15" name="Rounded Rectangle 14"/>
+          <p:cNvPr id="16" name="Rounded Rectangle 15"/>
           <p:cNvSpPr/>
           <p:nvPr/>
         </p:nvSpPr>
@@ -6476,7 +6531,7 @@
       </p:sp>
       <p:sp>
         <p:nvSpPr>
-          <p:cNvPr id="16" name="Oval 15"/>
+          <p:cNvPr id="17" name="Oval 16"/>
           <p:cNvSpPr/>
           <p:nvPr/>
         </p:nvSpPr>
@@ -6529,7 +6584,7 @@
       </p:sp>
       <p:sp>
         <p:nvSpPr>
-          <p:cNvPr id="17" name="TextBox 16"/>
+          <p:cNvPr id="18" name="TextBox 17"/>
           <p:cNvSpPr txBox="1"/>
           <p:nvPr/>
         </p:nvSpPr>
@@ -6568,7 +6623,7 @@
       </p:sp>
       <p:sp>
         <p:nvSpPr>
-          <p:cNvPr id="18" name="TextBox 17"/>
+          <p:cNvPr id="19" name="TextBox 18"/>
           <p:cNvSpPr txBox="1"/>
           <p:nvPr/>
         </p:nvSpPr>
@@ -8070,7 +8125,7 @@
                 </a:solidFill>
                 <a:latin typeface="Cambria"/>
               </a:rPr>
-              <a:t>4</a:t>
+              <a:t>6</a:t>
             </a:r>
           </a:p>
         </p:txBody>
@@ -8109,7 +8164,7 @@
                 </a:solidFill>
                 <a:latin typeface="Calibri"/>
               </a:rPr>
-              <a:t>host programmes: Twente x2, EPFL, KTH</a:t>
+              <a:t>host programmes: Twente x2, Delft, Milan, EPFL, KTH</a:t>
             </a:r>
           </a:p>
         </p:txBody>
@@ -8194,7 +8249,7 @@
                 </a:solidFill>
                 <a:latin typeface="Cambria"/>
               </a:rPr>
-              <a:t>298</a:t>
+              <a:t>378</a:t>
             </a:r>
           </a:p>
         </p:txBody>
@@ -9337,7 +9392,7 @@
                 </a:solidFill>
                 <a:latin typeface="Calibri"/>
               </a:rPr>
-              <a:t>Default strategy is hybrid (ADR-0005): level with hybrid+ce on quality, about 400 times cheaper per query.</a:t>
+              <a:t>Default strategy is hybrid (ADR-0005): level with hybrid+ce on quality, about 300 times cheaper per query.</a:t>
             </a:r>
           </a:p>
         </p:txBody>
@@ -9415,7 +9470,7 @@
         </p:nvSpPr>
         <p:spPr>
           <a:xfrm>
-            <a:off x="731520" y="1508760"/>
+            <a:off x="731520" y="1417320"/>
             <a:ext cx="502920" cy="502920"/>
           </a:xfrm>
           <a:prstGeom prst="ellipse">
@@ -9468,7 +9523,7 @@
         </p:nvSpPr>
         <p:spPr>
           <a:xfrm>
-            <a:off x="1508760" y="1554480"/>
+            <a:off x="1508760" y="1463040"/>
             <a:ext cx="9875520" cy="548640"/>
           </a:xfrm>
           <a:prstGeom prst="rect">
@@ -9507,7 +9562,7 @@
         </p:nvSpPr>
         <p:spPr>
           <a:xfrm>
-            <a:off x="731520" y="2423160"/>
+            <a:off x="731520" y="2240280"/>
             <a:ext cx="502920" cy="502920"/>
           </a:xfrm>
           <a:prstGeom prst="ellipse">
@@ -9560,7 +9615,7 @@
         </p:nvSpPr>
         <p:spPr>
           <a:xfrm>
-            <a:off x="1508760" y="2468880"/>
+            <a:off x="1508760" y="2286000"/>
             <a:ext cx="9875520" cy="548640"/>
           </a:xfrm>
           <a:prstGeom prst="rect">
@@ -9599,7 +9654,7 @@
         </p:nvSpPr>
         <p:spPr>
           <a:xfrm>
-            <a:off x="731520" y="3337560"/>
+            <a:off x="731520" y="3063240"/>
             <a:ext cx="502920" cy="502920"/>
           </a:xfrm>
           <a:prstGeom prst="ellipse">
@@ -9652,7 +9707,7 @@
         </p:nvSpPr>
         <p:spPr>
           <a:xfrm>
-            <a:off x="1508760" y="3383280"/>
+            <a:off x="1508760" y="3108960"/>
             <a:ext cx="9875520" cy="548640"/>
           </a:xfrm>
           <a:prstGeom prst="rect">
@@ -9691,7 +9746,7 @@
         </p:nvSpPr>
         <p:spPr>
           <a:xfrm>
-            <a:off x="731520" y="4251960"/>
+            <a:off x="731520" y="3886200"/>
             <a:ext cx="502920" cy="502920"/>
           </a:xfrm>
           <a:prstGeom prst="ellipse">
@@ -9744,7 +9799,7 @@
         </p:nvSpPr>
         <p:spPr>
           <a:xfrm>
-            <a:off x="1508760" y="4297680"/>
+            <a:off x="1508760" y="3931920"/>
             <a:ext cx="9875520" cy="548640"/>
           </a:xfrm>
           <a:prstGeom prst="rect">
@@ -9783,7 +9838,7 @@
         </p:nvSpPr>
         <p:spPr>
           <a:xfrm>
-            <a:off x="731520" y="5166360"/>
+            <a:off x="731520" y="4709160"/>
             <a:ext cx="502920" cy="502920"/>
           </a:xfrm>
           <a:prstGeom prst="ellipse">
@@ -9836,7 +9891,99 @@
         </p:nvSpPr>
         <p:spPr>
           <a:xfrm>
-            <a:off x="1508760" y="5212080"/>
+            <a:off x="1508760" y="4754880"/>
+            <a:ext cx="9875520" cy="548640"/>
+          </a:xfrm>
+          <a:prstGeom prst="rect">
+            <a:avLst/>
+          </a:prstGeom>
+          <a:noFill/>
+        </p:spPr>
+        <p:txBody>
+          <a:bodyPr wrap="square" anchor="ctr" lIns="0" rIns="0" tIns="0" bIns="0">
+            <a:spAutoFit/>
+          </a:bodyPr>
+          <a:lstStyle/>
+          <a:p>
+            <a:pPr algn="l">
+              <a:spcAft>
+                <a:spcPts val="800"/>
+              </a:spcAft>
+            </a:pPr>
+            <a:r>
+              <a:rPr sz="1800" b="0" i="0">
+                <a:solidFill>
+                  <a:srgbClr val="FFFFFF"/>
+                </a:solidFill>
+                <a:latin typeface="Calibri"/>
+              </a:rPr>
+              <a:t>Switch the host to TU Delft, never evaluated or tuned on: it still matches.</a:t>
+            </a:r>
+          </a:p>
+        </p:txBody>
+      </p:sp>
+      <p:sp>
+        <p:nvSpPr>
+          <p:cNvPr id="13" name="Oval 12"/>
+          <p:cNvSpPr/>
+          <p:nvPr/>
+        </p:nvSpPr>
+        <p:spPr>
+          <a:xfrm>
+            <a:off x="731520" y="5532120"/>
+            <a:ext cx="502920" cy="502920"/>
+          </a:xfrm>
+          <a:prstGeom prst="ellipse">
+            <a:avLst/>
+          </a:prstGeom>
+          <a:solidFill>
+            <a:srgbClr val="F2B705"/>
+          </a:solidFill>
+          <a:ln>
+            <a:noFill/>
+          </a:ln>
+          <a:effectLst/>
+        </p:spPr>
+        <p:style>
+          <a:lnRef idx="1">
+            <a:schemeClr val="accent1"/>
+          </a:lnRef>
+          <a:fillRef idx="3">
+            <a:schemeClr val="accent1"/>
+          </a:fillRef>
+          <a:effectRef idx="2">
+            <a:schemeClr val="accent1"/>
+          </a:effectRef>
+          <a:fontRef idx="minor">
+            <a:schemeClr val="lt1"/>
+          </a:fontRef>
+        </p:style>
+        <p:txBody>
+          <a:bodyPr rtlCol="0" anchor="ctr" lIns="0" rIns="0" tIns="0" bIns="0"/>
+          <a:lstStyle/>
+          <a:p>
+            <a:pPr algn="ctr"/>
+            <a:r>
+              <a:rPr sz="1800" b="1">
+                <a:solidFill>
+                  <a:srgbClr val="14234B"/>
+                </a:solidFill>
+                <a:latin typeface="Cambria"/>
+              </a:rPr>
+              <a:t>6</a:t>
+            </a:r>
+          </a:p>
+        </p:txBody>
+      </p:sp>
+      <p:sp>
+        <p:nvSpPr>
+          <p:cNvPr id="14" name="TextBox 13"/>
+          <p:cNvSpPr txBox="1"/>
+          <p:nvPr/>
+        </p:nvSpPr>
+        <p:spPr>
+          <a:xfrm>
+            <a:off x="1508760" y="5577840"/>
             <a:ext cx="9875520" cy="548640"/>
           </a:xfrm>
           <a:prstGeom prst="rect">
@@ -9934,7 +10081,62 @@
       </p:sp>
       <p:sp>
         <p:nvSpPr>
-          <p:cNvPr id="3" name="Oval 2"/>
+          <p:cNvPr id="3" name="Rounded Rectangle 2"/>
+          <p:cNvSpPr/>
+          <p:nvPr/>
+        </p:nvSpPr>
+        <p:spPr>
+          <a:xfrm>
+            <a:off x="9464040" y="457200"/>
+            <a:ext cx="2194560" cy="384048"/>
+          </a:xfrm>
+          <a:prstGeom prst="roundRect">
+            <a:avLst>
+              <a:gd name="adj" fmla="val 12000"/>
+            </a:avLst>
+          </a:prstGeom>
+          <a:solidFill>
+            <a:srgbClr val="F2B705"/>
+          </a:solidFill>
+          <a:ln>
+            <a:noFill/>
+          </a:ln>
+          <a:effectLst/>
+        </p:spPr>
+        <p:style>
+          <a:lnRef idx="1">
+            <a:schemeClr val="accent1"/>
+          </a:lnRef>
+          <a:fillRef idx="3">
+            <a:schemeClr val="accent1"/>
+          </a:fillRef>
+          <a:effectRef idx="2">
+            <a:schemeClr val="accent1"/>
+          </a:effectRef>
+          <a:fontRef idx="minor">
+            <a:schemeClr val="lt1"/>
+          </a:fontRef>
+        </p:style>
+        <p:txBody>
+          <a:bodyPr rtlCol="0" anchor="ctr" tIns="0" bIns="0"/>
+          <a:lstStyle/>
+          <a:p>
+            <a:pPr algn="ctr"/>
+            <a:r>
+              <a:rPr sz="1200" b="1">
+                <a:solidFill>
+                  <a:srgbClr val="14234B"/>
+                </a:solidFill>
+                <a:latin typeface="Calibri"/>
+              </a:rPr>
+              <a:t>PARTLY MODEL-LABELLED</a:t>
+            </a:r>
+          </a:p>
+        </p:txBody>
+      </p:sp>
+      <p:sp>
+        <p:nvSpPr>
+          <p:cNvPr id="4" name="Oval 3"/>
           <p:cNvSpPr/>
           <p:nvPr/>
         </p:nvSpPr>
@@ -9987,7 +10189,7 @@
       </p:sp>
       <p:sp>
         <p:nvSpPr>
-          <p:cNvPr id="4" name="TextBox 3"/>
+          <p:cNvPr id="5" name="TextBox 4"/>
           <p:cNvSpPr txBox="1"/>
           <p:nvPr/>
         </p:nvSpPr>
@@ -10026,7 +10228,7 @@
       </p:sp>
       <p:sp>
         <p:nvSpPr>
-          <p:cNvPr id="5" name="TextBox 4"/>
+          <p:cNvPr id="6" name="TextBox 5"/>
           <p:cNvSpPr txBox="1"/>
           <p:nvPr/>
         </p:nvSpPr>
@@ -10065,7 +10267,7 @@
       </p:sp>
       <p:sp>
         <p:nvSpPr>
-          <p:cNvPr id="6" name="Oval 5"/>
+          <p:cNvPr id="7" name="Oval 6"/>
           <p:cNvSpPr/>
           <p:nvPr/>
         </p:nvSpPr>
@@ -10118,7 +10320,7 @@
       </p:sp>
       <p:sp>
         <p:nvSpPr>
-          <p:cNvPr id="7" name="TextBox 6"/>
+          <p:cNvPr id="8" name="TextBox 7"/>
           <p:cNvSpPr txBox="1"/>
           <p:nvPr/>
         </p:nvSpPr>
@@ -10157,7 +10359,7 @@
       </p:sp>
       <p:sp>
         <p:nvSpPr>
-          <p:cNvPr id="8" name="TextBox 7"/>
+          <p:cNvPr id="9" name="TextBox 8"/>
           <p:cNvSpPr txBox="1"/>
           <p:nvPr/>
         </p:nvSpPr>
@@ -10196,7 +10398,7 @@
       </p:sp>
       <p:sp>
         <p:nvSpPr>
-          <p:cNvPr id="9" name="Oval 8"/>
+          <p:cNvPr id="10" name="Oval 9"/>
           <p:cNvSpPr/>
           <p:nvPr/>
         </p:nvSpPr>
@@ -10249,7 +10451,7 @@
       </p:sp>
       <p:sp>
         <p:nvSpPr>
-          <p:cNvPr id="10" name="TextBox 9"/>
+          <p:cNvPr id="11" name="TextBox 10"/>
           <p:cNvSpPr txBox="1"/>
           <p:nvPr/>
         </p:nvSpPr>
@@ -10288,7 +10490,7 @@
       </p:sp>
       <p:sp>
         <p:nvSpPr>
-          <p:cNvPr id="11" name="TextBox 10"/>
+          <p:cNvPr id="12" name="TextBox 11"/>
           <p:cNvSpPr txBox="1"/>
           <p:nvPr/>
         </p:nvSpPr>
@@ -10327,7 +10529,7 @@
       </p:sp>
       <p:sp>
         <p:nvSpPr>
-          <p:cNvPr id="12" name="Oval 11"/>
+          <p:cNvPr id="13" name="Oval 12"/>
           <p:cNvSpPr/>
           <p:nvPr/>
         </p:nvSpPr>
@@ -10380,7 +10582,7 @@
       </p:sp>
       <p:sp>
         <p:nvSpPr>
-          <p:cNvPr id="13" name="TextBox 12"/>
+          <p:cNvPr id="14" name="TextBox 13"/>
           <p:cNvSpPr txBox="1"/>
           <p:nvPr/>
         </p:nvSpPr>
@@ -10419,7 +10621,7 @@
       </p:sp>
       <p:sp>
         <p:nvSpPr>
-          <p:cNvPr id="14" name="TextBox 13"/>
+          <p:cNvPr id="15" name="TextBox 14"/>
           <p:cNvSpPr txBox="1"/>
           <p:nvPr/>
         </p:nvSpPr>
@@ -10458,7 +10660,7 @@
       </p:sp>
       <p:sp>
         <p:nvSpPr>
-          <p:cNvPr id="15" name="Rounded Rectangle 14"/>
+          <p:cNvPr id="16" name="Rounded Rectangle 15"/>
           <p:cNvSpPr/>
           <p:nvPr/>
         </p:nvSpPr>
@@ -10504,7 +10706,7 @@
       </p:sp>
       <p:sp>
         <p:nvSpPr>
-          <p:cNvPr id="16" name="TextBox 15"/>
+          <p:cNvPr id="17" name="TextBox 16"/>
           <p:cNvSpPr txBox="1"/>
           <p:nvPr/>
         </p:nvSpPr>
@@ -10543,7 +10745,7 @@
       </p:sp>
       <p:sp>
         <p:nvSpPr>
-          <p:cNvPr id="17" name="TextBox 16"/>
+          <p:cNvPr id="18" name="TextBox 17"/>
           <p:cNvSpPr txBox="1"/>
           <p:nvPr/>
         </p:nvSpPr>
@@ -10582,7 +10784,7 @@
       </p:sp>
       <p:sp>
         <p:nvSpPr>
-          <p:cNvPr id="18" name="Rounded Rectangle 17"/>
+          <p:cNvPr id="19" name="Rounded Rectangle 18"/>
           <p:cNvSpPr/>
           <p:nvPr/>
         </p:nvSpPr>
@@ -10628,7 +10830,7 @@
       </p:sp>
       <p:sp>
         <p:nvSpPr>
-          <p:cNvPr id="19" name="TextBox 18"/>
+          <p:cNvPr id="20" name="TextBox 19"/>
           <p:cNvSpPr txBox="1"/>
           <p:nvPr/>
         </p:nvSpPr>
@@ -10667,7 +10869,7 @@
       </p:sp>
       <p:sp>
         <p:nvSpPr>
-          <p:cNvPr id="20" name="TextBox 19"/>
+          <p:cNvPr id="21" name="TextBox 20"/>
           <p:cNvSpPr txBox="1"/>
           <p:nvPr/>
         </p:nvSpPr>
@@ -10699,14 +10901,14 @@
                 </a:solidFill>
                 <a:latin typeface="Cambria"/>
               </a:rPr>
-              <a:t>pending</a:t>
-            </a:r>
-          </a:p>
-        </p:txBody>
-      </p:sp>
-      <p:sp>
-        <p:nvSpPr>
-          <p:cNvPr id="21" name="Rounded Rectangle 20"/>
+              <a:t>0.73 (weighted, 8 pairs)</a:t>
+            </a:r>
+          </a:p>
+        </p:txBody>
+      </p:sp>
+      <p:sp>
+        <p:nvSpPr>
+          <p:cNvPr id="22" name="Rounded Rectangle 21"/>
           <p:cNvSpPr/>
           <p:nvPr/>
         </p:nvSpPr>
@@ -10752,7 +10954,7 @@
       </p:sp>
       <p:sp>
         <p:nvSpPr>
-          <p:cNvPr id="22" name="TextBox 21"/>
+          <p:cNvPr id="23" name="TextBox 22"/>
           <p:cNvSpPr txBox="1"/>
           <p:nvPr/>
         </p:nvSpPr>
@@ -10791,7 +10993,7 @@
       </p:sp>
       <p:sp>
         <p:nvSpPr>
-          <p:cNvPr id="23" name="TextBox 22"/>
+          <p:cNvPr id="24" name="TextBox 23"/>
           <p:cNvSpPr txBox="1"/>
           <p:nvPr/>
         </p:nvSpPr>
@@ -10893,9 +11095,64 @@
           </a:p>
         </p:txBody>
       </p:sp>
+      <p:sp>
+        <p:nvSpPr>
+          <p:cNvPr id="3" name="Rounded Rectangle 2"/>
+          <p:cNvSpPr/>
+          <p:nvPr/>
+        </p:nvSpPr>
+        <p:spPr>
+          <a:xfrm>
+            <a:off x="9464040" y="457200"/>
+            <a:ext cx="2194560" cy="384048"/>
+          </a:xfrm>
+          <a:prstGeom prst="roundRect">
+            <a:avLst>
+              <a:gd name="adj" fmla="val 12000"/>
+            </a:avLst>
+          </a:prstGeom>
+          <a:solidFill>
+            <a:srgbClr val="F2B705"/>
+          </a:solidFill>
+          <a:ln>
+            <a:noFill/>
+          </a:ln>
+          <a:effectLst/>
+        </p:spPr>
+        <p:style>
+          <a:lnRef idx="1">
+            <a:schemeClr val="accent1"/>
+          </a:lnRef>
+          <a:fillRef idx="3">
+            <a:schemeClr val="accent1"/>
+          </a:fillRef>
+          <a:effectRef idx="2">
+            <a:schemeClr val="accent1"/>
+          </a:effectRef>
+          <a:fontRef idx="minor">
+            <a:schemeClr val="lt1"/>
+          </a:fontRef>
+        </p:style>
+        <p:txBody>
+          <a:bodyPr rtlCol="0" anchor="ctr" tIns="0" bIns="0"/>
+          <a:lstStyle/>
+          <a:p>
+            <a:pPr algn="ctr"/>
+            <a:r>
+              <a:rPr sz="1200" b="1">
+                <a:solidFill>
+                  <a:srgbClr val="14234B"/>
+                </a:solidFill>
+                <a:latin typeface="Calibri"/>
+              </a:rPr>
+              <a:t>PARTLY MODEL-LABELLED</a:t>
+            </a:r>
+          </a:p>
+        </p:txBody>
+      </p:sp>
       <p:graphicFrame>
         <p:nvGraphicFramePr>
-          <p:cNvPr id="3" name="Chart 2"/>
+          <p:cNvPr id="4" name="Chart 3"/>
           <p:cNvGraphicFramePr>
             <a:graphicFrameLocks noGrp="1"/>
           </p:cNvGraphicFramePr>
@@ -10913,7 +11170,7 @@
       </p:graphicFrame>
       <p:sp>
         <p:nvSpPr>
-          <p:cNvPr id="4" name="TextBox 3"/>
+          <p:cNvPr id="5" name="TextBox 4"/>
           <p:cNvSpPr txBox="1"/>
           <p:nvPr/>
         </p:nvSpPr>
@@ -10952,7 +11209,7 @@
       </p:sp>
       <p:sp>
         <p:nvSpPr>
-          <p:cNvPr id="5" name="Rounded Rectangle 4"/>
+          <p:cNvPr id="6" name="Rounded Rectangle 5"/>
           <p:cNvSpPr/>
           <p:nvPr/>
         </p:nvSpPr>
@@ -10998,7 +11255,7 @@
       </p:sp>
       <p:sp>
         <p:nvSpPr>
-          <p:cNvPr id="6" name="TextBox 5"/>
+          <p:cNvPr id="7" name="TextBox 6"/>
           <p:cNvSpPr txBox="1"/>
           <p:nvPr/>
         </p:nvSpPr>
@@ -11037,7 +11294,7 @@
       </p:sp>
       <p:sp>
         <p:nvSpPr>
-          <p:cNvPr id="7" name="TextBox 6"/>
+          <p:cNvPr id="8" name="TextBox 7"/>
           <p:cNvSpPr txBox="1"/>
           <p:nvPr/>
         </p:nvSpPr>
@@ -11076,7 +11333,7 @@
       </p:sp>
       <p:sp>
         <p:nvSpPr>
-          <p:cNvPr id="8" name="Rounded Rectangle 7"/>
+          <p:cNvPr id="9" name="Rounded Rectangle 8"/>
           <p:cNvSpPr/>
           <p:nvPr/>
         </p:nvSpPr>
@@ -11122,7 +11379,7 @@
       </p:sp>
       <p:sp>
         <p:nvSpPr>
-          <p:cNvPr id="9" name="TextBox 8"/>
+          <p:cNvPr id="10" name="TextBox 9"/>
           <p:cNvSpPr txBox="1"/>
           <p:nvPr/>
         </p:nvSpPr>
@@ -11161,7 +11418,7 @@
       </p:sp>
       <p:sp>
         <p:nvSpPr>
-          <p:cNvPr id="10" name="TextBox 9"/>
+          <p:cNvPr id="11" name="TextBox 10"/>
           <p:cNvSpPr txBox="1"/>
           <p:nvPr/>
         </p:nvSpPr>
@@ -11200,7 +11457,7 @@
       </p:sp>
       <p:sp>
         <p:nvSpPr>
-          <p:cNvPr id="11" name="TextBox 10"/>
+          <p:cNvPr id="12" name="TextBox 11"/>
           <p:cNvSpPr txBox="1"/>
           <p:nvPr/>
         </p:nvSpPr>
@@ -11302,9 +11559,64 @@
           </a:p>
         </p:txBody>
       </p:sp>
+      <p:sp>
+        <p:nvSpPr>
+          <p:cNvPr id="3" name="Rounded Rectangle 2"/>
+          <p:cNvSpPr/>
+          <p:nvPr/>
+        </p:nvSpPr>
+        <p:spPr>
+          <a:xfrm>
+            <a:off x="9464040" y="457200"/>
+            <a:ext cx="2194560" cy="384048"/>
+          </a:xfrm>
+          <a:prstGeom prst="roundRect">
+            <a:avLst>
+              <a:gd name="adj" fmla="val 12000"/>
+            </a:avLst>
+          </a:prstGeom>
+          <a:solidFill>
+            <a:srgbClr val="F2B705"/>
+          </a:solidFill>
+          <a:ln>
+            <a:noFill/>
+          </a:ln>
+          <a:effectLst/>
+        </p:spPr>
+        <p:style>
+          <a:lnRef idx="1">
+            <a:schemeClr val="accent1"/>
+          </a:lnRef>
+          <a:fillRef idx="3">
+            <a:schemeClr val="accent1"/>
+          </a:fillRef>
+          <a:effectRef idx="2">
+            <a:schemeClr val="accent1"/>
+          </a:effectRef>
+          <a:fontRef idx="minor">
+            <a:schemeClr val="lt1"/>
+          </a:fontRef>
+        </p:style>
+        <p:txBody>
+          <a:bodyPr rtlCol="0" anchor="ctr" tIns="0" bIns="0"/>
+          <a:lstStyle/>
+          <a:p>
+            <a:pPr algn="ctr"/>
+            <a:r>
+              <a:rPr sz="1200" b="1">
+                <a:solidFill>
+                  <a:srgbClr val="14234B"/>
+                </a:solidFill>
+                <a:latin typeface="Calibri"/>
+              </a:rPr>
+              <a:t>PROVISIONAL LABELS</a:t>
+            </a:r>
+          </a:p>
+        </p:txBody>
+      </p:sp>
       <p:graphicFrame>
         <p:nvGraphicFramePr>
-          <p:cNvPr id="3" name="Chart 2"/>
+          <p:cNvPr id="4" name="Chart 3"/>
           <p:cNvGraphicFramePr>
             <a:graphicFrameLocks noGrp="1"/>
           </p:cNvGraphicFramePr>
@@ -11322,7 +11634,7 @@
       </p:graphicFrame>
       <p:sp>
         <p:nvSpPr>
-          <p:cNvPr id="4" name="TextBox 3"/>
+          <p:cNvPr id="5" name="TextBox 4"/>
           <p:cNvSpPr txBox="1"/>
           <p:nvPr/>
         </p:nvSpPr>
@@ -11506,7 +11818,7 @@
                 </a:solidFill>
                 <a:latin typeface="Calibri"/>
               </a:rPr>
-              <a:t>PROVISIONAL LABELS</a:t>
+              <a:t>PARTLY MODEL-LABELLED</a:t>
             </a:r>
           </a:p>
         </p:txBody>
@@ -12276,7 +12588,7 @@
                 </a:solidFill>
                 <a:latin typeface="Calibri"/>
               </a:rPr>
-              <a:t>While a calibration rests on machine labels, every probability and the ECTS estimate carry a warning. The flag is read from the calibration file, not typed into the interface.</a:t>
+              <a:t>While a calibration rests on labels that are not all a person's, every probability and the ECTS estimate carry a warning. The flag is read from the calibration file, not typed into the interface.</a:t>
             </a:r>
           </a:p>
         </p:txBody>
@@ -12453,7 +12765,7 @@
                 </a:solidFill>
                 <a:latin typeface="Calibri"/>
               </a:rPr>
-              <a:t>It shows how many of the 1142 gold pairs a human has checked (1142 today) and stays provisional until every one is.</a:t>
+              <a:t>It says how many of the 1142 gold labels a person gave (680) and how many a second model gave (462), instead of calling them all checked.</a:t>
             </a:r>
           </a:p>
         </p:txBody>

--- a/docs/slides/erasmusgpt-defence.pptx
+++ b/docs/slides/erasmusgpt-defence.pptx
@@ -722,7 +722,7 @@
           <a:p>
             <a:r>
               <a:rPr sz="1300"/>
-              <a:t>Calibration of hybrid, 1142 pairs</a:t>
+              <a:t>Calibration of hybrid, 1116 pairs</a:t>
             </a:r>
           </a:p>
         </c:rich>
@@ -784,19 +784,19 @@
                 <c:formatCode>General</c:formatCode>
                 <c:ptCount val="5"/>
                 <c:pt idx="0">
-                  <c:v>0.029</c:v>
+                  <c:v>0.032</c:v>
                 </c:pt>
                 <c:pt idx="1">
-                  <c:v>0.291</c:v>
+                  <c:v>0.285</c:v>
                 </c:pt>
                 <c:pt idx="2">
-                  <c:v>0.498</c:v>
+                  <c:v>0.48</c:v>
                 </c:pt>
                 <c:pt idx="3">
-                  <c:v>0.679</c:v>
+                  <c:v>0.695</c:v>
                 </c:pt>
                 <c:pt idx="4">
-                  <c:v>0.903</c:v>
+                  <c:v>0.901</c:v>
                 </c:pt>
               </c:numCache>
             </c:numRef>
@@ -851,16 +851,16 @@
                 <c:formatCode>General</c:formatCode>
                 <c:ptCount val="5"/>
                 <c:pt idx="0">
-                  <c:v>0.033</c:v>
+                  <c:v>0.035</c:v>
                 </c:pt>
                 <c:pt idx="1">
-                  <c:v>0.277</c:v>
+                  <c:v>0.26</c:v>
                 </c:pt>
                 <c:pt idx="2">
-                  <c:v>0.342</c:v>
+                  <c:v>0.341</c:v>
                 </c:pt>
                 <c:pt idx="3">
-                  <c:v>0.667</c:v>
+                  <c:v>0.783</c:v>
                 </c:pt>
                 <c:pt idx="4">
                   <c:v>1.0</c:v>
@@ -8164,7 +8164,7 @@
                 </a:solidFill>
                 <a:latin typeface="Calibri"/>
               </a:rPr>
-              <a:t>host programmes: Twente x2, Delft, Milan, EPFL, KTH</a:t>
+              <a:t>host programmes: EPFL, Delft, Milan, KTH, Twente x2</a:t>
             </a:r>
           </a:p>
         </p:txBody>
@@ -9641,7 +9641,7 @@
                 </a:solidFill>
                 <a:latin typeface="Calibri"/>
               </a:rPr>
-              <a:t>Home UNS PMF Informatics, host Twente TCS, strategy hybrid: 50 courses in about 0.1 s.</a:t>
+              <a:t>Home UNS PMF Informatics, host TU Delft, strategy hybrid: 50 courses in about 0.1 s.</a:t>
             </a:r>
           </a:p>
         </p:txBody>
@@ -11090,7 +11090,7 @@
                 </a:solidFill>
                 <a:latin typeface="Cambria"/>
               </a:rPr>
-              <a:t>Results against Twente TCS</a:t>
+              <a:t>Measured results (labelled host: Twente TCS)</a:t>
             </a:r>
           </a:p>
         </p:txBody>
@@ -11411,7 +11411,7 @@
                 </a:solidFill>
                 <a:latin typeface="Cambria"/>
               </a:rPr>
-              <a:t>868 ms</a:t>
+              <a:t>883 ms</a:t>
             </a:r>
           </a:p>
         </p:txBody>

--- a/docs/slides/erasmusgpt-defence.pptx
+++ b/docs/slides/erasmusgpt-defence.pptx
@@ -1768,7 +1768,7 @@
           <a:lstStyle/>
           <a:p>
             <a:r>
-              <a:t>B drives, A narrates the matches. Rehearsed offline (S7-AB2), script in docs/07-demo-script.md. If the demo fails, the screenshots taken during the rehearsal, in docs/screenshots/, are the fallback.</a:t>
+              <a:t>B drives, A narrates the matches. Rehearsed offline (S7-AB2), script in docs/07-demo-script.md. If the demo fails, say what should have happened and go on to the evaluation slides.</a:t>
             </a:r>
           </a:p>
         </p:txBody>
@@ -9917,7 +9917,7 @@
                 </a:solidFill>
                 <a:latin typeface="Calibri"/>
               </a:rPr>
-              <a:t>Switch the host to TU Delft, never evaluated or tuned on: it still matches.</a:t>
+              <a:t>No suitable match: under 20 % it says so instead of showing a weak top hit.</a:t>
             </a:r>
           </a:p>
         </p:txBody>

--- a/docs/slides/erasmusgpt-defence.pptx
+++ b/docs/slides/erasmusgpt-defence.pptx
@@ -17,6 +17,7 @@
     <p:sldId id="265" r:id="rId17"/>
     <p:sldId id="266" r:id="rId18"/>
     <p:sldId id="267" r:id="rId19"/>
+    <p:sldId id="268" r:id="rId20"/>
   </p:sldIdLst>
   <p:sldSz cx="12192000" cy="6858000" type="screen4x3"/>
   <p:notesSz cx="6858000" cy="9144000"/>
@@ -1418,7 +1419,7 @@
           <a:lstStyle/>
           <a:p>
             <a:r>
-              <a:t>A. From eval/report/errors.md. The most common failure is answering when it should decline, which is a threshold question rather than a ranking defect.</a:t>
+              <a:t>B. frontend/src/lib/score.ts, the calibrated and provisional flags on GET /api/v1/strategies, and GET /api/v1/evaluation. The point: the numbers are only as good as the labels, and the interface never claims more than that.</a:t>
             </a:r>
           </a:p>
         </p:txBody>
@@ -1488,7 +1489,7 @@
           <a:lstStyle/>
           <a:p>
             <a:r>
-              <a:t>B. Details in docs/06-defence-notes-b.md: the contract, the stub and real split, why SQLite, why the models are baked in.</a:t>
+              <a:t>A. From eval/report/errors.md. The most common failure is answering when it should decline, which is a threshold question rather than a ranking defect.</a:t>
             </a:r>
           </a:p>
         </p:txBody>
@@ -1558,6 +1559,76 @@
           <a:lstStyle/>
           <a:p>
             <a:r>
+              <a:t>B. Details in docs/06-defence-notes-b.md: the contract, the stub and real split, why SQLite, why the models are baked in.</a:t>
+            </a:r>
+          </a:p>
+        </p:txBody>
+      </p:sp>
+      <p:sp>
+        <p:nvSpPr>
+          <p:cNvPr id="4" name="Slide Number Placeholder 3"/>
+          <p:cNvSpPr>
+            <a:spLocks noGrp="1"/>
+          </p:cNvSpPr>
+          <p:nvPr>
+            <p:ph type="sldNum" idx="5" sz="quarter"/>
+          </p:nvPr>
+        </p:nvSpPr>
+        <p:spPr/>
+      </p:sp>
+    </p:spTree>
+  </p:cSld>
+  <p:clrMapOvr>
+    <a:masterClrMapping/>
+  </p:clrMapOvr>
+</p:notes>
+</file>
+
+<file path=ppt/notesSlides/notesSlide13.xml><?xml version="1.0" encoding="utf-8"?>
+<p:notes xmlns:a="http://schemas.openxmlformats.org/drawingml/2006/main" xmlns:p="http://schemas.openxmlformats.org/presentationml/2006/main" xmlns:r="http://schemas.openxmlformats.org/officeDocument/2006/relationships">
+  <p:cSld>
+    <p:spTree>
+      <p:nvGrpSpPr>
+        <p:cNvPr id="1" name=""/>
+        <p:cNvGrpSpPr/>
+        <p:nvPr/>
+      </p:nvGrpSpPr>
+      <p:grpSpPr>
+        <a:xfrm>
+          <a:off x="0" y="0"/>
+          <a:ext cx="0" cy="0"/>
+          <a:chOff x="0" y="0"/>
+          <a:chExt cx="0" cy="0"/>
+        </a:xfrm>
+      </p:grpSpPr>
+      <p:sp>
+        <p:nvSpPr>
+          <p:cNvPr id="2" name="Slide Image Placeholder 1"/>
+          <p:cNvSpPr>
+            <a:spLocks noGrp="1"/>
+          </p:cNvSpPr>
+          <p:nvPr>
+            <p:ph type="sldImg" idx="2"/>
+          </p:nvPr>
+        </p:nvSpPr>
+        <p:spPr/>
+      </p:sp>
+      <p:sp>
+        <p:nvSpPr>
+          <p:cNvPr id="3" name="Notes Placeholder 2"/>
+          <p:cNvSpPr>
+            <a:spLocks noGrp="1"/>
+          </p:cNvSpPr>
+          <p:nvPr>
+            <p:ph type="body" idx="3" sz="quarter"/>
+          </p:nvPr>
+        </p:nvSpPr>
+        <p:spPr/>
+        <p:txBody>
+          <a:bodyPr/>
+          <a:lstStyle/>
+          <a:p>
+            <a:r>
               <a:t>Both. A takes NLP and IR questions, B takes engineering questions.</a:t>
             </a:r>
           </a:p>
@@ -1978,7 +2049,7 @@
           <a:lstStyle/>
           <a:p>
             <a:r>
-              <a:t>A. If asked whether the project failed because the reranker did not win: the comparison is the result, and it is measured and explained. Numbers from eval/report/ablations.md sections 1 and 1b, on the pre-labels; on the final labels the fused reranker is level with hybrid (previous slide).</a:t>
+              <a:t>A. Say first that these labels are a model's, not a human's, and why they exist: the gold set covers Twente only. Numbers from eval/report/silver.md. BM25's P@1 lead is not tested for significance there; the paired tests against the baseline are all non-significant.</a:t>
             </a:r>
           </a:p>
         </p:txBody>
@@ -2048,7 +2119,7 @@
           <a:lstStyle/>
           <a:p>
             <a:r>
-              <a:t>A. Without calibration the percentage is a display value and cannot be summed; the interface refuses the ECTS total for an uncalibrated strategy. Quote the estimate with positive label 1 and 2, the gap is the partial-match question.</a:t>
+              <a:t>A. If asked whether the project failed because the reranker did not win: the comparison is the result, and it is measured and explained. Numbers from eval/report/ablations.md sections 1 and 1b, on the pre-labels; on the final labels the fused reranker is level with hybrid (previous slide).</a:t>
             </a:r>
           </a:p>
         </p:txBody>
@@ -2118,7 +2189,7 @@
           <a:lstStyle/>
           <a:p>
             <a:r>
-              <a:t>B. frontend/src/lib/score.ts, the calibrated and provisional flags on GET /api/v1/strategies, and GET /api/v1/evaluation. The point: the numbers are only as good as the labels, and the interface never claims more than that.</a:t>
+              <a:t>A. Without calibration the percentage is a display value and cannot be summed; the interface refuses the ECTS total for an uncalibrated strategy. Quote the estimate with positive label 1 and 2, the gap is the partial-match question.</a:t>
             </a:r>
           </a:p>
         </p:txBody>
@@ -5892,7 +5963,7 @@
                 </a:solidFill>
                 <a:latin typeface="Cambria"/>
               </a:rPr>
-              <a:t>Where it goes wrong</a:t>
+              <a:t>An interface that does not overstate</a:t>
             </a:r>
           </a:p>
         </p:txBody>
@@ -5900,61 +5971,6 @@
       <p:sp>
         <p:nvSpPr>
           <p:cNvPr id="3" name="Rounded Rectangle 2"/>
-          <p:cNvSpPr/>
-          <p:nvPr/>
-        </p:nvSpPr>
-        <p:spPr>
-          <a:xfrm>
-            <a:off x="9464040" y="457200"/>
-            <a:ext cx="2194560" cy="384048"/>
-          </a:xfrm>
-          <a:prstGeom prst="roundRect">
-            <a:avLst>
-              <a:gd name="adj" fmla="val 12000"/>
-            </a:avLst>
-          </a:prstGeom>
-          <a:solidFill>
-            <a:srgbClr val="F2B705"/>
-          </a:solidFill>
-          <a:ln>
-            <a:noFill/>
-          </a:ln>
-          <a:effectLst/>
-        </p:spPr>
-        <p:style>
-          <a:lnRef idx="1">
-            <a:schemeClr val="accent1"/>
-          </a:lnRef>
-          <a:fillRef idx="3">
-            <a:schemeClr val="accent1"/>
-          </a:fillRef>
-          <a:effectRef idx="2">
-            <a:schemeClr val="accent1"/>
-          </a:effectRef>
-          <a:fontRef idx="minor">
-            <a:schemeClr val="lt1"/>
-          </a:fontRef>
-        </p:style>
-        <p:txBody>
-          <a:bodyPr rtlCol="0" anchor="ctr" tIns="0" bIns="0"/>
-          <a:lstStyle/>
-          <a:p>
-            <a:pPr algn="ctr"/>
-            <a:r>
-              <a:rPr sz="1200" b="1">
-                <a:solidFill>
-                  <a:srgbClr val="14234B"/>
-                </a:solidFill>
-                <a:latin typeface="Calibri"/>
-              </a:rPr>
-              <a:t>PARTLY MODEL-LABELLED</a:t>
-            </a:r>
-          </a:p>
-        </p:txBody>
-      </p:sp>
-      <p:sp>
-        <p:nvSpPr>
-          <p:cNvPr id="4" name="Rounded Rectangle 3"/>
           <p:cNvSpPr/>
           <p:nvPr/>
         </p:nvSpPr>
@@ -6000,7 +6016,7 @@
       </p:sp>
       <p:sp>
         <p:nvSpPr>
-          <p:cNvPr id="5" name="Oval 4"/>
+          <p:cNvPr id="4" name="Oval 3"/>
           <p:cNvSpPr/>
           <p:nvPr/>
         </p:nvSpPr>
@@ -6053,7 +6069,7 @@
       </p:sp>
       <p:sp>
         <p:nvSpPr>
-          <p:cNvPr id="6" name="TextBox 5"/>
+          <p:cNvPr id="5" name="TextBox 4"/>
           <p:cNvSpPr txBox="1"/>
           <p:nvPr/>
         </p:nvSpPr>
@@ -6085,14 +6101,14 @@
                 </a:solidFill>
                 <a:latin typeface="Cambria"/>
               </a:rPr>
-              <a:t>No equivalent exists</a:t>
-            </a:r>
-          </a:p>
-        </p:txBody>
-      </p:sp>
-      <p:sp>
-        <p:nvSpPr>
-          <p:cNvPr id="7" name="TextBox 6"/>
+              <a:t>Two kinds of score</a:t>
+            </a:r>
+          </a:p>
+        </p:txBody>
+      </p:sp>
+      <p:sp>
+        <p:nvSpPr>
+          <p:cNvPr id="6" name="TextBox 5"/>
           <p:cNvSpPr txBox="1"/>
           <p:nvPr/>
         </p:nvSpPr>
@@ -6124,14 +6140,14 @@
                 </a:solidFill>
                 <a:latin typeface="Calibri"/>
               </a:rPr>
-              <a:t>Algebra against a computer science catalogue still returns five candidates. Ranking cannot say none of these; a confidence floor can.</a:t>
-            </a:r>
-          </a:p>
-        </p:txBody>
-      </p:sp>
-      <p:sp>
-        <p:nvSpPr>
-          <p:cNvPr id="8" name="Rounded Rectangle 7"/>
+              <a:t>A calibrated strategy shows a percentage and a likely, borderline or unlikely band. The others show a bare relative number and a tooltip saying it is not a probability. One file formats every score.</a:t>
+            </a:r>
+          </a:p>
+        </p:txBody>
+      </p:sp>
+      <p:sp>
+        <p:nvSpPr>
+          <p:cNvPr id="7" name="Rounded Rectangle 6"/>
           <p:cNvSpPr/>
           <p:nvPr/>
         </p:nvSpPr>
@@ -6177,7 +6193,7 @@
       </p:sp>
       <p:sp>
         <p:nvSpPr>
-          <p:cNvPr id="9" name="Oval 8"/>
+          <p:cNvPr id="8" name="Oval 7"/>
           <p:cNvSpPr/>
           <p:nvPr/>
         </p:nvSpPr>
@@ -6230,7 +6246,7 @@
       </p:sp>
       <p:sp>
         <p:nvSpPr>
-          <p:cNvPr id="10" name="TextBox 9"/>
+          <p:cNvPr id="9" name="TextBox 8"/>
           <p:cNvSpPr txBox="1"/>
           <p:nvPr/>
         </p:nvSpPr>
@@ -6262,14 +6278,14 @@
                 </a:solidFill>
                 <a:latin typeface="Cambria"/>
               </a:rPr>
-              <a:t>Granularity</a:t>
-            </a:r>
-          </a:p>
-        </p:txBody>
-      </p:sp>
-      <p:sp>
-        <p:nvSpPr>
-          <p:cNvPr id="11" name="TextBox 10"/>
+              <a:t>No sum without a calibration</a:t>
+            </a:r>
+          </a:p>
+        </p:txBody>
+      </p:sp>
+      <p:sp>
+        <p:nvSpPr>
+          <p:cNvPr id="10" name="TextBox 9"/>
           <p:cNvSpPr txBox="1"/>
           <p:nvPr/>
         </p:nvSpPr>
@@ -6301,14 +6317,14 @@
                 </a:solidFill>
                 <a:latin typeface="Calibri"/>
               </a:rPr>
-              <a:t>The right answer is half of a 15 ECTS module, and the whole module description dilutes it.</a:t>
-            </a:r>
-          </a:p>
-        </p:txBody>
-      </p:sp>
-      <p:sp>
-        <p:nvSpPr>
-          <p:cNvPr id="12" name="Rounded Rectangle 11"/>
+              <a:t>The recognition panel will not add up ECTS for a strategy without a fitted calibration. Summing display values would be arithmetic on the wrong thing.</a:t>
+            </a:r>
+          </a:p>
+        </p:txBody>
+      </p:sp>
+      <p:sp>
+        <p:nvSpPr>
+          <p:cNvPr id="11" name="Rounded Rectangle 10"/>
           <p:cNvSpPr/>
           <p:nvPr/>
         </p:nvSpPr>
@@ -6354,7 +6370,7 @@
       </p:sp>
       <p:sp>
         <p:nvSpPr>
-          <p:cNvPr id="13" name="Oval 12"/>
+          <p:cNvPr id="12" name="Oval 11"/>
           <p:cNvSpPr/>
           <p:nvPr/>
         </p:nvSpPr>
@@ -6407,7 +6423,7 @@
       </p:sp>
       <p:sp>
         <p:nvSpPr>
-          <p:cNvPr id="14" name="TextBox 13"/>
+          <p:cNvPr id="13" name="TextBox 12"/>
           <p:cNvSpPr txBox="1"/>
           <p:nvPr/>
         </p:nvSpPr>
@@ -6439,14 +6455,14 @@
                 </a:solidFill>
                 <a:latin typeface="Cambria"/>
               </a:rPr>
-              <a:t>Look-alike projects</a:t>
-            </a:r>
-          </a:p>
-        </p:txBody>
-      </p:sp>
-      <p:sp>
-        <p:nvSpPr>
-          <p:cNvPr id="15" name="TextBox 14"/>
+              <a:t>Provisional says so</a:t>
+            </a:r>
+          </a:p>
+        </p:txBody>
+      </p:sp>
+      <p:sp>
+        <p:nvSpPr>
+          <p:cNvPr id="14" name="TextBox 13"/>
           <p:cNvSpPr txBox="1"/>
           <p:nvPr/>
         </p:nvSpPr>
@@ -6478,14 +6494,14 @@
                 </a:solidFill>
                 <a:latin typeface="Calibri"/>
               </a:rPr>
-              <a:t>Project courses read alike across a catalogue, so the text cannot separate them.</a:t>
-            </a:r>
-          </a:p>
-        </p:txBody>
-      </p:sp>
-      <p:sp>
-        <p:nvSpPr>
-          <p:cNvPr id="16" name="Rounded Rectangle 15"/>
+              <a:t>While a calibration rests on labels that are not all a person's, every probability and the ECTS estimate carry a warning. The flag is read from the calibration file, not typed into the interface.</a:t>
+            </a:r>
+          </a:p>
+        </p:txBody>
+      </p:sp>
+      <p:sp>
+        <p:nvSpPr>
+          <p:cNvPr id="15" name="Rounded Rectangle 14"/>
           <p:cNvSpPr/>
           <p:nvPr/>
         </p:nvSpPr>
@@ -6531,7 +6547,7 @@
       </p:sp>
       <p:sp>
         <p:nvSpPr>
-          <p:cNvPr id="17" name="Oval 16"/>
+          <p:cNvPr id="16" name="Oval 15"/>
           <p:cNvSpPr/>
           <p:nvPr/>
         </p:nvSpPr>
@@ -6584,7 +6600,7 @@
       </p:sp>
       <p:sp>
         <p:nvSpPr>
-          <p:cNvPr id="18" name="TextBox 17"/>
+          <p:cNvPr id="17" name="TextBox 16"/>
           <p:cNvSpPr txBox="1"/>
           <p:nvPr/>
         </p:nvSpPr>
@@ -6616,14 +6632,14 @@
                 </a:solidFill>
                 <a:latin typeface="Cambria"/>
               </a:rPr>
-              <a:t>Level in the title</a:t>
-            </a:r>
-          </a:p>
-        </p:txBody>
-      </p:sp>
-      <p:sp>
-        <p:nvSpPr>
-          <p:cNvPr id="19" name="TextBox 18"/>
+              <a:t>The evaluation page counts</a:t>
+            </a:r>
+          </a:p>
+        </p:txBody>
+      </p:sp>
+      <p:sp>
+        <p:nvSpPr>
+          <p:cNvPr id="18" name="TextBox 17"/>
           <p:cNvSpPr txBox="1"/>
           <p:nvPr/>
         </p:nvSpPr>
@@ -6655,7 +6671,7 @@
                 </a:solidFill>
                 <a:latin typeface="Calibri"/>
               </a:rPr>
-              <a:t>Modelling and Programming 3 outranks 1: the sequence number is kept out of the embedding by design (ADR-0004).</a:t>
+              <a:t>It says how many of the 1142 gold labels a person gave (680) and how many a second model gave (462), instead of calling them all checked.</a:t>
             </a:r>
           </a:p>
         </p:txBody>
@@ -6720,7 +6736,7 @@
                 </a:solidFill>
                 <a:latin typeface="Cambria"/>
               </a:rPr>
-              <a:t>Engineering choices</a:t>
+              <a:t>Where it goes wrong</a:t>
             </a:r>
           </a:p>
         </p:txBody>
@@ -6733,8 +6749,63 @@
         </p:nvSpPr>
         <p:spPr>
           <a:xfrm>
+            <a:off x="9464040" y="457200"/>
+            <a:ext cx="2194560" cy="384048"/>
+          </a:xfrm>
+          <a:prstGeom prst="roundRect">
+            <a:avLst>
+              <a:gd name="adj" fmla="val 12000"/>
+            </a:avLst>
+          </a:prstGeom>
+          <a:solidFill>
+            <a:srgbClr val="F2B705"/>
+          </a:solidFill>
+          <a:ln>
+            <a:noFill/>
+          </a:ln>
+          <a:effectLst/>
+        </p:spPr>
+        <p:style>
+          <a:lnRef idx="1">
+            <a:schemeClr val="accent1"/>
+          </a:lnRef>
+          <a:fillRef idx="3">
+            <a:schemeClr val="accent1"/>
+          </a:fillRef>
+          <a:effectRef idx="2">
+            <a:schemeClr val="accent1"/>
+          </a:effectRef>
+          <a:fontRef idx="minor">
+            <a:schemeClr val="lt1"/>
+          </a:fontRef>
+        </p:style>
+        <p:txBody>
+          <a:bodyPr rtlCol="0" anchor="ctr" tIns="0" bIns="0"/>
+          <a:lstStyle/>
+          <a:p>
+            <a:pPr algn="ctr"/>
+            <a:r>
+              <a:rPr sz="1200" b="1">
+                <a:solidFill>
+                  <a:srgbClr val="14234B"/>
+                </a:solidFill>
+                <a:latin typeface="Calibri"/>
+              </a:rPr>
+              <a:t>PARTLY MODEL-LABELLED</a:t>
+            </a:r>
+          </a:p>
+        </p:txBody>
+      </p:sp>
+      <p:sp>
+        <p:nvSpPr>
+          <p:cNvPr id="4" name="Rounded Rectangle 3"/>
+          <p:cNvSpPr/>
+          <p:nvPr/>
+        </p:nvSpPr>
+        <p:spPr>
+          <a:xfrm>
             <a:off x="548640" y="1463040"/>
-            <a:ext cx="11064240" cy="960120"/>
+            <a:ext cx="5394960" cy="2103120"/>
           </a:xfrm>
           <a:prstGeom prst="roundRect">
             <a:avLst>
@@ -6773,14 +6844,67 @@
       </p:sp>
       <p:sp>
         <p:nvSpPr>
-          <p:cNvPr id="4" name="TextBox 3"/>
+          <p:cNvPr id="5" name="Oval 4"/>
+          <p:cNvSpPr/>
+          <p:nvPr/>
+        </p:nvSpPr>
+        <p:spPr>
+          <a:xfrm>
+            <a:off x="822960" y="1737360"/>
+            <a:ext cx="502920" cy="502920"/>
+          </a:xfrm>
+          <a:prstGeom prst="ellipse">
+            <a:avLst/>
+          </a:prstGeom>
+          <a:solidFill>
+            <a:srgbClr val="14234B"/>
+          </a:solidFill>
+          <a:ln>
+            <a:noFill/>
+          </a:ln>
+          <a:effectLst/>
+        </p:spPr>
+        <p:style>
+          <a:lnRef idx="1">
+            <a:schemeClr val="accent1"/>
+          </a:lnRef>
+          <a:fillRef idx="3">
+            <a:schemeClr val="accent1"/>
+          </a:fillRef>
+          <a:effectRef idx="2">
+            <a:schemeClr val="accent1"/>
+          </a:effectRef>
+          <a:fontRef idx="minor">
+            <a:schemeClr val="lt1"/>
+          </a:fontRef>
+        </p:style>
+        <p:txBody>
+          <a:bodyPr rtlCol="0" anchor="ctr" lIns="0" rIns="0" tIns="0" bIns="0"/>
+          <a:lstStyle/>
+          <a:p>
+            <a:pPr algn="ctr"/>
+            <a:r>
+              <a:rPr sz="1800" b="1">
+                <a:solidFill>
+                  <a:srgbClr val="FFFFFF"/>
+                </a:solidFill>
+                <a:latin typeface="Cambria"/>
+              </a:rPr>
+              <a:t>1</a:t>
+            </a:r>
+          </a:p>
+        </p:txBody>
+      </p:sp>
+      <p:sp>
+        <p:nvSpPr>
+          <p:cNvPr id="6" name="TextBox 5"/>
           <p:cNvSpPr txBox="1"/>
           <p:nvPr/>
         </p:nvSpPr>
         <p:spPr>
           <a:xfrm>
-            <a:off x="822960" y="1554480"/>
-            <a:ext cx="3017520" cy="777240"/>
+            <a:off x="1554480" y="1764792"/>
+            <a:ext cx="4114800" cy="457200"/>
           </a:xfrm>
           <a:prstGeom prst="rect">
             <a:avLst/>
@@ -6788,7 +6912,7 @@
           <a:noFill/>
         </p:spPr>
         <p:txBody>
-          <a:bodyPr wrap="square" anchor="ctr" lIns="0" rIns="0" tIns="0" bIns="0">
+          <a:bodyPr wrap="square" anchor="t" lIns="0" rIns="0" tIns="0" bIns="0">
             <a:spAutoFit/>
           </a:bodyPr>
           <a:lstStyle/>
@@ -6805,21 +6929,21 @@
                 </a:solidFill>
                 <a:latin typeface="Cambria"/>
               </a:rPr>
-              <a:t>Frozen contract</a:t>
-            </a:r>
-          </a:p>
-        </p:txBody>
-      </p:sp>
-      <p:sp>
-        <p:nvSpPr>
-          <p:cNvPr id="5" name="TextBox 4"/>
+              <a:t>No equivalent exists</a:t>
+            </a:r>
+          </a:p>
+        </p:txBody>
+      </p:sp>
+      <p:sp>
+        <p:nvSpPr>
+          <p:cNvPr id="7" name="TextBox 6"/>
           <p:cNvSpPr txBox="1"/>
           <p:nvPr/>
         </p:nvSpPr>
         <p:spPr>
           <a:xfrm>
-            <a:off x="3931920" y="1554480"/>
-            <a:ext cx="7498079" cy="777240"/>
+            <a:off x="1554480" y="2286000"/>
+            <a:ext cx="4114800" cy="1188720"/>
           </a:xfrm>
           <a:prstGeom prst="rect">
             <a:avLst/>
@@ -6827,7 +6951,7 @@
           <a:noFill/>
         </p:spPr>
         <p:txBody>
-          <a:bodyPr wrap="square" anchor="ctr" lIns="0" rIns="0" tIns="0" bIns="0">
+          <a:bodyPr wrap="square" anchor="t" lIns="0" rIns="0" tIns="0" bIns="0">
             <a:spAutoFit/>
           </a:bodyPr>
           <a:lstStyle/>
@@ -6838,27 +6962,27 @@
               </a:spcAft>
             </a:pPr>
             <a:r>
-              <a:rPr sz="1500" b="0" i="0">
+              <a:rPr sz="1400" b="0" i="0">
                 <a:solidFill>
                   <a:srgbClr val="1F2433"/>
                 </a:solidFill>
                 <a:latin typeface="Calibri"/>
               </a:rPr>
-              <a:t>A Matcher protocol and a stub let the interface and the engine be built in parallel from day one.</a:t>
-            </a:r>
-          </a:p>
-        </p:txBody>
-      </p:sp>
-      <p:sp>
-        <p:nvSpPr>
-          <p:cNvPr id="6" name="Rounded Rectangle 5"/>
+              <a:t>Algebra against a computer science catalogue still returns five candidates. Ranking cannot say none of these; a confidence floor can.</a:t>
+            </a:r>
+          </a:p>
+        </p:txBody>
+      </p:sp>
+      <p:sp>
+        <p:nvSpPr>
+          <p:cNvPr id="8" name="Rounded Rectangle 7"/>
           <p:cNvSpPr/>
           <p:nvPr/>
         </p:nvSpPr>
         <p:spPr>
           <a:xfrm>
-            <a:off x="548640" y="2651760"/>
-            <a:ext cx="11064240" cy="960120"/>
+            <a:off x="6217920" y="1463040"/>
+            <a:ext cx="5394960" cy="2103120"/>
           </a:xfrm>
           <a:prstGeom prst="roundRect">
             <a:avLst>
@@ -6897,14 +7021,67 @@
       </p:sp>
       <p:sp>
         <p:nvSpPr>
-          <p:cNvPr id="7" name="TextBox 6"/>
+          <p:cNvPr id="9" name="Oval 8"/>
+          <p:cNvSpPr/>
+          <p:nvPr/>
+        </p:nvSpPr>
+        <p:spPr>
+          <a:xfrm>
+            <a:off x="6492240" y="1737360"/>
+            <a:ext cx="502920" cy="502920"/>
+          </a:xfrm>
+          <a:prstGeom prst="ellipse">
+            <a:avLst/>
+          </a:prstGeom>
+          <a:solidFill>
+            <a:srgbClr val="14234B"/>
+          </a:solidFill>
+          <a:ln>
+            <a:noFill/>
+          </a:ln>
+          <a:effectLst/>
+        </p:spPr>
+        <p:style>
+          <a:lnRef idx="1">
+            <a:schemeClr val="accent1"/>
+          </a:lnRef>
+          <a:fillRef idx="3">
+            <a:schemeClr val="accent1"/>
+          </a:fillRef>
+          <a:effectRef idx="2">
+            <a:schemeClr val="accent1"/>
+          </a:effectRef>
+          <a:fontRef idx="minor">
+            <a:schemeClr val="lt1"/>
+          </a:fontRef>
+        </p:style>
+        <p:txBody>
+          <a:bodyPr rtlCol="0" anchor="ctr" lIns="0" rIns="0" tIns="0" bIns="0"/>
+          <a:lstStyle/>
+          <a:p>
+            <a:pPr algn="ctr"/>
+            <a:r>
+              <a:rPr sz="1800" b="1">
+                <a:solidFill>
+                  <a:srgbClr val="FFFFFF"/>
+                </a:solidFill>
+                <a:latin typeface="Cambria"/>
+              </a:rPr>
+              <a:t>2</a:t>
+            </a:r>
+          </a:p>
+        </p:txBody>
+      </p:sp>
+      <p:sp>
+        <p:nvSpPr>
+          <p:cNvPr id="10" name="TextBox 9"/>
           <p:cNvSpPr txBox="1"/>
           <p:nvPr/>
         </p:nvSpPr>
         <p:spPr>
           <a:xfrm>
-            <a:off x="822960" y="2743200"/>
-            <a:ext cx="3017520" cy="777240"/>
+            <a:off x="7223760" y="1764792"/>
+            <a:ext cx="4114800" cy="457200"/>
           </a:xfrm>
           <a:prstGeom prst="rect">
             <a:avLst/>
@@ -6912,7 +7089,7 @@
           <a:noFill/>
         </p:spPr>
         <p:txBody>
-          <a:bodyPr wrap="square" anchor="ctr" lIns="0" rIns="0" tIns="0" bIns="0">
+          <a:bodyPr wrap="square" anchor="t" lIns="0" rIns="0" tIns="0" bIns="0">
             <a:spAutoFit/>
           </a:bodyPr>
           <a:lstStyle/>
@@ -6929,21 +7106,21 @@
                 </a:solidFill>
                 <a:latin typeface="Cambria"/>
               </a:rPr>
-              <a:t>Offline by design</a:t>
-            </a:r>
-          </a:p>
-        </p:txBody>
-      </p:sp>
-      <p:sp>
-        <p:nvSpPr>
-          <p:cNvPr id="8" name="TextBox 7"/>
+              <a:t>Granularity</a:t>
+            </a:r>
+          </a:p>
+        </p:txBody>
+      </p:sp>
+      <p:sp>
+        <p:nvSpPr>
+          <p:cNvPr id="11" name="TextBox 10"/>
           <p:cNvSpPr txBox="1"/>
           <p:nvPr/>
         </p:nvSpPr>
         <p:spPr>
           <a:xfrm>
-            <a:off x="3931920" y="2743200"/>
-            <a:ext cx="7498079" cy="777240"/>
+            <a:off x="7223760" y="2286000"/>
+            <a:ext cx="4114800" cy="1188720"/>
           </a:xfrm>
           <a:prstGeom prst="rect">
             <a:avLst/>
@@ -6951,7 +7128,7 @@
           <a:noFill/>
         </p:spPr>
         <p:txBody>
-          <a:bodyPr wrap="square" anchor="ctr" lIns="0" rIns="0" tIns="0" bIns="0">
+          <a:bodyPr wrap="square" anchor="t" lIns="0" rIns="0" tIns="0" bIns="0">
             <a:spAutoFit/>
           </a:bodyPr>
           <a:lstStyle/>
@@ -6962,27 +7139,27 @@
               </a:spcAft>
             </a:pPr>
             <a:r>
-              <a:rPr sz="1500" b="0" i="0">
+              <a:rPr sz="1400" b="0" i="0">
                 <a:solidFill>
                   <a:srgbClr val="1F2433"/>
                 </a:solidFill>
                 <a:latin typeface="Calibri"/>
               </a:rPr>
-              <a:t>Models baked into the image at build time; the runtime never touches the network.</a:t>
-            </a:r>
-          </a:p>
-        </p:txBody>
-      </p:sp>
-      <p:sp>
-        <p:nvSpPr>
-          <p:cNvPr id="9" name="Rounded Rectangle 8"/>
+              <a:t>The right answer is half of a 15 ECTS module, and the whole module description dilutes it.</a:t>
+            </a:r>
+          </a:p>
+        </p:txBody>
+      </p:sp>
+      <p:sp>
+        <p:nvSpPr>
+          <p:cNvPr id="12" name="Rounded Rectangle 11"/>
           <p:cNvSpPr/>
           <p:nvPr/>
         </p:nvSpPr>
         <p:spPr>
           <a:xfrm>
             <a:off x="548640" y="3840480"/>
-            <a:ext cx="11064240" cy="960120"/>
+            <a:ext cx="5394960" cy="2103120"/>
           </a:xfrm>
           <a:prstGeom prst="roundRect">
             <a:avLst>
@@ -7021,14 +7198,67 @@
       </p:sp>
       <p:sp>
         <p:nvSpPr>
-          <p:cNvPr id="10" name="TextBox 9"/>
+          <p:cNvPr id="13" name="Oval 12"/>
+          <p:cNvSpPr/>
+          <p:nvPr/>
+        </p:nvSpPr>
+        <p:spPr>
+          <a:xfrm>
+            <a:off x="822960" y="4114800"/>
+            <a:ext cx="502920" cy="502920"/>
+          </a:xfrm>
+          <a:prstGeom prst="ellipse">
+            <a:avLst/>
+          </a:prstGeom>
+          <a:solidFill>
+            <a:srgbClr val="14234B"/>
+          </a:solidFill>
+          <a:ln>
+            <a:noFill/>
+          </a:ln>
+          <a:effectLst/>
+        </p:spPr>
+        <p:style>
+          <a:lnRef idx="1">
+            <a:schemeClr val="accent1"/>
+          </a:lnRef>
+          <a:fillRef idx="3">
+            <a:schemeClr val="accent1"/>
+          </a:fillRef>
+          <a:effectRef idx="2">
+            <a:schemeClr val="accent1"/>
+          </a:effectRef>
+          <a:fontRef idx="minor">
+            <a:schemeClr val="lt1"/>
+          </a:fontRef>
+        </p:style>
+        <p:txBody>
+          <a:bodyPr rtlCol="0" anchor="ctr" lIns="0" rIns="0" tIns="0" bIns="0"/>
+          <a:lstStyle/>
+          <a:p>
+            <a:pPr algn="ctr"/>
+            <a:r>
+              <a:rPr sz="1800" b="1">
+                <a:solidFill>
+                  <a:srgbClr val="FFFFFF"/>
+                </a:solidFill>
+                <a:latin typeface="Cambria"/>
+              </a:rPr>
+              <a:t>3</a:t>
+            </a:r>
+          </a:p>
+        </p:txBody>
+      </p:sp>
+      <p:sp>
+        <p:nvSpPr>
+          <p:cNvPr id="14" name="TextBox 13"/>
           <p:cNvSpPr txBox="1"/>
           <p:nvPr/>
         </p:nvSpPr>
         <p:spPr>
           <a:xfrm>
-            <a:off x="822960" y="3931920"/>
-            <a:ext cx="3017520" cy="777240"/>
+            <a:off x="1554480" y="4142232"/>
+            <a:ext cx="4114800" cy="457200"/>
           </a:xfrm>
           <a:prstGeom prst="rect">
             <a:avLst/>
@@ -7036,7 +7266,7 @@
           <a:noFill/>
         </p:spPr>
         <p:txBody>
-          <a:bodyPr wrap="square" anchor="ctr" lIns="0" rIns="0" tIns="0" bIns="0">
+          <a:bodyPr wrap="square" anchor="t" lIns="0" rIns="0" tIns="0" bIns="0">
             <a:spAutoFit/>
           </a:bodyPr>
           <a:lstStyle/>
@@ -7053,21 +7283,21 @@
                 </a:solidFill>
                 <a:latin typeface="Cambria"/>
               </a:rPr>
-              <a:t>SQLite</a:t>
-            </a:r>
-          </a:p>
-        </p:txBody>
-      </p:sp>
-      <p:sp>
-        <p:nvSpPr>
-          <p:cNvPr id="11" name="TextBox 10"/>
+              <a:t>Look-alike projects</a:t>
+            </a:r>
+          </a:p>
+        </p:txBody>
+      </p:sp>
+      <p:sp>
+        <p:nvSpPr>
+          <p:cNvPr id="15" name="TextBox 14"/>
           <p:cNvSpPr txBox="1"/>
           <p:nvPr/>
         </p:nvSpPr>
         <p:spPr>
           <a:xfrm>
-            <a:off x="3931920" y="3931920"/>
-            <a:ext cx="7498079" cy="777240"/>
+            <a:off x="1554480" y="4663440"/>
+            <a:ext cx="4114800" cy="1188720"/>
           </a:xfrm>
           <a:prstGeom prst="rect">
             <a:avLst/>
@@ -7075,7 +7305,7 @@
           <a:noFill/>
         </p:spPr>
         <p:txBody>
-          <a:bodyPr wrap="square" anchor="ctr" lIns="0" rIns="0" tIns="0" bIns="0">
+          <a:bodyPr wrap="square" anchor="t" lIns="0" rIns="0" tIns="0" bIns="0">
             <a:spAutoFit/>
           </a:bodyPr>
           <a:lstStyle/>
@@ -7086,27 +7316,27 @@
               </a:spcAft>
             </a:pPr>
             <a:r>
-              <a:rPr sz="1500" b="0" i="0">
+              <a:rPr sz="1400" b="0" i="0">
                 <a:solidFill>
                   <a:srgbClr val="1F2433"/>
                 </a:solidFill>
                 <a:latin typeface="Calibri"/>
               </a:rPr>
-              <a:t>A few hundred courses: one file in a volume keeps compose to two services.</a:t>
-            </a:r>
-          </a:p>
-        </p:txBody>
-      </p:sp>
-      <p:sp>
-        <p:nvSpPr>
-          <p:cNvPr id="12" name="Rounded Rectangle 11"/>
+              <a:t>Project courses read alike across a catalogue, so the text cannot separate them.</a:t>
+            </a:r>
+          </a:p>
+        </p:txBody>
+      </p:sp>
+      <p:sp>
+        <p:nvSpPr>
+          <p:cNvPr id="16" name="Rounded Rectangle 15"/>
           <p:cNvSpPr/>
           <p:nvPr/>
         </p:nvSpPr>
         <p:spPr>
           <a:xfrm>
-            <a:off x="548640" y="5029200"/>
-            <a:ext cx="11064240" cy="960120"/>
+            <a:off x="6217920" y="3840480"/>
+            <a:ext cx="5394960" cy="2103120"/>
           </a:xfrm>
           <a:prstGeom prst="roundRect">
             <a:avLst>
@@ -7145,14 +7375,67 @@
       </p:sp>
       <p:sp>
         <p:nvSpPr>
-          <p:cNvPr id="13" name="TextBox 12"/>
+          <p:cNvPr id="17" name="Oval 16"/>
+          <p:cNvSpPr/>
+          <p:nvPr/>
+        </p:nvSpPr>
+        <p:spPr>
+          <a:xfrm>
+            <a:off x="6492240" y="4114800"/>
+            <a:ext cx="502920" cy="502920"/>
+          </a:xfrm>
+          <a:prstGeom prst="ellipse">
+            <a:avLst/>
+          </a:prstGeom>
+          <a:solidFill>
+            <a:srgbClr val="14234B"/>
+          </a:solidFill>
+          <a:ln>
+            <a:noFill/>
+          </a:ln>
+          <a:effectLst/>
+        </p:spPr>
+        <p:style>
+          <a:lnRef idx="1">
+            <a:schemeClr val="accent1"/>
+          </a:lnRef>
+          <a:fillRef idx="3">
+            <a:schemeClr val="accent1"/>
+          </a:fillRef>
+          <a:effectRef idx="2">
+            <a:schemeClr val="accent1"/>
+          </a:effectRef>
+          <a:fontRef idx="minor">
+            <a:schemeClr val="lt1"/>
+          </a:fontRef>
+        </p:style>
+        <p:txBody>
+          <a:bodyPr rtlCol="0" anchor="ctr" lIns="0" rIns="0" tIns="0" bIns="0"/>
+          <a:lstStyle/>
+          <a:p>
+            <a:pPr algn="ctr"/>
+            <a:r>
+              <a:rPr sz="1800" b="1">
+                <a:solidFill>
+                  <a:srgbClr val="FFFFFF"/>
+                </a:solidFill>
+                <a:latin typeface="Cambria"/>
+              </a:rPr>
+              <a:t>4</a:t>
+            </a:r>
+          </a:p>
+        </p:txBody>
+      </p:sp>
+      <p:sp>
+        <p:nvSpPr>
+          <p:cNvPr id="18" name="TextBox 17"/>
           <p:cNvSpPr txBox="1"/>
           <p:nvPr/>
         </p:nvSpPr>
         <p:spPr>
           <a:xfrm>
-            <a:off x="822960" y="5120640"/>
-            <a:ext cx="3017520" cy="777240"/>
+            <a:off x="7223760" y="4142232"/>
+            <a:ext cx="4114800" cy="457200"/>
           </a:xfrm>
           <a:prstGeom prst="rect">
             <a:avLst/>
@@ -7160,7 +7443,7 @@
           <a:noFill/>
         </p:spPr>
         <p:txBody>
-          <a:bodyPr wrap="square" anchor="ctr" lIns="0" rIns="0" tIns="0" bIns="0">
+          <a:bodyPr wrap="square" anchor="t" lIns="0" rIns="0" tIns="0" bIns="0">
             <a:spAutoFit/>
           </a:bodyPr>
           <a:lstStyle/>
@@ -7177,21 +7460,21 @@
                 </a:solidFill>
                 <a:latin typeface="Cambria"/>
               </a:rPr>
-              <a:t>Clean-machine build</a:t>
-            </a:r>
-          </a:p>
-        </p:txBody>
-      </p:sp>
-      <p:sp>
-        <p:nvSpPr>
-          <p:cNvPr id="14" name="TextBox 13"/>
+              <a:t>Level in the title</a:t>
+            </a:r>
+          </a:p>
+        </p:txBody>
+      </p:sp>
+      <p:sp>
+        <p:nvSpPr>
+          <p:cNvPr id="19" name="TextBox 18"/>
           <p:cNvSpPr txBox="1"/>
           <p:nvPr/>
         </p:nvSpPr>
         <p:spPr>
           <a:xfrm>
-            <a:off x="3931920" y="5120640"/>
-            <a:ext cx="7498079" cy="777240"/>
+            <a:off x="7223760" y="4663440"/>
+            <a:ext cx="4114800" cy="1188720"/>
           </a:xfrm>
           <a:prstGeom prst="rect">
             <a:avLst/>
@@ -7199,7 +7482,7 @@
           <a:noFill/>
         </p:spPr>
         <p:txBody>
-          <a:bodyPr wrap="square" anchor="ctr" lIns="0" rIns="0" tIns="0" bIns="0">
+          <a:bodyPr wrap="square" anchor="t" lIns="0" rIns="0" tIns="0" bIns="0">
             <a:spAutoFit/>
           </a:bodyPr>
           <a:lstStyle/>
@@ -7210,13 +7493,13 @@
               </a:spcAft>
             </a:pPr>
             <a:r>
-              <a:rPr sz="1500" b="0" i="0">
+              <a:rPr sz="1400" b="0" i="0">
                 <a:solidFill>
                   <a:srgbClr val="1F2433"/>
                 </a:solidFill>
                 <a:latin typeface="Calibri"/>
               </a:rPr>
-              <a:t>Fresh clone to running app measured at 297 s, recorded in the README.</a:t>
+              <a:t>Modelling and Programming 3 outranks 1: the sequence number is kept out of the embedding by design (ADR-0004).</a:t>
             </a:r>
           </a:p>
         </p:txBody>
@@ -7230,6 +7513,567 @@
 </file>
 
 <file path=ppt/slides/slide12.xml><?xml version="1.0" encoding="utf-8"?>
+<p:sld xmlns:a="http://schemas.openxmlformats.org/drawingml/2006/main" xmlns:p="http://schemas.openxmlformats.org/presentationml/2006/main" xmlns:r="http://schemas.openxmlformats.org/officeDocument/2006/relationships">
+  <p:cSld>
+    <p:bg>
+      <p:bgPr>
+        <a:solidFill>
+          <a:srgbClr val="FFFFFF"/>
+        </a:solidFill>
+        <a:effectLst/>
+      </p:bgPr>
+    </p:bg>
+    <p:spTree>
+      <p:nvGrpSpPr>
+        <p:cNvPr id="1" name=""/>
+        <p:cNvGrpSpPr/>
+        <p:nvPr/>
+      </p:nvGrpSpPr>
+      <p:grpSpPr/>
+      <p:sp>
+        <p:nvSpPr>
+          <p:cNvPr id="2" name="TextBox 1"/>
+          <p:cNvSpPr txBox="1"/>
+          <p:nvPr/>
+        </p:nvSpPr>
+        <p:spPr>
+          <a:xfrm>
+            <a:off x="548640" y="411480"/>
+            <a:ext cx="11064240" cy="822960"/>
+          </a:xfrm>
+          <a:prstGeom prst="rect">
+            <a:avLst/>
+          </a:prstGeom>
+          <a:noFill/>
+        </p:spPr>
+        <p:txBody>
+          <a:bodyPr wrap="square" anchor="t" lIns="0" rIns="0" tIns="0" bIns="0">
+            <a:spAutoFit/>
+          </a:bodyPr>
+          <a:lstStyle/>
+          <a:p>
+            <a:pPr algn="l">
+              <a:spcAft>
+                <a:spcPts val="800"/>
+              </a:spcAft>
+            </a:pPr>
+            <a:r>
+              <a:rPr sz="3600" b="1" i="0">
+                <a:solidFill>
+                  <a:srgbClr val="14234B"/>
+                </a:solidFill>
+                <a:latin typeface="Cambria"/>
+              </a:rPr>
+              <a:t>Engineering choices</a:t>
+            </a:r>
+          </a:p>
+        </p:txBody>
+      </p:sp>
+      <p:sp>
+        <p:nvSpPr>
+          <p:cNvPr id="3" name="Rounded Rectangle 2"/>
+          <p:cNvSpPr/>
+          <p:nvPr/>
+        </p:nvSpPr>
+        <p:spPr>
+          <a:xfrm>
+            <a:off x="548640" y="1463040"/>
+            <a:ext cx="11064240" cy="960120"/>
+          </a:xfrm>
+          <a:prstGeom prst="roundRect">
+            <a:avLst>
+              <a:gd name="adj" fmla="val 12000"/>
+            </a:avLst>
+          </a:prstGeom>
+          <a:solidFill>
+            <a:srgbClr val="EEF1F8"/>
+          </a:solidFill>
+          <a:ln>
+            <a:noFill/>
+          </a:ln>
+          <a:effectLst/>
+        </p:spPr>
+        <p:style>
+          <a:lnRef idx="1">
+            <a:schemeClr val="accent1"/>
+          </a:lnRef>
+          <a:fillRef idx="3">
+            <a:schemeClr val="accent1"/>
+          </a:fillRef>
+          <a:effectRef idx="2">
+            <a:schemeClr val="accent1"/>
+          </a:effectRef>
+          <a:fontRef idx="minor">
+            <a:schemeClr val="lt1"/>
+          </a:fontRef>
+        </p:style>
+        <p:txBody>
+          <a:bodyPr rtlCol="0" anchor="ctr"/>
+          <a:lstStyle/>
+          <a:p>
+            <a:pPr algn="ctr"/>
+          </a:p>
+        </p:txBody>
+      </p:sp>
+      <p:sp>
+        <p:nvSpPr>
+          <p:cNvPr id="4" name="TextBox 3"/>
+          <p:cNvSpPr txBox="1"/>
+          <p:nvPr/>
+        </p:nvSpPr>
+        <p:spPr>
+          <a:xfrm>
+            <a:off x="822960" y="1554480"/>
+            <a:ext cx="3017520" cy="777240"/>
+          </a:xfrm>
+          <a:prstGeom prst="rect">
+            <a:avLst/>
+          </a:prstGeom>
+          <a:noFill/>
+        </p:spPr>
+        <p:txBody>
+          <a:bodyPr wrap="square" anchor="ctr" lIns="0" rIns="0" tIns="0" bIns="0">
+            <a:spAutoFit/>
+          </a:bodyPr>
+          <a:lstStyle/>
+          <a:p>
+            <a:pPr algn="l">
+              <a:spcAft>
+                <a:spcPts val="800"/>
+              </a:spcAft>
+            </a:pPr>
+            <a:r>
+              <a:rPr sz="1800" b="1" i="0">
+                <a:solidFill>
+                  <a:srgbClr val="14234B"/>
+                </a:solidFill>
+                <a:latin typeface="Cambria"/>
+              </a:rPr>
+              <a:t>Frozen contract</a:t>
+            </a:r>
+          </a:p>
+        </p:txBody>
+      </p:sp>
+      <p:sp>
+        <p:nvSpPr>
+          <p:cNvPr id="5" name="TextBox 4"/>
+          <p:cNvSpPr txBox="1"/>
+          <p:nvPr/>
+        </p:nvSpPr>
+        <p:spPr>
+          <a:xfrm>
+            <a:off x="3931920" y="1554480"/>
+            <a:ext cx="7498079" cy="777240"/>
+          </a:xfrm>
+          <a:prstGeom prst="rect">
+            <a:avLst/>
+          </a:prstGeom>
+          <a:noFill/>
+        </p:spPr>
+        <p:txBody>
+          <a:bodyPr wrap="square" anchor="ctr" lIns="0" rIns="0" tIns="0" bIns="0">
+            <a:spAutoFit/>
+          </a:bodyPr>
+          <a:lstStyle/>
+          <a:p>
+            <a:pPr algn="l">
+              <a:spcAft>
+                <a:spcPts val="800"/>
+              </a:spcAft>
+            </a:pPr>
+            <a:r>
+              <a:rPr sz="1500" b="0" i="0">
+                <a:solidFill>
+                  <a:srgbClr val="1F2433"/>
+                </a:solidFill>
+                <a:latin typeface="Calibri"/>
+              </a:rPr>
+              <a:t>A Matcher protocol and a stub let the interface and the engine be built in parallel from day one.</a:t>
+            </a:r>
+          </a:p>
+        </p:txBody>
+      </p:sp>
+      <p:sp>
+        <p:nvSpPr>
+          <p:cNvPr id="6" name="Rounded Rectangle 5"/>
+          <p:cNvSpPr/>
+          <p:nvPr/>
+        </p:nvSpPr>
+        <p:spPr>
+          <a:xfrm>
+            <a:off x="548640" y="2651760"/>
+            <a:ext cx="11064240" cy="960120"/>
+          </a:xfrm>
+          <a:prstGeom prst="roundRect">
+            <a:avLst>
+              <a:gd name="adj" fmla="val 12000"/>
+            </a:avLst>
+          </a:prstGeom>
+          <a:solidFill>
+            <a:srgbClr val="EEF1F8"/>
+          </a:solidFill>
+          <a:ln>
+            <a:noFill/>
+          </a:ln>
+          <a:effectLst/>
+        </p:spPr>
+        <p:style>
+          <a:lnRef idx="1">
+            <a:schemeClr val="accent1"/>
+          </a:lnRef>
+          <a:fillRef idx="3">
+            <a:schemeClr val="accent1"/>
+          </a:fillRef>
+          <a:effectRef idx="2">
+            <a:schemeClr val="accent1"/>
+          </a:effectRef>
+          <a:fontRef idx="minor">
+            <a:schemeClr val="lt1"/>
+          </a:fontRef>
+        </p:style>
+        <p:txBody>
+          <a:bodyPr rtlCol="0" anchor="ctr"/>
+          <a:lstStyle/>
+          <a:p>
+            <a:pPr algn="ctr"/>
+          </a:p>
+        </p:txBody>
+      </p:sp>
+      <p:sp>
+        <p:nvSpPr>
+          <p:cNvPr id="7" name="TextBox 6"/>
+          <p:cNvSpPr txBox="1"/>
+          <p:nvPr/>
+        </p:nvSpPr>
+        <p:spPr>
+          <a:xfrm>
+            <a:off x="822960" y="2743200"/>
+            <a:ext cx="3017520" cy="777240"/>
+          </a:xfrm>
+          <a:prstGeom prst="rect">
+            <a:avLst/>
+          </a:prstGeom>
+          <a:noFill/>
+        </p:spPr>
+        <p:txBody>
+          <a:bodyPr wrap="square" anchor="ctr" lIns="0" rIns="0" tIns="0" bIns="0">
+            <a:spAutoFit/>
+          </a:bodyPr>
+          <a:lstStyle/>
+          <a:p>
+            <a:pPr algn="l">
+              <a:spcAft>
+                <a:spcPts val="800"/>
+              </a:spcAft>
+            </a:pPr>
+            <a:r>
+              <a:rPr sz="1800" b="1" i="0">
+                <a:solidFill>
+                  <a:srgbClr val="14234B"/>
+                </a:solidFill>
+                <a:latin typeface="Cambria"/>
+              </a:rPr>
+              <a:t>Offline by design</a:t>
+            </a:r>
+          </a:p>
+        </p:txBody>
+      </p:sp>
+      <p:sp>
+        <p:nvSpPr>
+          <p:cNvPr id="8" name="TextBox 7"/>
+          <p:cNvSpPr txBox="1"/>
+          <p:nvPr/>
+        </p:nvSpPr>
+        <p:spPr>
+          <a:xfrm>
+            <a:off x="3931920" y="2743200"/>
+            <a:ext cx="7498079" cy="777240"/>
+          </a:xfrm>
+          <a:prstGeom prst="rect">
+            <a:avLst/>
+          </a:prstGeom>
+          <a:noFill/>
+        </p:spPr>
+        <p:txBody>
+          <a:bodyPr wrap="square" anchor="ctr" lIns="0" rIns="0" tIns="0" bIns="0">
+            <a:spAutoFit/>
+          </a:bodyPr>
+          <a:lstStyle/>
+          <a:p>
+            <a:pPr algn="l">
+              <a:spcAft>
+                <a:spcPts val="800"/>
+              </a:spcAft>
+            </a:pPr>
+            <a:r>
+              <a:rPr sz="1500" b="0" i="0">
+                <a:solidFill>
+                  <a:srgbClr val="1F2433"/>
+                </a:solidFill>
+                <a:latin typeface="Calibri"/>
+              </a:rPr>
+              <a:t>Models baked into the image at build time; the runtime never touches the network.</a:t>
+            </a:r>
+          </a:p>
+        </p:txBody>
+      </p:sp>
+      <p:sp>
+        <p:nvSpPr>
+          <p:cNvPr id="9" name="Rounded Rectangle 8"/>
+          <p:cNvSpPr/>
+          <p:nvPr/>
+        </p:nvSpPr>
+        <p:spPr>
+          <a:xfrm>
+            <a:off x="548640" y="3840480"/>
+            <a:ext cx="11064240" cy="960120"/>
+          </a:xfrm>
+          <a:prstGeom prst="roundRect">
+            <a:avLst>
+              <a:gd name="adj" fmla="val 12000"/>
+            </a:avLst>
+          </a:prstGeom>
+          <a:solidFill>
+            <a:srgbClr val="EEF1F8"/>
+          </a:solidFill>
+          <a:ln>
+            <a:noFill/>
+          </a:ln>
+          <a:effectLst/>
+        </p:spPr>
+        <p:style>
+          <a:lnRef idx="1">
+            <a:schemeClr val="accent1"/>
+          </a:lnRef>
+          <a:fillRef idx="3">
+            <a:schemeClr val="accent1"/>
+          </a:fillRef>
+          <a:effectRef idx="2">
+            <a:schemeClr val="accent1"/>
+          </a:effectRef>
+          <a:fontRef idx="minor">
+            <a:schemeClr val="lt1"/>
+          </a:fontRef>
+        </p:style>
+        <p:txBody>
+          <a:bodyPr rtlCol="0" anchor="ctr"/>
+          <a:lstStyle/>
+          <a:p>
+            <a:pPr algn="ctr"/>
+          </a:p>
+        </p:txBody>
+      </p:sp>
+      <p:sp>
+        <p:nvSpPr>
+          <p:cNvPr id="10" name="TextBox 9"/>
+          <p:cNvSpPr txBox="1"/>
+          <p:nvPr/>
+        </p:nvSpPr>
+        <p:spPr>
+          <a:xfrm>
+            <a:off x="822960" y="3931920"/>
+            <a:ext cx="3017520" cy="777240"/>
+          </a:xfrm>
+          <a:prstGeom prst="rect">
+            <a:avLst/>
+          </a:prstGeom>
+          <a:noFill/>
+        </p:spPr>
+        <p:txBody>
+          <a:bodyPr wrap="square" anchor="ctr" lIns="0" rIns="0" tIns="0" bIns="0">
+            <a:spAutoFit/>
+          </a:bodyPr>
+          <a:lstStyle/>
+          <a:p>
+            <a:pPr algn="l">
+              <a:spcAft>
+                <a:spcPts val="800"/>
+              </a:spcAft>
+            </a:pPr>
+            <a:r>
+              <a:rPr sz="1800" b="1" i="0">
+                <a:solidFill>
+                  <a:srgbClr val="14234B"/>
+                </a:solidFill>
+                <a:latin typeface="Cambria"/>
+              </a:rPr>
+              <a:t>SQLite</a:t>
+            </a:r>
+          </a:p>
+        </p:txBody>
+      </p:sp>
+      <p:sp>
+        <p:nvSpPr>
+          <p:cNvPr id="11" name="TextBox 10"/>
+          <p:cNvSpPr txBox="1"/>
+          <p:nvPr/>
+        </p:nvSpPr>
+        <p:spPr>
+          <a:xfrm>
+            <a:off x="3931920" y="3931920"/>
+            <a:ext cx="7498079" cy="777240"/>
+          </a:xfrm>
+          <a:prstGeom prst="rect">
+            <a:avLst/>
+          </a:prstGeom>
+          <a:noFill/>
+        </p:spPr>
+        <p:txBody>
+          <a:bodyPr wrap="square" anchor="ctr" lIns="0" rIns="0" tIns="0" bIns="0">
+            <a:spAutoFit/>
+          </a:bodyPr>
+          <a:lstStyle/>
+          <a:p>
+            <a:pPr algn="l">
+              <a:spcAft>
+                <a:spcPts val="800"/>
+              </a:spcAft>
+            </a:pPr>
+            <a:r>
+              <a:rPr sz="1500" b="0" i="0">
+                <a:solidFill>
+                  <a:srgbClr val="1F2433"/>
+                </a:solidFill>
+                <a:latin typeface="Calibri"/>
+              </a:rPr>
+              <a:t>A few hundred courses: one file in a volume keeps compose to two services.</a:t>
+            </a:r>
+          </a:p>
+        </p:txBody>
+      </p:sp>
+      <p:sp>
+        <p:nvSpPr>
+          <p:cNvPr id="12" name="Rounded Rectangle 11"/>
+          <p:cNvSpPr/>
+          <p:nvPr/>
+        </p:nvSpPr>
+        <p:spPr>
+          <a:xfrm>
+            <a:off x="548640" y="5029200"/>
+            <a:ext cx="11064240" cy="960120"/>
+          </a:xfrm>
+          <a:prstGeom prst="roundRect">
+            <a:avLst>
+              <a:gd name="adj" fmla="val 12000"/>
+            </a:avLst>
+          </a:prstGeom>
+          <a:solidFill>
+            <a:srgbClr val="EEF1F8"/>
+          </a:solidFill>
+          <a:ln>
+            <a:noFill/>
+          </a:ln>
+          <a:effectLst/>
+        </p:spPr>
+        <p:style>
+          <a:lnRef idx="1">
+            <a:schemeClr val="accent1"/>
+          </a:lnRef>
+          <a:fillRef idx="3">
+            <a:schemeClr val="accent1"/>
+          </a:fillRef>
+          <a:effectRef idx="2">
+            <a:schemeClr val="accent1"/>
+          </a:effectRef>
+          <a:fontRef idx="minor">
+            <a:schemeClr val="lt1"/>
+          </a:fontRef>
+        </p:style>
+        <p:txBody>
+          <a:bodyPr rtlCol="0" anchor="ctr"/>
+          <a:lstStyle/>
+          <a:p>
+            <a:pPr algn="ctr"/>
+          </a:p>
+        </p:txBody>
+      </p:sp>
+      <p:sp>
+        <p:nvSpPr>
+          <p:cNvPr id="13" name="TextBox 12"/>
+          <p:cNvSpPr txBox="1"/>
+          <p:nvPr/>
+        </p:nvSpPr>
+        <p:spPr>
+          <a:xfrm>
+            <a:off x="822960" y="5120640"/>
+            <a:ext cx="3017520" cy="777240"/>
+          </a:xfrm>
+          <a:prstGeom prst="rect">
+            <a:avLst/>
+          </a:prstGeom>
+          <a:noFill/>
+        </p:spPr>
+        <p:txBody>
+          <a:bodyPr wrap="square" anchor="ctr" lIns="0" rIns="0" tIns="0" bIns="0">
+            <a:spAutoFit/>
+          </a:bodyPr>
+          <a:lstStyle/>
+          <a:p>
+            <a:pPr algn="l">
+              <a:spcAft>
+                <a:spcPts val="800"/>
+              </a:spcAft>
+            </a:pPr>
+            <a:r>
+              <a:rPr sz="1800" b="1" i="0">
+                <a:solidFill>
+                  <a:srgbClr val="14234B"/>
+                </a:solidFill>
+                <a:latin typeface="Cambria"/>
+              </a:rPr>
+              <a:t>Clean-machine build</a:t>
+            </a:r>
+          </a:p>
+        </p:txBody>
+      </p:sp>
+      <p:sp>
+        <p:nvSpPr>
+          <p:cNvPr id="14" name="TextBox 13"/>
+          <p:cNvSpPr txBox="1"/>
+          <p:nvPr/>
+        </p:nvSpPr>
+        <p:spPr>
+          <a:xfrm>
+            <a:off x="3931920" y="5120640"/>
+            <a:ext cx="7498079" cy="777240"/>
+          </a:xfrm>
+          <a:prstGeom prst="rect">
+            <a:avLst/>
+          </a:prstGeom>
+          <a:noFill/>
+        </p:spPr>
+        <p:txBody>
+          <a:bodyPr wrap="square" anchor="ctr" lIns="0" rIns="0" tIns="0" bIns="0">
+            <a:spAutoFit/>
+          </a:bodyPr>
+          <a:lstStyle/>
+          <a:p>
+            <a:pPr algn="l">
+              <a:spcAft>
+                <a:spcPts val="800"/>
+              </a:spcAft>
+            </a:pPr>
+            <a:r>
+              <a:rPr sz="1500" b="0" i="0">
+                <a:solidFill>
+                  <a:srgbClr val="1F2433"/>
+                </a:solidFill>
+                <a:latin typeface="Calibri"/>
+              </a:rPr>
+              <a:t>Fresh clone to running app measured at 297 s, recorded in the README.</a:t>
+            </a:r>
+          </a:p>
+        </p:txBody>
+      </p:sp>
+    </p:spTree>
+  </p:cSld>
+  <p:clrMapOvr>
+    <a:masterClrMapping/>
+  </p:clrMapOvr>
+</p:sld>
+</file>
+
+<file path=ppt/slides/slide13.xml><?xml version="1.0" encoding="utf-8"?>
 <p:sld xmlns:a="http://schemas.openxmlformats.org/drawingml/2006/main" xmlns:p="http://schemas.openxmlformats.org/presentationml/2006/main" xmlns:r="http://schemas.openxmlformats.org/officeDocument/2006/relationships">
   <p:cSld>
     <p:bg>
@@ -11554,7 +12398,7 @@
                 </a:solidFill>
                 <a:latin typeface="Cambria"/>
               </a:rPr>
-              <a:t>The reranker: veto or opinion</a:t>
+              <a:t>All six host universities</a:t>
             </a:r>
           </a:p>
         </p:txBody>
@@ -11567,8 +12411,8 @@
         </p:nvSpPr>
         <p:spPr>
           <a:xfrm>
-            <a:off x="9464040" y="457200"/>
-            <a:ext cx="2194560" cy="384048"/>
+            <a:off x="8549640" y="457200"/>
+            <a:ext cx="3108960" cy="384048"/>
           </a:xfrm>
           <a:prstGeom prst="roundRect">
             <a:avLst>
@@ -11598,7 +12442,7 @@
           </a:fontRef>
         </p:style>
         <p:txBody>
-          <a:bodyPr rtlCol="0" anchor="ctr" tIns="0" bIns="0"/>
+          <a:bodyPr rtlCol="0" anchor="ctr"/>
           <a:lstStyle/>
           <a:p>
             <a:pPr algn="ctr"/>
@@ -11609,26 +12453,774 @@
                 </a:solidFill>
                 <a:latin typeface="Calibri"/>
               </a:rPr>
-              <a:t>PROVISIONAL LABELS</a:t>
+              <a:t>MODEL-JUDGED (SILVER) LABELS</a:t>
             </a:r>
           </a:p>
         </p:txBody>
       </p:sp>
       <p:graphicFrame>
         <p:nvGraphicFramePr>
-          <p:cNvPr id="4" name="Chart 3"/>
+          <p:cNvPr id="4" name="Table 3"/>
           <p:cNvGraphicFramePr>
             <a:graphicFrameLocks noGrp="1"/>
           </p:cNvGraphicFramePr>
           <p:nvPr/>
         </p:nvGraphicFramePr>
         <p:xfrm>
-          <a:off x="457200" y="1371600"/>
-          <a:ext cx="6766560" cy="4937760"/>
+          <a:off x="548640" y="1463040"/>
+          <a:ext cx="7680960" cy="4206240"/>
         </p:xfrm>
         <a:graphic>
-          <a:graphicData uri="http://schemas.openxmlformats.org/drawingml/2006/chart">
-            <c:chart xmlns:c="http://schemas.openxmlformats.org/drawingml/2006/chart" r:id="rId2"/>
+          <a:graphicData uri="http://schemas.openxmlformats.org/drawingml/2006/table">
+            <a:tbl>
+              <a:tblPr firstRow="1" bandRow="1">
+                <a:tableStyleId>{5C22544A-7EE6-4342-B048-85BDC9FD1C3A}</a:tableStyleId>
+              </a:tblPr>
+              <a:tblGrid>
+                <a:gridCol w="1280160"/>
+                <a:gridCol w="1280160"/>
+                <a:gridCol w="1280160"/>
+                <a:gridCol w="1280160"/>
+                <a:gridCol w="1280160"/>
+                <a:gridCol w="1280160"/>
+              </a:tblGrid>
+              <a:tr h="525780">
+                <a:tc>
+                  <a:txBody>
+                    <a:bodyPr/>
+                    <a:lstStyle/>
+                    <a:p>
+                      <a:r>
+                        <a:rPr sz="1300">
+                          <a:latin typeface="Calibri"/>
+                        </a:rPr>
+                        <a:t>P@1 (Recall@5)</a:t>
+                      </a:r>
+                    </a:p>
+                  </a:txBody>
+                  <a:tcPr/>
+                </a:tc>
+                <a:tc>
+                  <a:txBody>
+                    <a:bodyPr/>
+                    <a:lstStyle/>
+                    <a:p>
+                      <a:r>
+                        <a:rPr sz="1300">
+                          <a:latin typeface="Calibri"/>
+                        </a:rPr>
+                        <a:t>Queries</a:t>
+                      </a:r>
+                    </a:p>
+                  </a:txBody>
+                  <a:tcPr/>
+                </a:tc>
+                <a:tc>
+                  <a:txBody>
+                    <a:bodyPr/>
+                    <a:lstStyle/>
+                    <a:p>
+                      <a:r>
+                        <a:rPr sz="1300">
+                          <a:latin typeface="Calibri"/>
+                        </a:rPr>
+                        <a:t>bm25</a:t>
+                      </a:r>
+                    </a:p>
+                  </a:txBody>
+                  <a:tcPr/>
+                </a:tc>
+                <a:tc>
+                  <a:txBody>
+                    <a:bodyPr/>
+                    <a:lstStyle/>
+                    <a:p>
+                      <a:r>
+                        <a:rPr sz="1300">
+                          <a:latin typeface="Calibri"/>
+                        </a:rPr>
+                        <a:t>dense-minilm</a:t>
+                      </a:r>
+                    </a:p>
+                  </a:txBody>
+                  <a:tcPr/>
+                </a:tc>
+                <a:tc>
+                  <a:txBody>
+                    <a:bodyPr/>
+                    <a:lstStyle/>
+                    <a:p>
+                      <a:r>
+                        <a:rPr sz="1300">
+                          <a:latin typeface="Calibri"/>
+                        </a:rPr>
+                        <a:t>hybrid</a:t>
+                      </a:r>
+                    </a:p>
+                  </a:txBody>
+                  <a:tcPr/>
+                </a:tc>
+                <a:tc>
+                  <a:txBody>
+                    <a:bodyPr/>
+                    <a:lstStyle/>
+                    <a:p>
+                      <a:r>
+                        <a:rPr sz="1300">
+                          <a:latin typeface="Calibri"/>
+                        </a:rPr>
+                        <a:t>hybrid+ce</a:t>
+                      </a:r>
+                    </a:p>
+                  </a:txBody>
+                  <a:tcPr/>
+                </a:tc>
+              </a:tr>
+              <a:tr h="525780">
+                <a:tc>
+                  <a:txBody>
+                    <a:bodyPr/>
+                    <a:lstStyle/>
+                    <a:p>
+                      <a:r>
+                        <a:rPr sz="1300">
+                          <a:latin typeface="Calibri"/>
+                        </a:rPr>
+                        <a:t>EPFL</a:t>
+                      </a:r>
+                    </a:p>
+                  </a:txBody>
+                  <a:tcPr/>
+                </a:tc>
+                <a:tc>
+                  <a:txBody>
+                    <a:bodyPr/>
+                    <a:lstStyle/>
+                    <a:p>
+                      <a:r>
+                        <a:rPr sz="1300">
+                          <a:latin typeface="Calibri"/>
+                        </a:rPr>
+                        <a:t>8</a:t>
+                      </a:r>
+                    </a:p>
+                  </a:txBody>
+                  <a:tcPr/>
+                </a:tc>
+                <a:tc>
+                  <a:txBody>
+                    <a:bodyPr/>
+                    <a:lstStyle/>
+                    <a:p>
+                      <a:r>
+                        <a:rPr sz="1300">
+                          <a:latin typeface="Calibri"/>
+                        </a:rPr>
+                        <a:t>0.75 (0.88)</a:t>
+                      </a:r>
+                    </a:p>
+                  </a:txBody>
+                  <a:tcPr/>
+                </a:tc>
+                <a:tc>
+                  <a:txBody>
+                    <a:bodyPr/>
+                    <a:lstStyle/>
+                    <a:p>
+                      <a:r>
+                        <a:rPr sz="1300">
+                          <a:latin typeface="Calibri"/>
+                        </a:rPr>
+                        <a:t>0.38 (0.79)</a:t>
+                      </a:r>
+                    </a:p>
+                  </a:txBody>
+                  <a:tcPr/>
+                </a:tc>
+                <a:tc>
+                  <a:txBody>
+                    <a:bodyPr/>
+                    <a:lstStyle/>
+                    <a:p>
+                      <a:r>
+                        <a:rPr sz="1300">
+                          <a:latin typeface="Calibri"/>
+                        </a:rPr>
+                        <a:t>0.38 (0.69)</a:t>
+                      </a:r>
+                    </a:p>
+                  </a:txBody>
+                  <a:tcPr/>
+                </a:tc>
+                <a:tc>
+                  <a:txBody>
+                    <a:bodyPr/>
+                    <a:lstStyle/>
+                    <a:p>
+                      <a:r>
+                        <a:rPr sz="1300">
+                          <a:latin typeface="Calibri"/>
+                        </a:rPr>
+                        <a:t>0.38 (0.71)</a:t>
+                      </a:r>
+                    </a:p>
+                  </a:txBody>
+                  <a:tcPr/>
+                </a:tc>
+              </a:tr>
+              <a:tr h="525780">
+                <a:tc>
+                  <a:txBody>
+                    <a:bodyPr/>
+                    <a:lstStyle/>
+                    <a:p>
+                      <a:r>
+                        <a:rPr sz="1300">
+                          <a:latin typeface="Calibri"/>
+                        </a:rPr>
+                        <a:t>TU Delft</a:t>
+                      </a:r>
+                    </a:p>
+                  </a:txBody>
+                  <a:tcPr/>
+                </a:tc>
+                <a:tc>
+                  <a:txBody>
+                    <a:bodyPr/>
+                    <a:lstStyle/>
+                    <a:p>
+                      <a:r>
+                        <a:rPr sz="1300">
+                          <a:latin typeface="Calibri"/>
+                        </a:rPr>
+                        <a:t>13</a:t>
+                      </a:r>
+                    </a:p>
+                  </a:txBody>
+                  <a:tcPr/>
+                </a:tc>
+                <a:tc>
+                  <a:txBody>
+                    <a:bodyPr/>
+                    <a:lstStyle/>
+                    <a:p>
+                      <a:r>
+                        <a:rPr sz="1300">
+                          <a:latin typeface="Calibri"/>
+                        </a:rPr>
+                        <a:t>0.69 (0.92)</a:t>
+                      </a:r>
+                    </a:p>
+                  </a:txBody>
+                  <a:tcPr/>
+                </a:tc>
+                <a:tc>
+                  <a:txBody>
+                    <a:bodyPr/>
+                    <a:lstStyle/>
+                    <a:p>
+                      <a:r>
+                        <a:rPr sz="1300">
+                          <a:latin typeface="Calibri"/>
+                        </a:rPr>
+                        <a:t>0.54 (0.88)</a:t>
+                      </a:r>
+                    </a:p>
+                  </a:txBody>
+                  <a:tcPr/>
+                </a:tc>
+                <a:tc>
+                  <a:txBody>
+                    <a:bodyPr/>
+                    <a:lstStyle/>
+                    <a:p>
+                      <a:r>
+                        <a:rPr sz="1300">
+                          <a:latin typeface="Calibri"/>
+                        </a:rPr>
+                        <a:t>0.77 (0.92)</a:t>
+                      </a:r>
+                    </a:p>
+                  </a:txBody>
+                  <a:tcPr/>
+                </a:tc>
+                <a:tc>
+                  <a:txBody>
+                    <a:bodyPr/>
+                    <a:lstStyle/>
+                    <a:p>
+                      <a:r>
+                        <a:rPr sz="1300">
+                          <a:latin typeface="Calibri"/>
+                        </a:rPr>
+                        <a:t>0.54 (0.85)</a:t>
+                      </a:r>
+                    </a:p>
+                  </a:txBody>
+                  <a:tcPr/>
+                </a:tc>
+              </a:tr>
+              <a:tr h="525780">
+                <a:tc>
+                  <a:txBody>
+                    <a:bodyPr/>
+                    <a:lstStyle/>
+                    <a:p>
+                      <a:r>
+                        <a:rPr sz="1300">
+                          <a:latin typeface="Calibri"/>
+                        </a:rPr>
+                        <a:t>Polimi</a:t>
+                      </a:r>
+                    </a:p>
+                  </a:txBody>
+                  <a:tcPr/>
+                </a:tc>
+                <a:tc>
+                  <a:txBody>
+                    <a:bodyPr/>
+                    <a:lstStyle/>
+                    <a:p>
+                      <a:r>
+                        <a:rPr sz="1300">
+                          <a:latin typeface="Calibri"/>
+                        </a:rPr>
+                        <a:t>14</a:t>
+                      </a:r>
+                    </a:p>
+                  </a:txBody>
+                  <a:tcPr/>
+                </a:tc>
+                <a:tc>
+                  <a:txBody>
+                    <a:bodyPr/>
+                    <a:lstStyle/>
+                    <a:p>
+                      <a:r>
+                        <a:rPr sz="1300">
+                          <a:latin typeface="Calibri"/>
+                        </a:rPr>
+                        <a:t>0.93 (0.98)</a:t>
+                      </a:r>
+                    </a:p>
+                  </a:txBody>
+                  <a:tcPr/>
+                </a:tc>
+                <a:tc>
+                  <a:txBody>
+                    <a:bodyPr/>
+                    <a:lstStyle/>
+                    <a:p>
+                      <a:r>
+                        <a:rPr sz="1300">
+                          <a:latin typeface="Calibri"/>
+                        </a:rPr>
+                        <a:t>0.71 (1.00)</a:t>
+                      </a:r>
+                    </a:p>
+                  </a:txBody>
+                  <a:tcPr/>
+                </a:tc>
+                <a:tc>
+                  <a:txBody>
+                    <a:bodyPr/>
+                    <a:lstStyle/>
+                    <a:p>
+                      <a:r>
+                        <a:rPr sz="1300">
+                          <a:latin typeface="Calibri"/>
+                        </a:rPr>
+                        <a:t>0.79 (0.98)</a:t>
+                      </a:r>
+                    </a:p>
+                  </a:txBody>
+                  <a:tcPr/>
+                </a:tc>
+                <a:tc>
+                  <a:txBody>
+                    <a:bodyPr/>
+                    <a:lstStyle/>
+                    <a:p>
+                      <a:r>
+                        <a:rPr sz="1300">
+                          <a:latin typeface="Calibri"/>
+                        </a:rPr>
+                        <a:t>0.79 (0.98)</a:t>
+                      </a:r>
+                    </a:p>
+                  </a:txBody>
+                  <a:tcPr/>
+                </a:tc>
+              </a:tr>
+              <a:tr h="525780">
+                <a:tc>
+                  <a:txBody>
+                    <a:bodyPr/>
+                    <a:lstStyle/>
+                    <a:p>
+                      <a:r>
+                        <a:rPr sz="1300">
+                          <a:latin typeface="Calibri"/>
+                        </a:rPr>
+                        <a:t>KTH</a:t>
+                      </a:r>
+                    </a:p>
+                  </a:txBody>
+                  <a:tcPr/>
+                </a:tc>
+                <a:tc>
+                  <a:txBody>
+                    <a:bodyPr/>
+                    <a:lstStyle/>
+                    <a:p>
+                      <a:r>
+                        <a:rPr sz="1300">
+                          <a:latin typeface="Calibri"/>
+                        </a:rPr>
+                        <a:t>6</a:t>
+                      </a:r>
+                    </a:p>
+                  </a:txBody>
+                  <a:tcPr/>
+                </a:tc>
+                <a:tc>
+                  <a:txBody>
+                    <a:bodyPr/>
+                    <a:lstStyle/>
+                    <a:p>
+                      <a:r>
+                        <a:rPr sz="1300">
+                          <a:latin typeface="Calibri"/>
+                        </a:rPr>
+                        <a:t>0.67 (0.67)</a:t>
+                      </a:r>
+                    </a:p>
+                  </a:txBody>
+                  <a:tcPr/>
+                </a:tc>
+                <a:tc>
+                  <a:txBody>
+                    <a:bodyPr/>
+                    <a:lstStyle/>
+                    <a:p>
+                      <a:r>
+                        <a:rPr sz="1300">
+                          <a:latin typeface="Calibri"/>
+                        </a:rPr>
+                        <a:t>0.67 (0.94)</a:t>
+                      </a:r>
+                    </a:p>
+                  </a:txBody>
+                  <a:tcPr/>
+                </a:tc>
+                <a:tc>
+                  <a:txBody>
+                    <a:bodyPr/>
+                    <a:lstStyle/>
+                    <a:p>
+                      <a:r>
+                        <a:rPr sz="1300">
+                          <a:latin typeface="Calibri"/>
+                        </a:rPr>
+                        <a:t>0.67 (0.75)</a:t>
+                      </a:r>
+                    </a:p>
+                  </a:txBody>
+                  <a:tcPr/>
+                </a:tc>
+                <a:tc>
+                  <a:txBody>
+                    <a:bodyPr/>
+                    <a:lstStyle/>
+                    <a:p>
+                      <a:r>
+                        <a:rPr sz="1300">
+                          <a:latin typeface="Calibri"/>
+                        </a:rPr>
+                        <a:t>0.67 (0.83)</a:t>
+                      </a:r>
+                    </a:p>
+                  </a:txBody>
+                  <a:tcPr/>
+                </a:tc>
+              </a:tr>
+              <a:tr h="525780">
+                <a:tc>
+                  <a:txBody>
+                    <a:bodyPr/>
+                    <a:lstStyle/>
+                    <a:p>
+                      <a:r>
+                        <a:rPr sz="1300">
+                          <a:latin typeface="Calibri"/>
+                        </a:rPr>
+                        <a:t>Twente AM</a:t>
+                      </a:r>
+                    </a:p>
+                  </a:txBody>
+                  <a:tcPr/>
+                </a:tc>
+                <a:tc>
+                  <a:txBody>
+                    <a:bodyPr/>
+                    <a:lstStyle/>
+                    <a:p>
+                      <a:r>
+                        <a:rPr sz="1300">
+                          <a:latin typeface="Calibri"/>
+                        </a:rPr>
+                        <a:t>8</a:t>
+                      </a:r>
+                    </a:p>
+                  </a:txBody>
+                  <a:tcPr/>
+                </a:tc>
+                <a:tc>
+                  <a:txBody>
+                    <a:bodyPr/>
+                    <a:lstStyle/>
+                    <a:p>
+                      <a:r>
+                        <a:rPr sz="1300">
+                          <a:latin typeface="Calibri"/>
+                        </a:rPr>
+                        <a:t>1.00 (1.00)</a:t>
+                      </a:r>
+                    </a:p>
+                  </a:txBody>
+                  <a:tcPr/>
+                </a:tc>
+                <a:tc>
+                  <a:txBody>
+                    <a:bodyPr/>
+                    <a:lstStyle/>
+                    <a:p>
+                      <a:r>
+                        <a:rPr sz="1300">
+                          <a:latin typeface="Calibri"/>
+                        </a:rPr>
+                        <a:t>0.88 (1.00)</a:t>
+                      </a:r>
+                    </a:p>
+                  </a:txBody>
+                  <a:tcPr/>
+                </a:tc>
+                <a:tc>
+                  <a:txBody>
+                    <a:bodyPr/>
+                    <a:lstStyle/>
+                    <a:p>
+                      <a:r>
+                        <a:rPr sz="1300">
+                          <a:latin typeface="Calibri"/>
+                        </a:rPr>
+                        <a:t>1.00 (1.00)</a:t>
+                      </a:r>
+                    </a:p>
+                  </a:txBody>
+                  <a:tcPr/>
+                </a:tc>
+                <a:tc>
+                  <a:txBody>
+                    <a:bodyPr/>
+                    <a:lstStyle/>
+                    <a:p>
+                      <a:r>
+                        <a:rPr sz="1300">
+                          <a:latin typeface="Calibri"/>
+                        </a:rPr>
+                        <a:t>0.88 (0.96)</a:t>
+                      </a:r>
+                    </a:p>
+                  </a:txBody>
+                  <a:tcPr/>
+                </a:tc>
+              </a:tr>
+              <a:tr h="525780">
+                <a:tc>
+                  <a:txBody>
+                    <a:bodyPr/>
+                    <a:lstStyle/>
+                    <a:p>
+                      <a:r>
+                        <a:rPr sz="1300">
+                          <a:latin typeface="Calibri"/>
+                        </a:rPr>
+                        <a:t>Twente TCS</a:t>
+                      </a:r>
+                    </a:p>
+                  </a:txBody>
+                  <a:tcPr/>
+                </a:tc>
+                <a:tc>
+                  <a:txBody>
+                    <a:bodyPr/>
+                    <a:lstStyle/>
+                    <a:p>
+                      <a:r>
+                        <a:rPr sz="1300">
+                          <a:latin typeface="Calibri"/>
+                        </a:rPr>
+                        <a:t>12</a:t>
+                      </a:r>
+                    </a:p>
+                  </a:txBody>
+                  <a:tcPr/>
+                </a:tc>
+                <a:tc>
+                  <a:txBody>
+                    <a:bodyPr/>
+                    <a:lstStyle/>
+                    <a:p>
+                      <a:r>
+                        <a:rPr sz="1300">
+                          <a:latin typeface="Calibri"/>
+                        </a:rPr>
+                        <a:t>0.92 (0.89)</a:t>
+                      </a:r>
+                    </a:p>
+                  </a:txBody>
+                  <a:tcPr/>
+                </a:tc>
+                <a:tc>
+                  <a:txBody>
+                    <a:bodyPr/>
+                    <a:lstStyle/>
+                    <a:p>
+                      <a:r>
+                        <a:rPr sz="1300">
+                          <a:latin typeface="Calibri"/>
+                        </a:rPr>
+                        <a:t>0.58 (0.88)</a:t>
+                      </a:r>
+                    </a:p>
+                  </a:txBody>
+                  <a:tcPr/>
+                </a:tc>
+                <a:tc>
+                  <a:txBody>
+                    <a:bodyPr/>
+                    <a:lstStyle/>
+                    <a:p>
+                      <a:r>
+                        <a:rPr sz="1300">
+                          <a:latin typeface="Calibri"/>
+                        </a:rPr>
+                        <a:t>0.58 (0.83)</a:t>
+                      </a:r>
+                    </a:p>
+                  </a:txBody>
+                  <a:tcPr/>
+                </a:tc>
+                <a:tc>
+                  <a:txBody>
+                    <a:bodyPr/>
+                    <a:lstStyle/>
+                    <a:p>
+                      <a:r>
+                        <a:rPr sz="1300">
+                          <a:latin typeface="Calibri"/>
+                        </a:rPr>
+                        <a:t>0.75 (0.83)</a:t>
+                      </a:r>
+                    </a:p>
+                  </a:txBody>
+                  <a:tcPr/>
+                </a:tc>
+              </a:tr>
+              <a:tr h="525780">
+                <a:tc>
+                  <a:txBody>
+                    <a:bodyPr/>
+                    <a:lstStyle/>
+                    <a:p>
+                      <a:r>
+                        <a:rPr sz="1300">
+                          <a:latin typeface="Calibri"/>
+                        </a:rPr>
+                        <a:t>All</a:t>
+                      </a:r>
+                    </a:p>
+                  </a:txBody>
+                  <a:tcPr/>
+                </a:tc>
+                <a:tc>
+                  <a:txBody>
+                    <a:bodyPr/>
+                    <a:lstStyle/>
+                    <a:p>
+                      <a:r>
+                        <a:rPr sz="1300">
+                          <a:latin typeface="Calibri"/>
+                        </a:rPr>
+                        <a:t>61</a:t>
+                      </a:r>
+                    </a:p>
+                  </a:txBody>
+                  <a:tcPr/>
+                </a:tc>
+                <a:tc>
+                  <a:txBody>
+                    <a:bodyPr/>
+                    <a:lstStyle/>
+                    <a:p>
+                      <a:r>
+                        <a:rPr sz="1300">
+                          <a:latin typeface="Calibri"/>
+                        </a:rPr>
+                        <a:t>0.84 (0.91)</a:t>
+                      </a:r>
+                    </a:p>
+                  </a:txBody>
+                  <a:tcPr/>
+                </a:tc>
+                <a:tc>
+                  <a:txBody>
+                    <a:bodyPr/>
+                    <a:lstStyle/>
+                    <a:p>
+                      <a:r>
+                        <a:rPr sz="1300">
+                          <a:latin typeface="Calibri"/>
+                        </a:rPr>
+                        <a:t>0.62 (0.92)</a:t>
+                      </a:r>
+                    </a:p>
+                  </a:txBody>
+                  <a:tcPr/>
+                </a:tc>
+                <a:tc>
+                  <a:txBody>
+                    <a:bodyPr/>
+                    <a:lstStyle/>
+                    <a:p>
+                      <a:r>
+                        <a:rPr sz="1300">
+                          <a:latin typeface="Calibri"/>
+                        </a:rPr>
+                        <a:t>0.70 (0.88)</a:t>
+                      </a:r>
+                    </a:p>
+                  </a:txBody>
+                  <a:tcPr/>
+                </a:tc>
+                <a:tc>
+                  <a:txBody>
+                    <a:bodyPr/>
+                    <a:lstStyle/>
+                    <a:p>
+                      <a:r>
+                        <a:rPr sz="1300">
+                          <a:latin typeface="Calibri"/>
+                        </a:rPr>
+                        <a:t>0.67 (0.87)</a:t>
+                      </a:r>
+                    </a:p>
+                  </a:txBody>
+                  <a:tcPr/>
+                </a:tc>
+              </a:tr>
+            </a:tbl>
           </a:graphicData>
         </a:graphic>
       </p:graphicFrame>
@@ -11640,8 +13232,8 @@
         </p:nvSpPr>
         <p:spPr>
           <a:xfrm>
-            <a:off x="7680960" y="1554480"/>
-            <a:ext cx="4023360" cy="4572000"/>
+            <a:off x="8595360" y="1554480"/>
+            <a:ext cx="3108960" cy="4572000"/>
           </a:xfrm>
           <a:prstGeom prst="rect">
             <a:avLst/>
@@ -11660,13 +13252,13 @@
               </a:spcAft>
             </a:pPr>
             <a:r>
-              <a:rPr sz="1500" b="0" i="0">
+              <a:rPr sz="1400" b="0" i="0">
                 <a:solidFill>
                   <a:srgbClr val="1F2433"/>
                 </a:solidFill>
                 <a:latin typeface="Calibri"/>
               </a:rPr>
-              <a:t>The proposal expected the cross-encoder to win. Letting it replace the retrieval order made every metric worse.</a:t>
+              <a:t>20 home courses stratified by subject, the same against every host, pooled from all five strategies and labelled blind by a model.</a:t>
             </a:r>
           </a:p>
           <a:p>
@@ -11676,13 +13268,13 @@
               </a:spcAft>
             </a:pPr>
             <a:r>
-              <a:rPr sz="1500" b="0" i="0">
+              <a:rPr sz="1400" b="0" i="0">
                 <a:solidFill>
                   <a:srgbClr val="1F2433"/>
                 </a:solidFill>
                 <a:latin typeface="Calibri"/>
               </a:rPr>
-              <a:t>It was trained on short web queries against passages. Here both sides are long course descriptions.</a:t>
+              <a:t>Recall is level everywhere. Plain BM25 has the best first answer: standard course titles make keyword overlap a strong signal.</a:t>
             </a:r>
           </a:p>
           <a:p>
@@ -11692,13 +13284,13 @@
               </a:spcAft>
             </a:pPr>
             <a:r>
-              <a:rPr sz="1500" b="0" i="0">
+              <a:rPr sz="1400" b="0" i="0">
                 <a:solidFill>
                   <a:srgbClr val="1F2433"/>
                 </a:solidFill>
                 <a:latin typeface="Calibri"/>
               </a:rPr>
-              <a:t>Fused as a third ranking beside BM25 and dense, it recovers to level with hybrid. One opinion among three, never a veto.</a:t>
+              <a:t>Silver against the human-checked gold rows: weighted kappa 0.63.</a:t>
             </a:r>
           </a:p>
         </p:txBody>
@@ -11763,7 +13355,7 @@
                 </a:solidFill>
                 <a:latin typeface="Cambria"/>
               </a:rPr>
-              <a:t>From a score to recognised ECTS</a:t>
+              <a:t>The reranker: veto or opinion</a:t>
             </a:r>
           </a:p>
         </p:txBody>
@@ -11818,7 +13410,7 @@
                 </a:solidFill>
                 <a:latin typeface="Calibri"/>
               </a:rPr>
-              <a:t>PARTLY MODEL-LABELLED</a:t>
+              <a:t>PROVISIONAL LABELS</a:t>
             </a:r>
           </a:p>
         </p:txBody>
@@ -11833,7 +13425,7 @@
         </p:nvGraphicFramePr>
         <p:xfrm>
           <a:off x="457200" y="1371600"/>
-          <a:ext cx="6035040" cy="4846320"/>
+          <a:ext cx="6766560" cy="4937760"/>
         </p:xfrm>
         <a:graphic>
           <a:graphicData uri="http://schemas.openxmlformats.org/drawingml/2006/chart">
@@ -11843,60 +13435,14 @@
       </p:graphicFrame>
       <p:sp>
         <p:nvSpPr>
-          <p:cNvPr id="5" name="Rounded Rectangle 4"/>
-          <p:cNvSpPr/>
-          <p:nvPr/>
-        </p:nvSpPr>
-        <p:spPr>
-          <a:xfrm>
-            <a:off x="6949440" y="1463040"/>
-            <a:ext cx="4663440" cy="1371600"/>
-          </a:xfrm>
-          <a:prstGeom prst="roundRect">
-            <a:avLst>
-              <a:gd name="adj" fmla="val 12000"/>
-            </a:avLst>
-          </a:prstGeom>
-          <a:solidFill>
-            <a:srgbClr val="14234B"/>
-          </a:solidFill>
-          <a:ln>
-            <a:noFill/>
-          </a:ln>
-          <a:effectLst/>
-        </p:spPr>
-        <p:style>
-          <a:lnRef idx="1">
-            <a:schemeClr val="accent1"/>
-          </a:lnRef>
-          <a:fillRef idx="3">
-            <a:schemeClr val="accent1"/>
-          </a:fillRef>
-          <a:effectRef idx="2">
-            <a:schemeClr val="accent1"/>
-          </a:effectRef>
-          <a:fontRef idx="minor">
-            <a:schemeClr val="lt1"/>
-          </a:fontRef>
-        </p:style>
-        <p:txBody>
-          <a:bodyPr rtlCol="0" anchor="ctr"/>
-          <a:lstStyle/>
-          <a:p>
-            <a:pPr algn="ctr"/>
-          </a:p>
-        </p:txBody>
-      </p:sp>
-      <p:sp>
-        <p:nvSpPr>
-          <p:cNvPr id="6" name="TextBox 5"/>
+          <p:cNvPr id="5" name="TextBox 4"/>
           <p:cNvSpPr txBox="1"/>
           <p:nvPr/>
         </p:nvSpPr>
         <p:spPr>
           <a:xfrm>
-            <a:off x="7223760" y="1600200"/>
-            <a:ext cx="4206240" cy="1097280"/>
+            <a:off x="7680960" y="1554480"/>
+            <a:ext cx="4023360" cy="4572000"/>
           </a:xfrm>
           <a:prstGeom prst="rect">
             <a:avLst/>
@@ -11904,7 +13450,7 @@
           <a:noFill/>
         </p:spPr>
         <p:txBody>
-          <a:bodyPr wrap="square" anchor="ctr" lIns="0" rIns="0" tIns="0" bIns="0">
+          <a:bodyPr wrap="square" anchor="t" lIns="0" rIns="0" tIns="0" bIns="0">
             <a:spAutoFit/>
           </a:bodyPr>
           <a:lstStyle/>
@@ -11915,13 +13461,13 @@
               </a:spcAft>
             </a:pPr>
             <a:r>
-              <a:rPr sz="1700" b="0" i="0">
-                <a:solidFill>
-                  <a:srgbClr val="FFFFFF"/>
-                </a:solidFill>
-                <a:latin typeface="Cambria"/>
+              <a:rPr sz="1500" b="0" i="0">
+                <a:solidFill>
+                  <a:srgbClr val="1F2433"/>
+                </a:solidFill>
+                <a:latin typeface="Calibri"/>
               </a:rPr>
-              <a:t>expected ECTS =</a:t>
+              <a:t>The proposal expected the cross-encoder to win. Letting it replace the retrieval order made every metric worse.</a:t>
             </a:r>
           </a:p>
           <a:p>
@@ -11931,38 +13477,15 @@
               </a:spcAft>
             </a:pPr>
             <a:r>
-              <a:rPr sz="1700" b="0" i="0">
-                <a:solidFill>
-                  <a:srgbClr val="FFFFFF"/>
-                </a:solidFill>
-                <a:latin typeface="Cambria"/>
+              <a:rPr sz="1500" b="0" i="0">
+                <a:solidFill>
+                  <a:srgbClr val="1F2433"/>
+                </a:solidFill>
+                <a:latin typeface="Calibri"/>
               </a:rPr>
-              <a:t>sum of p(best match) x ECTS(home course)</a:t>
-            </a:r>
-          </a:p>
-        </p:txBody>
-      </p:sp>
-      <p:sp>
-        <p:nvSpPr>
-          <p:cNvPr id="7" name="TextBox 6"/>
-          <p:cNvSpPr txBox="1"/>
-          <p:nvPr/>
-        </p:nvSpPr>
-        <p:spPr>
-          <a:xfrm>
-            <a:off x="6949440" y="3108960"/>
-            <a:ext cx="4663440" cy="3108960"/>
-          </a:xfrm>
-          <a:prstGeom prst="rect">
-            <a:avLst/>
-          </a:prstGeom>
-          <a:noFill/>
-        </p:spPr>
-        <p:txBody>
-          <a:bodyPr wrap="square" anchor="t" lIns="0" rIns="0" tIns="0" bIns="0">
-            <a:spAutoFit/>
-          </a:bodyPr>
-          <a:lstStyle/>
+              <a:t>It was trained on short web queries against passages. Here both sides are long course descriptions.</a:t>
+            </a:r>
+          </a:p>
           <a:p>
             <a:pPr algn="l">
               <a:spcAft>
@@ -11976,23 +13499,7 @@
                 </a:solidFill>
                 <a:latin typeface="Calibri"/>
               </a:rPr>
-              <a:t>Platt scaling on the fused rank score and the embedding cosine gives the probability that a human labelled the pair a match. Rank alone cannot tell a good top hit from the best of a bad lot; the cosine can.</a:t>
-            </a:r>
-          </a:p>
-          <a:p>
-            <a:pPr algn="l">
-              <a:spcAft>
-                <a:spcPts val="800"/>
-              </a:spcAft>
-            </a:pPr>
-            <a:r>
-              <a:rPr sz="1500" b="0" i="0">
-                <a:solidFill>
-                  <a:srgbClr val="1F2433"/>
-                </a:solidFill>
-                <a:latin typeface="Calibri"/>
-              </a:rPr>
-              <a:t>Only the best candidate per home course counts, partial matches count as matches, and an ECTS shortfall is shown rather than hidden.</a:t>
+              <a:t>Fused as a third ranking beside BM25 and dense, it recovers to level with hybrid. One opinion among three, never a veto.</a:t>
             </a:r>
           </a:p>
         </p:txBody>
@@ -12057,7 +13564,7 @@
                 </a:solidFill>
                 <a:latin typeface="Cambria"/>
               </a:rPr>
-              <a:t>An interface that does not overstate</a:t>
+              <a:t>From a score to recognised ECTS</a:t>
             </a:r>
           </a:p>
         </p:txBody>
@@ -12070,8 +13577,8 @@
         </p:nvSpPr>
         <p:spPr>
           <a:xfrm>
-            <a:off x="548640" y="1463040"/>
-            <a:ext cx="5394960" cy="2103120"/>
+            <a:off x="9464040" y="457200"/>
+            <a:ext cx="2194560" cy="384048"/>
           </a:xfrm>
           <a:prstGeom prst="roundRect">
             <a:avLst>
@@ -12079,7 +13586,7 @@
             </a:avLst>
           </a:prstGeom>
           <a:solidFill>
-            <a:srgbClr val="EEF1F8"/>
+            <a:srgbClr val="F2B705"/>
           </a:solidFill>
           <a:ln>
             <a:noFill/>
@@ -12101,26 +13608,55 @@
           </a:fontRef>
         </p:style>
         <p:txBody>
-          <a:bodyPr rtlCol="0" anchor="ctr"/>
+          <a:bodyPr rtlCol="0" anchor="ctr" tIns="0" bIns="0"/>
           <a:lstStyle/>
           <a:p>
             <a:pPr algn="ctr"/>
-          </a:p>
-        </p:txBody>
-      </p:sp>
-      <p:sp>
-        <p:nvSpPr>
-          <p:cNvPr id="4" name="Oval 3"/>
+            <a:r>
+              <a:rPr sz="1200" b="1">
+                <a:solidFill>
+                  <a:srgbClr val="14234B"/>
+                </a:solidFill>
+                <a:latin typeface="Calibri"/>
+              </a:rPr>
+              <a:t>PARTLY MODEL-LABELLED</a:t>
+            </a:r>
+          </a:p>
+        </p:txBody>
+      </p:sp>
+      <p:graphicFrame>
+        <p:nvGraphicFramePr>
+          <p:cNvPr id="4" name="Chart 3"/>
+          <p:cNvGraphicFramePr>
+            <a:graphicFrameLocks noGrp="1"/>
+          </p:cNvGraphicFramePr>
+          <p:nvPr/>
+        </p:nvGraphicFramePr>
+        <p:xfrm>
+          <a:off x="457200" y="1371600"/>
+          <a:ext cx="6035040" cy="4846320"/>
+        </p:xfrm>
+        <a:graphic>
+          <a:graphicData uri="http://schemas.openxmlformats.org/drawingml/2006/chart">
+            <c:chart xmlns:c="http://schemas.openxmlformats.org/drawingml/2006/chart" r:id="rId2"/>
+          </a:graphicData>
+        </a:graphic>
+      </p:graphicFrame>
+      <p:sp>
+        <p:nvSpPr>
+          <p:cNvPr id="5" name="Rounded Rectangle 4"/>
           <p:cNvSpPr/>
           <p:nvPr/>
         </p:nvSpPr>
         <p:spPr>
           <a:xfrm>
-            <a:off x="822960" y="1737360"/>
-            <a:ext cx="502920" cy="502920"/>
-          </a:xfrm>
-          <a:prstGeom prst="ellipse">
-            <a:avLst/>
+            <a:off x="6949440" y="1463040"/>
+            <a:ext cx="4663440" cy="1371600"/>
+          </a:xfrm>
+          <a:prstGeom prst="roundRect">
+            <a:avLst>
+              <a:gd name="adj" fmla="val 12000"/>
+            </a:avLst>
           </a:prstGeom>
           <a:solidFill>
             <a:srgbClr val="14234B"/>
@@ -12145,32 +13681,23 @@
           </a:fontRef>
         </p:style>
         <p:txBody>
-          <a:bodyPr rtlCol="0" anchor="ctr" lIns="0" rIns="0" tIns="0" bIns="0"/>
+          <a:bodyPr rtlCol="0" anchor="ctr"/>
           <a:lstStyle/>
           <a:p>
             <a:pPr algn="ctr"/>
-            <a:r>
-              <a:rPr sz="1800" b="1">
-                <a:solidFill>
-                  <a:srgbClr val="FFFFFF"/>
-                </a:solidFill>
-                <a:latin typeface="Cambria"/>
-              </a:rPr>
-              <a:t>1</a:t>
-            </a:r>
-          </a:p>
-        </p:txBody>
-      </p:sp>
-      <p:sp>
-        <p:nvSpPr>
-          <p:cNvPr id="5" name="TextBox 4"/>
+          </a:p>
+        </p:txBody>
+      </p:sp>
+      <p:sp>
+        <p:nvSpPr>
+          <p:cNvPr id="6" name="TextBox 5"/>
           <p:cNvSpPr txBox="1"/>
           <p:nvPr/>
         </p:nvSpPr>
         <p:spPr>
           <a:xfrm>
-            <a:off x="1554480" y="1764792"/>
-            <a:ext cx="4114800" cy="457200"/>
+            <a:off x="7223760" y="1600200"/>
+            <a:ext cx="4206240" cy="1097280"/>
           </a:xfrm>
           <a:prstGeom prst="rect">
             <a:avLst/>
@@ -12178,7 +13705,7 @@
           <a:noFill/>
         </p:spPr>
         <p:txBody>
-          <a:bodyPr wrap="square" anchor="t" lIns="0" rIns="0" tIns="0" bIns="0">
+          <a:bodyPr wrap="square" anchor="ctr" lIns="0" rIns="0" tIns="0" bIns="0">
             <a:spAutoFit/>
           </a:bodyPr>
           <a:lstStyle/>
@@ -12189,38 +13716,15 @@
               </a:spcAft>
             </a:pPr>
             <a:r>
-              <a:rPr sz="1800" b="1" i="0">
-                <a:solidFill>
-                  <a:srgbClr val="14234B"/>
+              <a:rPr sz="1700" b="0" i="0">
+                <a:solidFill>
+                  <a:srgbClr val="FFFFFF"/>
                 </a:solidFill>
                 <a:latin typeface="Cambria"/>
               </a:rPr>
-              <a:t>Two kinds of score</a:t>
-            </a:r>
-          </a:p>
-        </p:txBody>
-      </p:sp>
-      <p:sp>
-        <p:nvSpPr>
-          <p:cNvPr id="6" name="TextBox 5"/>
-          <p:cNvSpPr txBox="1"/>
-          <p:nvPr/>
-        </p:nvSpPr>
-        <p:spPr>
-          <a:xfrm>
-            <a:off x="1554480" y="2286000"/>
-            <a:ext cx="4114800" cy="1188720"/>
-          </a:xfrm>
-          <a:prstGeom prst="rect">
-            <a:avLst/>
-          </a:prstGeom>
-          <a:noFill/>
-        </p:spPr>
-        <p:txBody>
-          <a:bodyPr wrap="square" anchor="t" lIns="0" rIns="0" tIns="0" bIns="0">
-            <a:spAutoFit/>
-          </a:bodyPr>
-          <a:lstStyle/>
+              <a:t>expected ECTS =</a:t>
+            </a:r>
+          </a:p>
           <a:p>
             <a:pPr algn="l">
               <a:spcAft>
@@ -12228,126 +13732,27 @@
               </a:spcAft>
             </a:pPr>
             <a:r>
-              <a:rPr sz="1400" b="0" i="0">
-                <a:solidFill>
-                  <a:srgbClr val="1F2433"/>
-                </a:solidFill>
-                <a:latin typeface="Calibri"/>
-              </a:rPr>
-              <a:t>A calibrated strategy shows a percentage and a likely, borderline or unlikely band. The others show a bare relative number and a tooltip saying it is not a probability. One file formats every score.</a:t>
-            </a:r>
-          </a:p>
-        </p:txBody>
-      </p:sp>
-      <p:sp>
-        <p:nvSpPr>
-          <p:cNvPr id="7" name="Rounded Rectangle 6"/>
-          <p:cNvSpPr/>
-          <p:nvPr/>
-        </p:nvSpPr>
-        <p:spPr>
-          <a:xfrm>
-            <a:off x="6217920" y="1463040"/>
-            <a:ext cx="5394960" cy="2103120"/>
-          </a:xfrm>
-          <a:prstGeom prst="roundRect">
-            <a:avLst>
-              <a:gd name="adj" fmla="val 12000"/>
-            </a:avLst>
-          </a:prstGeom>
-          <a:solidFill>
-            <a:srgbClr val="EEF1F8"/>
-          </a:solidFill>
-          <a:ln>
-            <a:noFill/>
-          </a:ln>
-          <a:effectLst/>
-        </p:spPr>
-        <p:style>
-          <a:lnRef idx="1">
-            <a:schemeClr val="accent1"/>
-          </a:lnRef>
-          <a:fillRef idx="3">
-            <a:schemeClr val="accent1"/>
-          </a:fillRef>
-          <a:effectRef idx="2">
-            <a:schemeClr val="accent1"/>
-          </a:effectRef>
-          <a:fontRef idx="minor">
-            <a:schemeClr val="lt1"/>
-          </a:fontRef>
-        </p:style>
-        <p:txBody>
-          <a:bodyPr rtlCol="0" anchor="ctr"/>
-          <a:lstStyle/>
-          <a:p>
-            <a:pPr algn="ctr"/>
-          </a:p>
-        </p:txBody>
-      </p:sp>
-      <p:sp>
-        <p:nvSpPr>
-          <p:cNvPr id="8" name="Oval 7"/>
-          <p:cNvSpPr/>
-          <p:nvPr/>
-        </p:nvSpPr>
-        <p:spPr>
-          <a:xfrm>
-            <a:off x="6492240" y="1737360"/>
-            <a:ext cx="502920" cy="502920"/>
-          </a:xfrm>
-          <a:prstGeom prst="ellipse">
-            <a:avLst/>
-          </a:prstGeom>
-          <a:solidFill>
-            <a:srgbClr val="14234B"/>
-          </a:solidFill>
-          <a:ln>
-            <a:noFill/>
-          </a:ln>
-          <a:effectLst/>
-        </p:spPr>
-        <p:style>
-          <a:lnRef idx="1">
-            <a:schemeClr val="accent1"/>
-          </a:lnRef>
-          <a:fillRef idx="3">
-            <a:schemeClr val="accent1"/>
-          </a:fillRef>
-          <a:effectRef idx="2">
-            <a:schemeClr val="accent1"/>
-          </a:effectRef>
-          <a:fontRef idx="minor">
-            <a:schemeClr val="lt1"/>
-          </a:fontRef>
-        </p:style>
-        <p:txBody>
-          <a:bodyPr rtlCol="0" anchor="ctr" lIns="0" rIns="0" tIns="0" bIns="0"/>
-          <a:lstStyle/>
-          <a:p>
-            <a:pPr algn="ctr"/>
-            <a:r>
-              <a:rPr sz="1800" b="1">
+              <a:rPr sz="1700" b="0" i="0">
                 <a:solidFill>
                   <a:srgbClr val="FFFFFF"/>
                 </a:solidFill>
                 <a:latin typeface="Cambria"/>
               </a:rPr>
-              <a:t>2</a:t>
-            </a:r>
-          </a:p>
-        </p:txBody>
-      </p:sp>
-      <p:sp>
-        <p:nvSpPr>
-          <p:cNvPr id="9" name="TextBox 8"/>
+              <a:t>sum of p(best match) x ECTS(home course)</a:t>
+            </a:r>
+          </a:p>
+        </p:txBody>
+      </p:sp>
+      <p:sp>
+        <p:nvSpPr>
+          <p:cNvPr id="7" name="TextBox 6"/>
           <p:cNvSpPr txBox="1"/>
           <p:nvPr/>
         </p:nvSpPr>
         <p:spPr>
           <a:xfrm>
-            <a:off x="7223760" y="1764792"/>
-            <a:ext cx="4114800" cy="457200"/>
+            <a:off x="6949440" y="3108960"/>
+            <a:ext cx="4663440" cy="3108960"/>
           </a:xfrm>
           <a:prstGeom prst="rect">
             <a:avLst/>
@@ -12366,38 +13771,15 @@
               </a:spcAft>
             </a:pPr>
             <a:r>
-              <a:rPr sz="1800" b="1" i="0">
-                <a:solidFill>
-                  <a:srgbClr val="14234B"/>
-                </a:solidFill>
-                <a:latin typeface="Cambria"/>
+              <a:rPr sz="1500" b="0" i="0">
+                <a:solidFill>
+                  <a:srgbClr val="1F2433"/>
+                </a:solidFill>
+                <a:latin typeface="Calibri"/>
               </a:rPr>
-              <a:t>No sum without a calibration</a:t>
-            </a:r>
-          </a:p>
-        </p:txBody>
-      </p:sp>
-      <p:sp>
-        <p:nvSpPr>
-          <p:cNvPr id="10" name="TextBox 9"/>
-          <p:cNvSpPr txBox="1"/>
-          <p:nvPr/>
-        </p:nvSpPr>
-        <p:spPr>
-          <a:xfrm>
-            <a:off x="7223760" y="2286000"/>
-            <a:ext cx="4114800" cy="1188720"/>
-          </a:xfrm>
-          <a:prstGeom prst="rect">
-            <a:avLst/>
-          </a:prstGeom>
-          <a:noFill/>
-        </p:spPr>
-        <p:txBody>
-          <a:bodyPr wrap="square" anchor="t" lIns="0" rIns="0" tIns="0" bIns="0">
-            <a:spAutoFit/>
-          </a:bodyPr>
-          <a:lstStyle/>
+              <a:t>Platt scaling on the fused rank score and the embedding cosine gives the probability that a human labelled the pair a match. Rank alone cannot tell a good top hit from the best of a bad lot; the cosine can.</a:t>
+            </a:r>
+          </a:p>
           <a:p>
             <a:pPr algn="l">
               <a:spcAft>
@@ -12405,367 +13787,13 @@
               </a:spcAft>
             </a:pPr>
             <a:r>
-              <a:rPr sz="1400" b="0" i="0">
+              <a:rPr sz="1500" b="0" i="0">
                 <a:solidFill>
                   <a:srgbClr val="1F2433"/>
                 </a:solidFill>
                 <a:latin typeface="Calibri"/>
               </a:rPr>
-              <a:t>The recognition panel will not add up ECTS for a strategy without a fitted calibration. Summing display values would be arithmetic on the wrong thing.</a:t>
-            </a:r>
-          </a:p>
-        </p:txBody>
-      </p:sp>
-      <p:sp>
-        <p:nvSpPr>
-          <p:cNvPr id="11" name="Rounded Rectangle 10"/>
-          <p:cNvSpPr/>
-          <p:nvPr/>
-        </p:nvSpPr>
-        <p:spPr>
-          <a:xfrm>
-            <a:off x="548640" y="3840480"/>
-            <a:ext cx="5394960" cy="2103120"/>
-          </a:xfrm>
-          <a:prstGeom prst="roundRect">
-            <a:avLst>
-              <a:gd name="adj" fmla="val 12000"/>
-            </a:avLst>
-          </a:prstGeom>
-          <a:solidFill>
-            <a:srgbClr val="EEF1F8"/>
-          </a:solidFill>
-          <a:ln>
-            <a:noFill/>
-          </a:ln>
-          <a:effectLst/>
-        </p:spPr>
-        <p:style>
-          <a:lnRef idx="1">
-            <a:schemeClr val="accent1"/>
-          </a:lnRef>
-          <a:fillRef idx="3">
-            <a:schemeClr val="accent1"/>
-          </a:fillRef>
-          <a:effectRef idx="2">
-            <a:schemeClr val="accent1"/>
-          </a:effectRef>
-          <a:fontRef idx="minor">
-            <a:schemeClr val="lt1"/>
-          </a:fontRef>
-        </p:style>
-        <p:txBody>
-          <a:bodyPr rtlCol="0" anchor="ctr"/>
-          <a:lstStyle/>
-          <a:p>
-            <a:pPr algn="ctr"/>
-          </a:p>
-        </p:txBody>
-      </p:sp>
-      <p:sp>
-        <p:nvSpPr>
-          <p:cNvPr id="12" name="Oval 11"/>
-          <p:cNvSpPr/>
-          <p:nvPr/>
-        </p:nvSpPr>
-        <p:spPr>
-          <a:xfrm>
-            <a:off x="822960" y="4114800"/>
-            <a:ext cx="502920" cy="502920"/>
-          </a:xfrm>
-          <a:prstGeom prst="ellipse">
-            <a:avLst/>
-          </a:prstGeom>
-          <a:solidFill>
-            <a:srgbClr val="14234B"/>
-          </a:solidFill>
-          <a:ln>
-            <a:noFill/>
-          </a:ln>
-          <a:effectLst/>
-        </p:spPr>
-        <p:style>
-          <a:lnRef idx="1">
-            <a:schemeClr val="accent1"/>
-          </a:lnRef>
-          <a:fillRef idx="3">
-            <a:schemeClr val="accent1"/>
-          </a:fillRef>
-          <a:effectRef idx="2">
-            <a:schemeClr val="accent1"/>
-          </a:effectRef>
-          <a:fontRef idx="minor">
-            <a:schemeClr val="lt1"/>
-          </a:fontRef>
-        </p:style>
-        <p:txBody>
-          <a:bodyPr rtlCol="0" anchor="ctr" lIns="0" rIns="0" tIns="0" bIns="0"/>
-          <a:lstStyle/>
-          <a:p>
-            <a:pPr algn="ctr"/>
-            <a:r>
-              <a:rPr sz="1800" b="1">
-                <a:solidFill>
-                  <a:srgbClr val="FFFFFF"/>
-                </a:solidFill>
-                <a:latin typeface="Cambria"/>
-              </a:rPr>
-              <a:t>3</a:t>
-            </a:r>
-          </a:p>
-        </p:txBody>
-      </p:sp>
-      <p:sp>
-        <p:nvSpPr>
-          <p:cNvPr id="13" name="TextBox 12"/>
-          <p:cNvSpPr txBox="1"/>
-          <p:nvPr/>
-        </p:nvSpPr>
-        <p:spPr>
-          <a:xfrm>
-            <a:off x="1554480" y="4142232"/>
-            <a:ext cx="4114800" cy="457200"/>
-          </a:xfrm>
-          <a:prstGeom prst="rect">
-            <a:avLst/>
-          </a:prstGeom>
-          <a:noFill/>
-        </p:spPr>
-        <p:txBody>
-          <a:bodyPr wrap="square" anchor="t" lIns="0" rIns="0" tIns="0" bIns="0">
-            <a:spAutoFit/>
-          </a:bodyPr>
-          <a:lstStyle/>
-          <a:p>
-            <a:pPr algn="l">
-              <a:spcAft>
-                <a:spcPts val="800"/>
-              </a:spcAft>
-            </a:pPr>
-            <a:r>
-              <a:rPr sz="1800" b="1" i="0">
-                <a:solidFill>
-                  <a:srgbClr val="14234B"/>
-                </a:solidFill>
-                <a:latin typeface="Cambria"/>
-              </a:rPr>
-              <a:t>Provisional says so</a:t>
-            </a:r>
-          </a:p>
-        </p:txBody>
-      </p:sp>
-      <p:sp>
-        <p:nvSpPr>
-          <p:cNvPr id="14" name="TextBox 13"/>
-          <p:cNvSpPr txBox="1"/>
-          <p:nvPr/>
-        </p:nvSpPr>
-        <p:spPr>
-          <a:xfrm>
-            <a:off x="1554480" y="4663440"/>
-            <a:ext cx="4114800" cy="1188720"/>
-          </a:xfrm>
-          <a:prstGeom prst="rect">
-            <a:avLst/>
-          </a:prstGeom>
-          <a:noFill/>
-        </p:spPr>
-        <p:txBody>
-          <a:bodyPr wrap="square" anchor="t" lIns="0" rIns="0" tIns="0" bIns="0">
-            <a:spAutoFit/>
-          </a:bodyPr>
-          <a:lstStyle/>
-          <a:p>
-            <a:pPr algn="l">
-              <a:spcAft>
-                <a:spcPts val="800"/>
-              </a:spcAft>
-            </a:pPr>
-            <a:r>
-              <a:rPr sz="1400" b="0" i="0">
-                <a:solidFill>
-                  <a:srgbClr val="1F2433"/>
-                </a:solidFill>
-                <a:latin typeface="Calibri"/>
-              </a:rPr>
-              <a:t>While a calibration rests on labels that are not all a person's, every probability and the ECTS estimate carry a warning. The flag is read from the calibration file, not typed into the interface.</a:t>
-            </a:r>
-          </a:p>
-        </p:txBody>
-      </p:sp>
-      <p:sp>
-        <p:nvSpPr>
-          <p:cNvPr id="15" name="Rounded Rectangle 14"/>
-          <p:cNvSpPr/>
-          <p:nvPr/>
-        </p:nvSpPr>
-        <p:spPr>
-          <a:xfrm>
-            <a:off x="6217920" y="3840480"/>
-            <a:ext cx="5394960" cy="2103120"/>
-          </a:xfrm>
-          <a:prstGeom prst="roundRect">
-            <a:avLst>
-              <a:gd name="adj" fmla="val 12000"/>
-            </a:avLst>
-          </a:prstGeom>
-          <a:solidFill>
-            <a:srgbClr val="EEF1F8"/>
-          </a:solidFill>
-          <a:ln>
-            <a:noFill/>
-          </a:ln>
-          <a:effectLst/>
-        </p:spPr>
-        <p:style>
-          <a:lnRef idx="1">
-            <a:schemeClr val="accent1"/>
-          </a:lnRef>
-          <a:fillRef idx="3">
-            <a:schemeClr val="accent1"/>
-          </a:fillRef>
-          <a:effectRef idx="2">
-            <a:schemeClr val="accent1"/>
-          </a:effectRef>
-          <a:fontRef idx="minor">
-            <a:schemeClr val="lt1"/>
-          </a:fontRef>
-        </p:style>
-        <p:txBody>
-          <a:bodyPr rtlCol="0" anchor="ctr"/>
-          <a:lstStyle/>
-          <a:p>
-            <a:pPr algn="ctr"/>
-          </a:p>
-        </p:txBody>
-      </p:sp>
-      <p:sp>
-        <p:nvSpPr>
-          <p:cNvPr id="16" name="Oval 15"/>
-          <p:cNvSpPr/>
-          <p:nvPr/>
-        </p:nvSpPr>
-        <p:spPr>
-          <a:xfrm>
-            <a:off x="6492240" y="4114800"/>
-            <a:ext cx="502920" cy="502920"/>
-          </a:xfrm>
-          <a:prstGeom prst="ellipse">
-            <a:avLst/>
-          </a:prstGeom>
-          <a:solidFill>
-            <a:srgbClr val="14234B"/>
-          </a:solidFill>
-          <a:ln>
-            <a:noFill/>
-          </a:ln>
-          <a:effectLst/>
-        </p:spPr>
-        <p:style>
-          <a:lnRef idx="1">
-            <a:schemeClr val="accent1"/>
-          </a:lnRef>
-          <a:fillRef idx="3">
-            <a:schemeClr val="accent1"/>
-          </a:fillRef>
-          <a:effectRef idx="2">
-            <a:schemeClr val="accent1"/>
-          </a:effectRef>
-          <a:fontRef idx="minor">
-            <a:schemeClr val="lt1"/>
-          </a:fontRef>
-        </p:style>
-        <p:txBody>
-          <a:bodyPr rtlCol="0" anchor="ctr" lIns="0" rIns="0" tIns="0" bIns="0"/>
-          <a:lstStyle/>
-          <a:p>
-            <a:pPr algn="ctr"/>
-            <a:r>
-              <a:rPr sz="1800" b="1">
-                <a:solidFill>
-                  <a:srgbClr val="FFFFFF"/>
-                </a:solidFill>
-                <a:latin typeface="Cambria"/>
-              </a:rPr>
-              <a:t>4</a:t>
-            </a:r>
-          </a:p>
-        </p:txBody>
-      </p:sp>
-      <p:sp>
-        <p:nvSpPr>
-          <p:cNvPr id="17" name="TextBox 16"/>
-          <p:cNvSpPr txBox="1"/>
-          <p:nvPr/>
-        </p:nvSpPr>
-        <p:spPr>
-          <a:xfrm>
-            <a:off x="7223760" y="4142232"/>
-            <a:ext cx="4114800" cy="457200"/>
-          </a:xfrm>
-          <a:prstGeom prst="rect">
-            <a:avLst/>
-          </a:prstGeom>
-          <a:noFill/>
-        </p:spPr>
-        <p:txBody>
-          <a:bodyPr wrap="square" anchor="t" lIns="0" rIns="0" tIns="0" bIns="0">
-            <a:spAutoFit/>
-          </a:bodyPr>
-          <a:lstStyle/>
-          <a:p>
-            <a:pPr algn="l">
-              <a:spcAft>
-                <a:spcPts val="800"/>
-              </a:spcAft>
-            </a:pPr>
-            <a:r>
-              <a:rPr sz="1800" b="1" i="0">
-                <a:solidFill>
-                  <a:srgbClr val="14234B"/>
-                </a:solidFill>
-                <a:latin typeface="Cambria"/>
-              </a:rPr>
-              <a:t>The evaluation page counts</a:t>
-            </a:r>
-          </a:p>
-        </p:txBody>
-      </p:sp>
-      <p:sp>
-        <p:nvSpPr>
-          <p:cNvPr id="18" name="TextBox 17"/>
-          <p:cNvSpPr txBox="1"/>
-          <p:nvPr/>
-        </p:nvSpPr>
-        <p:spPr>
-          <a:xfrm>
-            <a:off x="7223760" y="4663440"/>
-            <a:ext cx="4114800" cy="1188720"/>
-          </a:xfrm>
-          <a:prstGeom prst="rect">
-            <a:avLst/>
-          </a:prstGeom>
-          <a:noFill/>
-        </p:spPr>
-        <p:txBody>
-          <a:bodyPr wrap="square" anchor="t" lIns="0" rIns="0" tIns="0" bIns="0">
-            <a:spAutoFit/>
-          </a:bodyPr>
-          <a:lstStyle/>
-          <a:p>
-            <a:pPr algn="l">
-              <a:spcAft>
-                <a:spcPts val="800"/>
-              </a:spcAft>
-            </a:pPr>
-            <a:r>
-              <a:rPr sz="1400" b="0" i="0">
-                <a:solidFill>
-                  <a:srgbClr val="1F2433"/>
-                </a:solidFill>
-                <a:latin typeface="Calibri"/>
-              </a:rPr>
-              <a:t>It says how many of the 1142 gold labels a person gave (680) and how many a second model gave (462), instead of calling them all checked.</a:t>
+              <a:t>Only the best candidate per home course counts, partial matches count as matches, and an ECTS shortfall is shown rather than hidden.</a:t>
             </a:r>
           </a:p>
         </p:txBody>
